--- a/docs/Nischay_SBI_Hackathon.pptx
+++ b/docs/Nischay_SBI_Hackathon.pptx
@@ -1862,8 +1862,8 @@
         </p:nvSpPr>
         <p:spPr>
           <a:xfrm>
-            <a:off x="7955280" y="914400"/>
-            <a:ext cx="4572000" cy="5486400"/>
+            <a:off x="7863840" y="822960"/>
+            <a:ext cx="4572000" cy="5669280"/>
           </a:xfrm>
           <a:prstGeom prst="rect">
             <a:avLst/>
@@ -1879,7 +1879,7 @@
               <a:buNone/>
             </a:pPr>
             <a:r>
-              <a:rPr lang="en-US" sz="40000" b="1" dirty="0">
+              <a:rPr lang="en-US" sz="42000" b="1" dirty="0">
                 <a:solidFill>
                   <a:srgbClr val="2A2620"/>
                 </a:solidFill>
@@ -1889,7 +1889,7 @@
               </a:rPr>
               <a:t>₹</a:t>
             </a:r>
-            <a:endParaRPr lang="en-US" sz="40000" dirty="0"/>
+            <a:endParaRPr lang="en-US" sz="42000" dirty="0"/>
           </a:p>
         </p:txBody>
       </p:sp>
@@ -1901,7 +1901,7 @@
         </p:nvSpPr>
         <p:spPr>
           <a:xfrm>
-            <a:off x="640080" y="1737360"/>
+            <a:off x="640080" y="1783080"/>
             <a:ext cx="10058400" cy="365760"/>
           </a:xfrm>
           <a:prstGeom prst="rect">
@@ -1926,7 +1926,7 @@
                 <a:ea typeface="Calibri" pitchFamily="34" charset="-122"/>
                 <a:cs typeface="Calibri" pitchFamily="34" charset="-120"/>
               </a:rPr>
-              <a:t>SBI HACKATHON  ·  AGENTIC AI FOR FINANCIAL INCLUSION</a:t>
+              <a:t>SBI HACKATHON   ·   AGENTIC AI FOR FINANCIAL INCLUSION</a:t>
             </a:r>
             <a:endParaRPr lang="en-US" sz="1300" dirty="0"/>
           </a:p>
@@ -1940,7 +1940,7 @@
         </p:nvSpPr>
         <p:spPr>
           <a:xfrm>
-            <a:off x="594360" y="2148840"/>
+            <a:off x="594360" y="2194560"/>
             <a:ext cx="10058400" cy="1554480"/>
           </a:xfrm>
           <a:prstGeom prst="rect">
@@ -1957,7 +1957,7 @@
               <a:buNone/>
             </a:pPr>
             <a:r>
-              <a:rPr lang="en-US" sz="9600" b="1" dirty="0">
+              <a:rPr lang="en-US" sz="10000" b="1" dirty="0">
                 <a:solidFill>
                   <a:srgbClr val="F6F2EA"/>
                 </a:solidFill>
@@ -1967,7 +1967,7 @@
               </a:rPr>
               <a:t>Nischay</a:t>
             </a:r>
-            <a:endParaRPr lang="en-US" sz="9600" dirty="0"/>
+            <a:endParaRPr lang="en-US" sz="10000" dirty="0"/>
           </a:p>
         </p:txBody>
       </p:sp>
@@ -1979,7 +1979,7 @@
         </p:nvSpPr>
         <p:spPr>
           <a:xfrm>
-            <a:off x="640080" y="3703320"/>
+            <a:off x="640080" y="3794760"/>
             <a:ext cx="10058400" cy="640080"/>
           </a:xfrm>
           <a:prstGeom prst="rect">
@@ -2046,8 +2046,8 @@
         </p:nvSpPr>
         <p:spPr>
           <a:xfrm>
-            <a:off x="640080" y="4526280"/>
-            <a:ext cx="9601200" cy="822960"/>
+            <a:off x="640080" y="4617720"/>
+            <a:ext cx="9692640" cy="822960"/>
           </a:xfrm>
           <a:prstGeom prst="rect">
             <a:avLst/>
@@ -2074,7 +2074,7 @@
                 <a:ea typeface="Calibri" pitchFamily="34" charset="-122"/>
                 <a:cs typeface="Calibri" pitchFamily="34" charset="-120"/>
               </a:rPr>
-              <a:t>Getting citizens the government money they're already owed — when a dormant</a:t>
+              <a:t>Getting citizens the government money they are already owed — when a dormant account,</a:t>
             </a:r>
             <a:endParaRPr lang="en-US" sz="1500" dirty="0"/>
           </a:p>
@@ -2094,7 +2094,7 @@
                 <a:ea typeface="Calibri" pitchFamily="34" charset="-122"/>
                 <a:cs typeface="Calibri" pitchFamily="34" charset="-120"/>
               </a:rPr>
-              <a:t>account, an unlinked Aadhaar, or a lapsed KYC would otherwise send it back.</a:t>
+              <a:t>an unlinked Aadhaar, or a lapsed KYC would otherwise send it back.</a:t>
             </a:r>
             <a:endParaRPr lang="en-US" sz="1500" dirty="0"/>
           </a:p>
@@ -2108,7 +2108,7 @@
         </p:nvSpPr>
         <p:spPr>
           <a:xfrm>
-            <a:off x="640080" y="5943600"/>
+            <a:off x="640080" y="5989320"/>
             <a:ext cx="7315200" cy="365760"/>
           </a:xfrm>
           <a:prstGeom prst="rect">
@@ -2179,7 +2179,7 @@
         </p:nvSpPr>
         <p:spPr>
           <a:xfrm>
-            <a:off x="640080" y="502920"/>
+            <a:off x="640080" y="475488"/>
             <a:ext cx="10911535" cy="320040"/>
           </a:xfrm>
           <a:prstGeom prst="rect">
@@ -2196,7 +2196,7 @@
               <a:buNone/>
             </a:pPr>
             <a:r>
-              <a:rPr lang="en-US" sz="1250" b="1" spc="200" kern="0" dirty="0">
+              <a:rPr lang="en-US" sz="1250" b="1" spc="250" kern="0" dirty="0">
                 <a:solidFill>
                   <a:srgbClr val="C4694A"/>
                 </a:solidFill>
@@ -2218,8 +2218,8 @@
         </p:nvSpPr>
         <p:spPr>
           <a:xfrm>
-            <a:off x="640080" y="868680"/>
-            <a:ext cx="10911535" cy="1005840"/>
+            <a:off x="640080" y="841248"/>
+            <a:ext cx="10911535" cy="1188720"/>
           </a:xfrm>
           <a:prstGeom prst="rect">
             <a:avLst/>
@@ -2233,7 +2233,7 @@
           <a:p>
             <a:pPr indent="0" marL="0">
               <a:lnSpc>
-                <a:spcPts val="3570"/>
+                <a:spcPts val="3536"/>
               </a:lnSpc>
               <a:buNone/>
             </a:pPr>
@@ -2297,7 +2297,7 @@
               <a:buNone/>
             </a:pPr>
             <a:r>
-              <a:rPr lang="en-US" sz="1300" b="1" dirty="0">
+              <a:rPr lang="en-US" sz="1250" b="1" dirty="0">
                 <a:solidFill>
                   <a:srgbClr val="A9532F"/>
                 </a:solidFill>
@@ -2307,7 +2307,7 @@
               </a:rPr>
               <a:t>▸</a:t>
             </a:r>
-            <a:endParaRPr lang="en-US" sz="1300" dirty="0"/>
+            <a:endParaRPr lang="en-US" sz="1250" dirty="0"/>
           </a:p>
         </p:txBody>
       </p:sp>
@@ -2359,7 +2359,7 @@
         <p:spPr>
           <a:xfrm>
             <a:off x="1280160" y="2651760"/>
-            <a:ext cx="4754880" cy="1097280"/>
+            <a:ext cx="4754880" cy="1188720"/>
           </a:xfrm>
           <a:prstGeom prst="rect">
             <a:avLst/>
@@ -2386,7 +2386,7 @@
                 <a:ea typeface="Calibri" pitchFamily="34" charset="-122"/>
                 <a:cs typeface="Calibri" pitchFamily="34" charset="-120"/>
               </a:rPr>
-              <a:t>A ~2-min film explains it from scratch, narrated in real Indian voices, at a public URL — nothing to install.</a:t>
+              <a:t>A ~2-minute film explains it from scratch, narrated in real Indian voices, at a public URL — nothing to install.</a:t>
             </a:r>
             <a:endParaRPr lang="en-US" sz="1400" dirty="0"/>
           </a:p>
@@ -2437,7 +2437,7 @@
               <a:buNone/>
             </a:pPr>
             <a:r>
-              <a:rPr lang="en-US" sz="1300" b="1" dirty="0">
+              <a:rPr lang="en-US" sz="1250" b="1" dirty="0">
                 <a:solidFill>
                   <a:srgbClr val="A9532F"/>
                 </a:solidFill>
@@ -2447,7 +2447,7 @@
               </a:rPr>
               <a:t>▸</a:t>
             </a:r>
-            <a:endParaRPr lang="en-US" sz="1300" dirty="0"/>
+            <a:endParaRPr lang="en-US" sz="1250" dirty="0"/>
           </a:p>
         </p:txBody>
       </p:sp>
@@ -2484,7 +2484,7 @@
                 <a:ea typeface="Cambria" pitchFamily="34" charset="-122"/>
                 <a:cs typeface="Cambria" pitchFamily="34" charset="-120"/>
               </a:rPr>
-              <a:t>Real logic</a:t>
+              <a:t>Real, not staged</a:t>
             </a:r>
             <a:endParaRPr lang="en-US" sz="1900" dirty="0"/>
           </a:p>
@@ -2499,7 +2499,7 @@
         <p:spPr>
           <a:xfrm>
             <a:off x="6812280" y="2651760"/>
-            <a:ext cx="4754880" cy="1097280"/>
+            <a:ext cx="4754880" cy="1188720"/>
           </a:xfrm>
           <a:prstGeom prst="rect">
             <a:avLst/>
@@ -2526,7 +2526,7 @@
                 <a:ea typeface="Calibri" pitchFamily="34" charset="-122"/>
                 <a:cs typeface="Calibri" pitchFamily="34" charset="-120"/>
               </a:rPr>
-              <a:t>Name reconciliation and the reactivation gate are real server code; you can watch the match score in the trace.</a:t>
+              <a:t>Name reconciliation, the gate, and the readiness engine are real server code — 66 automated tests, on CI.</a:t>
             </a:r>
             <a:endParaRPr lang="en-US" sz="1400" dirty="0"/>
           </a:p>
@@ -2540,7 +2540,7 @@
         </p:nvSpPr>
         <p:spPr>
           <a:xfrm>
-            <a:off x="640080" y="3977640"/>
+            <a:off x="640080" y="4023360"/>
             <a:ext cx="457200" cy="457200"/>
           </a:xfrm>
           <a:prstGeom prst="ellipse">
@@ -2560,7 +2560,7 @@
         </p:nvSpPr>
         <p:spPr>
           <a:xfrm>
-            <a:off x="640080" y="3977640"/>
+            <a:off x="640080" y="4023360"/>
             <a:ext cx="457200" cy="457200"/>
           </a:xfrm>
           <a:prstGeom prst="rect">
@@ -2577,7 +2577,7 @@
               <a:buNone/>
             </a:pPr>
             <a:r>
-              <a:rPr lang="en-US" sz="1300" b="1" dirty="0">
+              <a:rPr lang="en-US" sz="1250" b="1" dirty="0">
                 <a:solidFill>
                   <a:srgbClr val="A9532F"/>
                 </a:solidFill>
@@ -2587,7 +2587,7 @@
               </a:rPr>
               <a:t>▸</a:t>
             </a:r>
-            <a:endParaRPr lang="en-US" sz="1300" dirty="0"/>
+            <a:endParaRPr lang="en-US" sz="1250" dirty="0"/>
           </a:p>
         </p:txBody>
       </p:sp>
@@ -2599,7 +2599,7 @@
         </p:nvSpPr>
         <p:spPr>
           <a:xfrm>
-            <a:off x="1280160" y="3931920"/>
+            <a:off x="1280160" y="3977640"/>
             <a:ext cx="4754880" cy="365760"/>
           </a:xfrm>
           <a:prstGeom prst="rect">
@@ -2624,7 +2624,7 @@
                 <a:ea typeface="Cambria" pitchFamily="34" charset="-122"/>
                 <a:cs typeface="Cambria" pitchFamily="34" charset="-120"/>
               </a:rPr>
-              <a:t>54 tests</a:t>
+              <a:t>Runs anywhere</a:t>
             </a:r>
             <a:endParaRPr lang="en-US" sz="1900" dirty="0"/>
           </a:p>
@@ -2638,8 +2638,8 @@
         </p:nvSpPr>
         <p:spPr>
           <a:xfrm>
-            <a:off x="1280160" y="4343400"/>
-            <a:ext cx="4754880" cy="1097280"/>
+            <a:off x="1280160" y="4389120"/>
+            <a:ext cx="4754880" cy="1188720"/>
           </a:xfrm>
           <a:prstGeom prst="rect">
             <a:avLst/>
@@ -2666,7 +2666,7 @@
                 <a:ea typeface="Calibri" pitchFamily="34" charset="-122"/>
                 <a:cs typeface="Calibri" pitchFamily="34" charset="-120"/>
               </a:rPr>
-              <a:t>Engine + a security attack-pass, on CI. Runs identically on any machine with Python — auto-picks a free port.</a:t>
+              <a:t>Standard-library Python; one command, auto-picks a free port. One-click deploy to Render, or GitHub Pages.</a:t>
             </a:r>
             <a:endParaRPr lang="en-US" sz="1400" dirty="0"/>
           </a:p>
@@ -2680,7 +2680,7 @@
         </p:nvSpPr>
         <p:spPr>
           <a:xfrm>
-            <a:off x="6172200" y="3977640"/>
+            <a:off x="6172200" y="4023360"/>
             <a:ext cx="457200" cy="457200"/>
           </a:xfrm>
           <a:prstGeom prst="ellipse">
@@ -2700,7 +2700,7 @@
         </p:nvSpPr>
         <p:spPr>
           <a:xfrm>
-            <a:off x="6172200" y="3977640"/>
+            <a:off x="6172200" y="4023360"/>
             <a:ext cx="457200" cy="457200"/>
           </a:xfrm>
           <a:prstGeom prst="rect">
@@ -2717,7 +2717,7 @@
               <a:buNone/>
             </a:pPr>
             <a:r>
-              <a:rPr lang="en-US" sz="1300" b="1" dirty="0">
+              <a:rPr lang="en-US" sz="1250" b="1" dirty="0">
                 <a:solidFill>
                   <a:srgbClr val="A9532F"/>
                 </a:solidFill>
@@ -2727,7 +2727,7 @@
               </a:rPr>
               <a:t>▸</a:t>
             </a:r>
-            <a:endParaRPr lang="en-US" sz="1300" dirty="0"/>
+            <a:endParaRPr lang="en-US" sz="1250" dirty="0"/>
           </a:p>
         </p:txBody>
       </p:sp>
@@ -2739,7 +2739,7 @@
         </p:nvSpPr>
         <p:spPr>
           <a:xfrm>
-            <a:off x="6812280" y="3931920"/>
+            <a:off x="6812280" y="3977640"/>
             <a:ext cx="4754880" cy="365760"/>
           </a:xfrm>
           <a:prstGeom prst="rect">
@@ -2764,7 +2764,7 @@
                 <a:ea typeface="Cambria" pitchFamily="34" charset="-122"/>
                 <a:cs typeface="Cambria" pitchFamily="34" charset="-120"/>
               </a:rPr>
-              <a:t>Honest</a:t>
+              <a:t>Honest data</a:t>
             </a:r>
             <a:endParaRPr lang="en-US" sz="1900" dirty="0"/>
           </a:p>
@@ -2778,8 +2778,8 @@
         </p:nvSpPr>
         <p:spPr>
           <a:xfrm>
-            <a:off x="6812280" y="4343400"/>
-            <a:ext cx="4754880" cy="1097280"/>
+            <a:off x="6812280" y="4389120"/>
+            <a:ext cx="4754880" cy="1188720"/>
           </a:xfrm>
           <a:prstGeom prst="rect">
             <a:avLst/>
@@ -2806,7 +2806,7 @@
                 <a:ea typeface="Calibri" pitchFamily="34" charset="-122"/>
                 <a:cs typeface="Calibri" pitchFamily="34" charset="-120"/>
               </a:rPr>
-              <a:t>Synthetic data, labelled as such on every screen. The logic and the voice are real; only the people are simulated.</a:t>
+              <a:t>Synthetic and labelled as such on every screen. The logic and the voice are real; only the people are simulated.</a:t>
             </a:r>
             <a:endParaRPr lang="en-US" sz="1400" dirty="0"/>
           </a:p>
@@ -2859,7 +2859,7 @@
               <a:buNone/>
             </a:pPr>
             <a:r>
-              <a:rPr lang="en-US" sz="1350" b="1" dirty="0">
+              <a:rPr lang="en-US" sz="1350" dirty="0">
                 <a:solidFill>
                   <a:srgbClr val="EAD9CF"/>
                 </a:solidFill>
@@ -2867,21 +2867,7 @@
                 <a:ea typeface="Courier New" pitchFamily="34" charset="-122"/>
                 <a:cs typeface="Courier New" pitchFamily="34" charset="-120"/>
               </a:rPr>
-              <a:t>github.com/mahakchoradia19-droid/nischay-sbi</a:t>
-            </a:r>
-            <a:pPr indent="0" marL="0">
-              <a:buNone/>
-            </a:pPr>
-            <a:r>
-              <a:rPr lang="en-US" sz="1350" dirty="0">
-                <a:solidFill>
-                  <a:srgbClr val="C9C2B6"/>
-                </a:solidFill>
-                <a:latin typeface="Courier New" pitchFamily="34" charset="0"/>
-                <a:ea typeface="Courier New" pitchFamily="34" charset="-122"/>
-                <a:cs typeface="Courier New" pitchFamily="34" charset="-120"/>
-              </a:rPr>
-              <a:t>     ·     python3 app.py     ·     one-click deploy to Render</a:t>
+              <a:t>github.com/mahakchoradia19-droid/nischay-sbi   ·   python3 app.py   ·   66 tests green</a:t>
             </a:r>
             <a:endParaRPr lang="en-US" sz="1350" dirty="0"/>
           </a:p>
@@ -2927,7 +2913,7 @@
         </p:nvSpPr>
         <p:spPr>
           <a:xfrm>
-            <a:off x="640080" y="502920"/>
+            <a:off x="640080" y="475488"/>
             <a:ext cx="10911535" cy="320040"/>
           </a:xfrm>
           <a:prstGeom prst="rect">
@@ -2944,7 +2930,7 @@
               <a:buNone/>
             </a:pPr>
             <a:r>
-              <a:rPr lang="en-US" sz="1250" b="1" spc="200" kern="0" dirty="0">
+              <a:rPr lang="en-US" sz="1250" b="1" spc="250" kern="0" dirty="0">
                 <a:solidFill>
                   <a:srgbClr val="C4694A"/>
                 </a:solidFill>
@@ -2966,8 +2952,8 @@
         </p:nvSpPr>
         <p:spPr>
           <a:xfrm>
-            <a:off x="640080" y="868680"/>
-            <a:ext cx="10911535" cy="1005840"/>
+            <a:off x="640080" y="841248"/>
+            <a:ext cx="10911535" cy="1188720"/>
           </a:xfrm>
           <a:prstGeom prst="rect">
             <a:avLst/>
@@ -2981,7 +2967,7 @@
           <a:p>
             <a:pPr indent="0" marL="0">
               <a:lnSpc>
-                <a:spcPts val="3570"/>
+                <a:spcPts val="3536"/>
               </a:lnSpc>
               <a:buNone/>
             </a:pPr>
@@ -3001,7 +2987,7 @@
           <a:p>
             <a:pPr indent="0" marL="0">
               <a:lnSpc>
-                <a:spcPts val="3570"/>
+                <a:spcPts val="3536"/>
               </a:lnSpc>
               <a:buNone/>
             </a:pPr>
@@ -3029,7 +3015,7 @@
         <p:spPr>
           <a:xfrm>
             <a:off x="640080" y="2651760"/>
-            <a:ext cx="10058400" cy="914400"/>
+            <a:ext cx="10241280" cy="914400"/>
           </a:xfrm>
           <a:prstGeom prst="rect">
             <a:avLst/>
@@ -3056,7 +3042,7 @@
                 <a:ea typeface="Calibri" pitchFamily="34" charset="-122"/>
                 <a:cs typeface="Calibri" pitchFamily="34" charset="-120"/>
               </a:rPr>
-              <a:t>A 90-day pilot in a single SLBC lead-bank district, with properly permissioned access to the DBT rejection feed and account KYC status.</a:t>
+              <a:t>A 90-day pilot in a single SLBC lead-bank district, with permissioned access to the DBT rejection feed and account KYC status — wired to the same code that runs the demo.</a:t>
             </a:r>
             <a:endParaRPr lang="en-US" sz="1800" dirty="0"/>
           </a:p>
@@ -3195,7 +3181,7 @@
                 <a:ea typeface="Calibri" pitchFamily="34" charset="-122"/>
                 <a:cs typeface="Calibri" pitchFamily="34" charset="-120"/>
               </a:rPr>
-              <a:t>Because rescuing money once is a demo. Making sure a family never misses a payment again is infrastructure.</a:t>
+              <a:t>Rescuing money once is a demo. Making sure a family never misses a payment again is infrastructure.</a:t>
             </a:r>
             <a:endParaRPr lang="en-US" sz="1600" dirty="0"/>
           </a:p>
@@ -3241,7 +3227,7 @@
         </p:nvSpPr>
         <p:spPr>
           <a:xfrm>
-            <a:off x="-1097280" y="1097280"/>
+            <a:off x="-1188720" y="1005840"/>
             <a:ext cx="5486400" cy="5486400"/>
           </a:xfrm>
           <a:prstGeom prst="rect">
@@ -3258,7 +3244,7 @@
               <a:buNone/>
             </a:pPr>
             <a:r>
-              <a:rPr lang="en-US" sz="40000" b="1" dirty="0">
+              <a:rPr lang="en-US" sz="42000" b="1" dirty="0">
                 <a:solidFill>
                   <a:srgbClr val="2A2620"/>
                 </a:solidFill>
@@ -3268,7 +3254,7 @@
               </a:rPr>
               <a:t>₹</a:t>
             </a:r>
-            <a:endParaRPr lang="en-US" sz="40000" dirty="0"/>
+            <a:endParaRPr lang="en-US" sz="42000" dirty="0"/>
           </a:p>
         </p:txBody>
       </p:sp>
@@ -3280,7 +3266,7 @@
         </p:nvSpPr>
         <p:spPr>
           <a:xfrm>
-            <a:off x="640080" y="2377440"/>
+            <a:off x="640080" y="2468880"/>
             <a:ext cx="10789920" cy="822960"/>
           </a:xfrm>
           <a:prstGeom prst="rect">
@@ -3319,7 +3305,7 @@
         </p:nvSpPr>
         <p:spPr>
           <a:xfrm>
-            <a:off x="640080" y="3246120"/>
+            <a:off x="640080" y="3291840"/>
             <a:ext cx="10789920" cy="1280160"/>
           </a:xfrm>
           <a:prstGeom prst="rect">
@@ -3395,7 +3381,7 @@
         </p:nvSpPr>
         <p:spPr>
           <a:xfrm>
-            <a:off x="640080" y="5303520"/>
+            <a:off x="640080" y="5349240"/>
             <a:ext cx="5486400" cy="731520"/>
           </a:xfrm>
           <a:prstGeom prst="rect">
@@ -3434,7 +3420,7 @@
         </p:nvSpPr>
         <p:spPr>
           <a:xfrm>
-            <a:off x="6858000" y="5440680"/>
+            <a:off x="6858000" y="5486400"/>
             <a:ext cx="4663440" cy="457200"/>
           </a:xfrm>
           <a:prstGeom prst="rect">
@@ -3479,7 +3465,7 @@
     <p:bg>
       <p:bgPr>
         <a:solidFill>
-          <a:srgbClr val="FFFFFF"/>
+          <a:srgbClr val="1E1B16"/>
         </a:solidFill>
       </p:bgPr>
     </p:bg>
@@ -3505,7 +3491,7 @@
         </p:nvSpPr>
         <p:spPr>
           <a:xfrm>
-            <a:off x="640080" y="502920"/>
+            <a:off x="640080" y="475488"/>
             <a:ext cx="10911535" cy="320040"/>
           </a:xfrm>
           <a:prstGeom prst="rect">
@@ -3522,7 +3508,7 @@
               <a:buNone/>
             </a:pPr>
             <a:r>
-              <a:rPr lang="en-US" sz="1250" b="1" spc="200" kern="0" dirty="0">
+              <a:rPr lang="en-US" sz="1250" b="1" spc="250" kern="0" dirty="0">
                 <a:solidFill>
                   <a:srgbClr val="C4694A"/>
                 </a:solidFill>
@@ -3530,7 +3516,7 @@
                 <a:ea typeface="Calibri" pitchFamily="34" charset="-122"/>
                 <a:cs typeface="Calibri" pitchFamily="34" charset="-120"/>
               </a:rPr>
-              <a:t>THE PROBLEM</a:t>
+              <a:t>THE PROBLEM, IN ONE NUMBER</a:t>
             </a:r>
             <a:endParaRPr lang="en-US" sz="1250" dirty="0"/>
           </a:p>
@@ -3544,329 +3530,188 @@
         </p:nvSpPr>
         <p:spPr>
           <a:xfrm>
-            <a:off x="640080" y="868680"/>
-            <a:ext cx="10911535" cy="1005840"/>
-          </a:xfrm>
-          <a:prstGeom prst="rect">
-            <a:avLst/>
-          </a:prstGeom>
-          <a:noFill/>
-          <a:ln/>
-        </p:spPr>
-        <p:txBody>
-          <a:bodyPr wrap="square" rtlCol="0" anchor="ctr"/>
-          <a:lstStyle/>
-          <a:p>
-            <a:pPr indent="0" marL="0">
-              <a:lnSpc>
-                <a:spcPts val="3570"/>
-              </a:lnSpc>
-              <a:buNone/>
-            </a:pPr>
-            <a:r>
-              <a:rPr lang="en-US" sz="3400" b="1" dirty="0">
-                <a:solidFill>
-                  <a:srgbClr val="1E1B16"/>
+            <a:off x="640080" y="1737360"/>
+            <a:ext cx="10972800" cy="2194560"/>
+          </a:xfrm>
+          <a:prstGeom prst="rect">
+            <a:avLst/>
+          </a:prstGeom>
+          <a:noFill/>
+          <a:ln/>
+        </p:spPr>
+        <p:txBody>
+          <a:bodyPr wrap="square" rtlCol="0" anchor="ctr"/>
+          <a:lstStyle/>
+          <a:p>
+            <a:pPr indent="0" marL="0">
+              <a:buNone/>
+            </a:pPr>
+            <a:r>
+              <a:rPr lang="en-US" sz="16500" b="1" dirty="0">
+                <a:solidFill>
+                  <a:srgbClr val="C4694A"/>
                 </a:solidFill>
                 <a:latin typeface="Cambria" pitchFamily="34" charset="0"/>
                 <a:ea typeface="Cambria" pitchFamily="34" charset="-122"/>
                 <a:cs typeface="Cambria" pitchFamily="34" charset="-120"/>
               </a:rPr>
-              <a:t>The money is approved.</a:t>
-            </a:r>
-            <a:endParaRPr lang="en-US" sz="3400" dirty="0"/>
-          </a:p>
+              <a:t>72.85%</a:t>
+            </a:r>
+            <a:endParaRPr lang="en-US" sz="16500" dirty="0"/>
+          </a:p>
+        </p:txBody>
+      </p:sp>
+      <p:sp>
+        <p:nvSpPr>
+          <p:cNvPr id="4" name="Text 2"/>
+          <p:cNvSpPr/>
+          <p:nvPr/>
+        </p:nvSpPr>
+        <p:spPr>
+          <a:xfrm>
+            <a:off x="640080" y="4160520"/>
+            <a:ext cx="10789920" cy="914400"/>
+          </a:xfrm>
+          <a:prstGeom prst="rect">
+            <a:avLst/>
+          </a:prstGeom>
+          <a:noFill/>
+          <a:ln/>
+        </p:spPr>
+        <p:txBody>
+          <a:bodyPr wrap="square" rtlCol="0" anchor="ctr"/>
+          <a:lstStyle/>
           <a:p>
             <a:pPr indent="0" marL="0">
               <a:lnSpc>
-                <a:spcPts val="3570"/>
+                <a:spcPts val="3600"/>
               </a:lnSpc>
               <a:buNone/>
             </a:pPr>
             <a:r>
-              <a:rPr lang="en-US" sz="3400" b="1" dirty="0">
-                <a:solidFill>
-                  <a:srgbClr val="1E1B16"/>
+              <a:rPr lang="en-US" sz="3000" dirty="0">
+                <a:solidFill>
+                  <a:srgbClr val="F6F2EA"/>
                 </a:solidFill>
                 <a:latin typeface="Cambria" pitchFamily="34" charset="0"/>
                 <a:ea typeface="Cambria" pitchFamily="34" charset="-122"/>
                 <a:cs typeface="Cambria" pitchFamily="34" charset="-120"/>
               </a:rPr>
-              <a:t>It's sent. It doesn't arrive.</a:t>
-            </a:r>
-            <a:endParaRPr lang="en-US" sz="3400" dirty="0"/>
-          </a:p>
-        </p:txBody>
-      </p:sp>
-      <p:sp>
-        <p:nvSpPr>
-          <p:cNvPr id="4" name="Text 2"/>
-          <p:cNvSpPr/>
-          <p:nvPr/>
-        </p:nvSpPr>
-        <p:spPr>
-          <a:xfrm>
-            <a:off x="640080" y="2286000"/>
-            <a:ext cx="6035040" cy="1645920"/>
-          </a:xfrm>
-          <a:prstGeom prst="rect">
-            <a:avLst/>
-          </a:prstGeom>
-          <a:noFill/>
-          <a:ln/>
-        </p:spPr>
-        <p:txBody>
-          <a:bodyPr wrap="square" rtlCol="0" anchor="ctr"/>
-          <a:lstStyle/>
-          <a:p>
+              <a:t>of India's welfare beneficiaries have hit a payment that </a:t>
+            </a:r>
             <a:pPr indent="0" marL="0">
               <a:lnSpc>
-                <a:spcPts val="2600"/>
+                <a:spcPts val="3600"/>
               </a:lnSpc>
               <a:buNone/>
             </a:pPr>
             <a:r>
-              <a:rPr lang="en-US" sz="1700" dirty="0">
-                <a:solidFill>
-                  <a:srgbClr val="4A443B"/>
+              <a:rPr lang="en-US" sz="3000" i="1" dirty="0">
+                <a:solidFill>
+                  <a:srgbClr val="F6F2EA"/>
+                </a:solidFill>
+                <a:latin typeface="Cambria" pitchFamily="34" charset="0"/>
+                <a:ea typeface="Cambria" pitchFamily="34" charset="-122"/>
+                <a:cs typeface="Cambria" pitchFamily="34" charset="-120"/>
+              </a:rPr>
+              <a:t>didn't arrive</a:t>
+            </a:r>
+            <a:pPr indent="0" marL="0">
+              <a:lnSpc>
+                <a:spcPts val="3600"/>
+              </a:lnSpc>
+              <a:buNone/>
+            </a:pPr>
+            <a:r>
+              <a:rPr lang="en-US" sz="3000" dirty="0">
+                <a:solidFill>
+                  <a:srgbClr val="F6F2EA"/>
+                </a:solidFill>
+                <a:latin typeface="Cambria" pitchFamily="34" charset="0"/>
+                <a:ea typeface="Cambria" pitchFamily="34" charset="-122"/>
+                <a:cs typeface="Cambria" pitchFamily="34" charset="-120"/>
+              </a:rPr>
+              <a:t>.</a:t>
+            </a:r>
+            <a:endParaRPr lang="en-US" sz="3000" dirty="0"/>
+          </a:p>
+        </p:txBody>
+      </p:sp>
+      <p:sp>
+        <p:nvSpPr>
+          <p:cNvPr id="5" name="Text 3"/>
+          <p:cNvSpPr/>
+          <p:nvPr/>
+        </p:nvSpPr>
+        <p:spPr>
+          <a:xfrm>
+            <a:off x="640080" y="5257800"/>
+            <a:ext cx="10515600" cy="548640"/>
+          </a:xfrm>
+          <a:prstGeom prst="rect">
+            <a:avLst/>
+          </a:prstGeom>
+          <a:noFill/>
+          <a:ln/>
+        </p:spPr>
+        <p:txBody>
+          <a:bodyPr wrap="square" rtlCol="0" anchor="ctr"/>
+          <a:lstStyle/>
+          <a:p>
+            <a:pPr indent="0" marL="0">
+              <a:buNone/>
+            </a:pPr>
+            <a:r>
+              <a:rPr lang="en-US" sz="1600" dirty="0">
+                <a:solidFill>
+                  <a:srgbClr val="C9C2B6"/>
                 </a:solidFill>
                 <a:latin typeface="Calibri" pitchFamily="34" charset="0"/>
                 <a:ea typeface="Calibri" pitchFamily="34" charset="-122"/>
                 <a:cs typeface="Calibri" pitchFamily="34" charset="-120"/>
               </a:rPr>
-              <a:t>Every cycle, the government transfers money straight into people's accounts — PM-KISAN for a farmer, MGNREGS wages, a scholarship. It is sanctioned and on its way. For millions of families, it never lands.</a:t>
-            </a:r>
-            <a:endParaRPr lang="en-US" sz="1700" dirty="0"/>
-          </a:p>
-        </p:txBody>
-      </p:sp>
-      <p:sp>
-        <p:nvSpPr>
-          <p:cNvPr id="5" name="Text 3"/>
-          <p:cNvSpPr/>
-          <p:nvPr/>
-        </p:nvSpPr>
-        <p:spPr>
-          <a:xfrm>
-            <a:off x="640080" y="4023360"/>
-            <a:ext cx="6035040" cy="1188720"/>
-          </a:xfrm>
-          <a:prstGeom prst="rect">
-            <a:avLst/>
-          </a:prstGeom>
-          <a:noFill/>
-          <a:ln/>
-        </p:spPr>
-        <p:txBody>
-          <a:bodyPr wrap="square" rtlCol="0" anchor="ctr"/>
-          <a:lstStyle/>
-          <a:p>
-            <a:pPr indent="0" marL="0">
-              <a:lnSpc>
-                <a:spcPts val="2600"/>
-              </a:lnSpc>
-              <a:buNone/>
-            </a:pPr>
-            <a:r>
-              <a:rPr lang="en-US" sz="1700" b="1" dirty="0">
-                <a:solidFill>
-                  <a:srgbClr val="1E1B16"/>
+              <a:t>Not stolen. Not ineligible. The money was approved and sent — and the account couldn't receive it.</a:t>
+            </a:r>
+            <a:endParaRPr lang="en-US" sz="1600" dirty="0"/>
+          </a:p>
+        </p:txBody>
+      </p:sp>
+      <p:sp>
+        <p:nvSpPr>
+          <p:cNvPr id="6" name="Text 4"/>
+          <p:cNvSpPr/>
+          <p:nvPr/>
+        </p:nvSpPr>
+        <p:spPr>
+          <a:xfrm>
+            <a:off x="640080" y="6355080"/>
+            <a:ext cx="10911535" cy="320040"/>
+          </a:xfrm>
+          <a:prstGeom prst="rect">
+            <a:avLst/>
+          </a:prstGeom>
+          <a:noFill/>
+          <a:ln/>
+        </p:spPr>
+        <p:txBody>
+          <a:bodyPr wrap="square" rtlCol="0" anchor="ctr"/>
+          <a:lstStyle/>
+          <a:p>
+            <a:pPr indent="0" marL="0">
+              <a:buNone/>
+            </a:pPr>
+            <a:r>
+              <a:rPr lang="en-US" sz="1150" i="1" dirty="0">
+                <a:solidFill>
+                  <a:srgbClr val="6E665A"/>
                 </a:solidFill>
                 <a:latin typeface="Calibri" pitchFamily="34" charset="0"/>
                 <a:ea typeface="Calibri" pitchFamily="34" charset="-122"/>
                 <a:cs typeface="Calibri" pitchFamily="34" charset="-120"/>
               </a:rPr>
-              <a:t>No alarm rings. No one calls. </a:t>
-            </a:r>
-            <a:pPr indent="0" marL="0">
-              <a:lnSpc>
-                <a:spcPts val="2600"/>
-              </a:lnSpc>
-              <a:buNone/>
-            </a:pPr>
-            <a:r>
-              <a:rPr lang="en-US" sz="1700" dirty="0">
-                <a:solidFill>
-                  <a:srgbClr val="4A443B"/>
-                </a:solidFill>
-                <a:latin typeface="Calibri" pitchFamily="34" charset="0"/>
-                <a:ea typeface="Calibri" pitchFamily="34" charset="-122"/>
-                <a:cs typeface="Calibri" pitchFamily="34" charset="-120"/>
-              </a:rPr>
-              <a:t>The family it was meant for never learns it existed — and next cycle, it happens again.</a:t>
-            </a:r>
-            <a:endParaRPr lang="en-US" sz="1700" dirty="0"/>
-          </a:p>
-        </p:txBody>
-      </p:sp>
-      <p:sp>
-        <p:nvSpPr>
-          <p:cNvPr id="6" name="Shape 4"/>
-          <p:cNvSpPr/>
-          <p:nvPr/>
-        </p:nvSpPr>
-        <p:spPr>
-          <a:xfrm>
-            <a:off x="7589520" y="2377440"/>
-            <a:ext cx="3749040" cy="2468880"/>
-          </a:xfrm>
-          <a:prstGeom prst="roundRect">
-            <a:avLst>
-              <a:gd name="adj" fmla="val 4444"/>
-            </a:avLst>
-          </a:prstGeom>
-          <a:solidFill>
-            <a:srgbClr val="F6F2EA"/>
-          </a:solidFill>
-          <a:ln w="12700">
-            <a:solidFill>
-              <a:srgbClr val="E2DACB"/>
-            </a:solidFill>
-            <a:prstDash val="solid"/>
-          </a:ln>
-          <a:effectLst>
-            <a:outerShdw sx="100000" sy="100000" kx="0" ky="0" algn="bl" rotWithShape="0" blurRad="152400" dist="38100" dir="5400000">
-              <a:srgbClr val="000000">
-                <a:alpha val="18000"/>
-              </a:srgbClr>
-            </a:outerShdw>
-          </a:effectLst>
-        </p:spPr>
-      </p:sp>
-      <p:sp>
-        <p:nvSpPr>
-          <p:cNvPr id="7" name="Text 5"/>
-          <p:cNvSpPr/>
-          <p:nvPr/>
-        </p:nvSpPr>
-        <p:spPr>
-          <a:xfrm>
-            <a:off x="7589520" y="2697480"/>
-            <a:ext cx="3749040" cy="822960"/>
-          </a:xfrm>
-          <a:prstGeom prst="rect">
-            <a:avLst/>
-          </a:prstGeom>
-          <a:noFill/>
-          <a:ln/>
-        </p:spPr>
-        <p:txBody>
-          <a:bodyPr wrap="square" rtlCol="0" anchor="ctr"/>
-          <a:lstStyle/>
-          <a:p>
-            <a:pPr algn="ctr" indent="0" marL="0">
-              <a:buNone/>
-            </a:pPr>
-            <a:r>
-              <a:rPr lang="en-US" sz="4600" b="1" dirty="0">
-                <a:solidFill>
-                  <a:srgbClr val="1E1B16"/>
-                </a:solidFill>
-                <a:latin typeface="Cambria" pitchFamily="34" charset="0"/>
-                <a:ea typeface="Cambria" pitchFamily="34" charset="-122"/>
-                <a:cs typeface="Cambria" pitchFamily="34" charset="-120"/>
-              </a:rPr>
-              <a:t>₹2,000</a:t>
-            </a:r>
-            <a:endParaRPr lang="en-US" sz="4600" dirty="0"/>
-          </a:p>
-        </p:txBody>
-      </p:sp>
-      <p:sp>
-        <p:nvSpPr>
-          <p:cNvPr id="8" name="Text 6"/>
-          <p:cNvSpPr/>
-          <p:nvPr/>
-        </p:nvSpPr>
-        <p:spPr>
-          <a:xfrm>
-            <a:off x="7589520" y="3520440"/>
-            <a:ext cx="3749040" cy="365760"/>
-          </a:xfrm>
-          <a:prstGeom prst="rect">
-            <a:avLst/>
-          </a:prstGeom>
-          <a:noFill/>
-          <a:ln/>
-        </p:spPr>
-        <p:txBody>
-          <a:bodyPr wrap="square" rtlCol="0" anchor="ctr"/>
-          <a:lstStyle/>
-          <a:p>
-            <a:pPr algn="ctr" indent="0" marL="0">
-              <a:buNone/>
-            </a:pPr>
-            <a:r>
-              <a:rPr lang="en-US" sz="1300" dirty="0">
-                <a:solidFill>
-                  <a:srgbClr val="837C6E"/>
-                </a:solidFill>
-                <a:latin typeface="Calibri" pitchFamily="34" charset="0"/>
-                <a:ea typeface="Calibri" pitchFamily="34" charset="-122"/>
-                <a:cs typeface="Calibri" pitchFamily="34" charset="-120"/>
-              </a:rPr>
-              <a:t>PM-KISAN  ·  for Ramesh Kumar</a:t>
-            </a:r>
-            <a:endParaRPr lang="en-US" sz="1300" dirty="0"/>
-          </a:p>
-        </p:txBody>
-      </p:sp>
-      <p:sp>
-        <p:nvSpPr>
-          <p:cNvPr id="9" name="Shape 7"/>
-          <p:cNvSpPr/>
-          <p:nvPr/>
-        </p:nvSpPr>
-        <p:spPr>
-          <a:xfrm rot="-240000">
-            <a:off x="8732520" y="4114800"/>
-            <a:ext cx="1463040" cy="457200"/>
-          </a:xfrm>
-          <a:prstGeom prst="rect">
-            <a:avLst/>
-          </a:prstGeom>
-          <a:solidFill>
-            <a:srgbClr val="B23B32"/>
-          </a:solidFill>
-          <a:ln/>
-        </p:spPr>
-      </p:sp>
-      <p:sp>
-        <p:nvSpPr>
-          <p:cNvPr id="10" name="Text 8"/>
-          <p:cNvSpPr/>
-          <p:nvPr/>
-        </p:nvSpPr>
-        <p:spPr>
-          <a:xfrm rot="-240000">
-            <a:off x="8732520" y="4114800"/>
-            <a:ext cx="1463040" cy="457200"/>
-          </a:xfrm>
-          <a:prstGeom prst="rect">
-            <a:avLst/>
-          </a:prstGeom>
-          <a:noFill/>
-          <a:ln/>
-        </p:spPr>
-        <p:txBody>
-          <a:bodyPr wrap="square" rtlCol="0" anchor="ctr"/>
-          <a:lstStyle/>
-          <a:p>
-            <a:pPr algn="ctr" indent="0" marL="0">
-              <a:buNone/>
-            </a:pPr>
-            <a:r>
-              <a:rPr lang="en-US" sz="1300" b="1" spc="100" kern="0" dirty="0">
-                <a:solidFill>
-                  <a:srgbClr val="FFFFFF"/>
-                </a:solidFill>
-                <a:latin typeface="Calibri" pitchFamily="34" charset="0"/>
-                <a:ea typeface="Calibri" pitchFamily="34" charset="-122"/>
-                <a:cs typeface="Calibri" pitchFamily="34" charset="-120"/>
-              </a:rPr>
-              <a:t>RETURNED</a:t>
-            </a:r>
-            <a:endParaRPr lang="en-US" sz="1300" dirty="0"/>
+              <a:t>Source: Dvara–Haqdarshak beneficiary survey, 2022 (N = 1,477), across five schemes in Assam, Chhattisgarh &amp; Andhra Pradesh.</a:t>
+            </a:r>
+            <a:endParaRPr lang="en-US" sz="1150" dirty="0"/>
           </a:p>
         </p:txBody>
       </p:sp>
@@ -3910,7 +3755,7 @@
         </p:nvSpPr>
         <p:spPr>
           <a:xfrm>
-            <a:off x="640080" y="502920"/>
+            <a:off x="640080" y="475488"/>
             <a:ext cx="10911535" cy="320040"/>
           </a:xfrm>
           <a:prstGeom prst="rect">
@@ -3927,7 +3772,7 @@
               <a:buNone/>
             </a:pPr>
             <a:r>
-              <a:rPr lang="en-US" sz="1250" b="1" spc="200" kern="0" dirty="0">
+              <a:rPr lang="en-US" sz="1250" b="1" spc="250" kern="0" dirty="0">
                 <a:solidFill>
                   <a:srgbClr val="C4694A"/>
                 </a:solidFill>
@@ -3935,7 +3780,7 @@
                 <a:ea typeface="Calibri" pitchFamily="34" charset="-122"/>
                 <a:cs typeface="Calibri" pitchFamily="34" charset="-120"/>
               </a:rPr>
-              <a:t>WHY IT HAPPENS</a:t>
+              <a:t>HOW IT VANISHES</a:t>
             </a:r>
             <a:endParaRPr lang="en-US" sz="1250" dirty="0"/>
           </a:p>
@@ -3949,8 +3794,8 @@
         </p:nvSpPr>
         <p:spPr>
           <a:xfrm>
-            <a:off x="640080" y="868680"/>
-            <a:ext cx="10911535" cy="1005840"/>
+            <a:off x="640080" y="841248"/>
+            <a:ext cx="10911535" cy="1188720"/>
           </a:xfrm>
           <a:prstGeom prst="rect">
             <a:avLst/>
@@ -3964,7 +3809,7 @@
           <a:p>
             <a:pPr indent="0" marL="0">
               <a:lnSpc>
-                <a:spcPts val="3570"/>
+                <a:spcPts val="3536"/>
               </a:lnSpc>
               <a:buNone/>
             </a:pPr>
@@ -3977,97 +3822,193 @@
                 <a:ea typeface="Cambria" pitchFamily="34" charset="-122"/>
                 <a:cs typeface="Cambria" pitchFamily="34" charset="-120"/>
               </a:rPr>
-              <a:t>Three small, ordinary reasons.</a:t>
+              <a:t>Approved. Sent. Returned —</a:t>
             </a:r>
             <a:endParaRPr lang="en-US" sz="3400" dirty="0"/>
           </a:p>
-        </p:txBody>
-      </p:sp>
-      <p:sp>
-        <p:nvSpPr>
-          <p:cNvPr id="4" name="Shape 2"/>
-          <p:cNvSpPr/>
-          <p:nvPr/>
-        </p:nvSpPr>
-        <p:spPr>
-          <a:xfrm>
-            <a:off x="640080" y="2286000"/>
-            <a:ext cx="685800" cy="685800"/>
-          </a:xfrm>
-          <a:prstGeom prst="ellipse">
-            <a:avLst/>
-          </a:prstGeom>
-          <a:solidFill>
-            <a:srgbClr val="C4694A"/>
-          </a:solidFill>
-          <a:ln/>
-        </p:spPr>
-      </p:sp>
-      <p:sp>
-        <p:nvSpPr>
-          <p:cNvPr id="5" name="Text 3"/>
-          <p:cNvSpPr/>
-          <p:nvPr/>
-        </p:nvSpPr>
-        <p:spPr>
-          <a:xfrm>
-            <a:off x="640080" y="2286000"/>
-            <a:ext cx="685800" cy="685800"/>
-          </a:xfrm>
-          <a:prstGeom prst="rect">
-            <a:avLst/>
-          </a:prstGeom>
-          <a:noFill/>
-          <a:ln/>
-        </p:spPr>
-        <p:txBody>
-          <a:bodyPr wrap="square" rtlCol="0" anchor="ctr"/>
-          <a:lstStyle/>
-          <a:p>
-            <a:pPr algn="ctr" indent="0" marL="0">
-              <a:buNone/>
-            </a:pPr>
-            <a:r>
-              <a:rPr lang="en-US" sz="1950" b="1" dirty="0">
-                <a:solidFill>
-                  <a:srgbClr val="FFFFFF"/>
+          <a:p>
+            <a:pPr indent="0" marL="0">
+              <a:lnSpc>
+                <a:spcPts val="3536"/>
+              </a:lnSpc>
+              <a:buNone/>
+            </a:pPr>
+            <a:r>
+              <a:rPr lang="en-US" sz="3400" b="1" dirty="0">
+                <a:solidFill>
+                  <a:srgbClr val="1E1B16"/>
                 </a:solidFill>
                 <a:latin typeface="Cambria" pitchFamily="34" charset="0"/>
                 <a:ea typeface="Cambria" pitchFamily="34" charset="-122"/>
                 <a:cs typeface="Cambria" pitchFamily="34" charset="-120"/>
               </a:rPr>
-              <a:t>1</a:t>
-            </a:r>
-            <a:endParaRPr lang="en-US" sz="1950" dirty="0"/>
-          </a:p>
-        </p:txBody>
-      </p:sp>
-      <p:sp>
-        <p:nvSpPr>
-          <p:cNvPr id="6" name="Text 4"/>
-          <p:cNvSpPr/>
-          <p:nvPr/>
-        </p:nvSpPr>
-        <p:spPr>
-          <a:xfrm>
-            <a:off x="1600200" y="2267712"/>
-            <a:ext cx="9601200" cy="457200"/>
-          </a:xfrm>
-          <a:prstGeom prst="rect">
-            <a:avLst/>
-          </a:prstGeom>
-          <a:noFill/>
-          <a:ln/>
-        </p:spPr>
-        <p:txBody>
-          <a:bodyPr wrap="square" rtlCol="0" anchor="ctr"/>
-          <a:lstStyle/>
-          <a:p>
-            <a:pPr indent="0" marL="0">
-              <a:buNone/>
-            </a:pPr>
-            <a:r>
-              <a:rPr lang="en-US" sz="2100" b="1" dirty="0">
+              <a:t>and no one is told.</a:t>
+            </a:r>
+            <a:endParaRPr lang="en-US" sz="3400" dirty="0"/>
+          </a:p>
+        </p:txBody>
+      </p:sp>
+      <p:sp>
+        <p:nvSpPr>
+          <p:cNvPr id="4" name="Text 2"/>
+          <p:cNvSpPr/>
+          <p:nvPr/>
+        </p:nvSpPr>
+        <p:spPr>
+          <a:xfrm>
+            <a:off x="640080" y="2331720"/>
+            <a:ext cx="6035040" cy="1463040"/>
+          </a:xfrm>
+          <a:prstGeom prst="rect">
+            <a:avLst/>
+          </a:prstGeom>
+          <a:noFill/>
+          <a:ln/>
+        </p:spPr>
+        <p:txBody>
+          <a:bodyPr wrap="square" rtlCol="0" anchor="ctr"/>
+          <a:lstStyle/>
+          <a:p>
+            <a:pPr indent="0" marL="0">
+              <a:lnSpc>
+                <a:spcPts val="2600"/>
+              </a:lnSpc>
+              <a:buNone/>
+            </a:pPr>
+            <a:r>
+              <a:rPr lang="en-US" sz="1700" dirty="0">
+                <a:solidFill>
+                  <a:srgbClr val="4A443B"/>
+                </a:solidFill>
+                <a:latin typeface="Calibri" pitchFamily="34" charset="0"/>
+                <a:ea typeface="Calibri" pitchFamily="34" charset="-122"/>
+                <a:cs typeface="Calibri" pitchFamily="34" charset="-120"/>
+              </a:rPr>
+              <a:t>The government's system releases the money into a single bank account. If that account has a small technical problem, the payment is simply rejected and turns around.</a:t>
+            </a:r>
+            <a:endParaRPr lang="en-US" sz="1700" dirty="0"/>
+          </a:p>
+        </p:txBody>
+      </p:sp>
+      <p:sp>
+        <p:nvSpPr>
+          <p:cNvPr id="5" name="Text 3"/>
+          <p:cNvSpPr/>
+          <p:nvPr/>
+        </p:nvSpPr>
+        <p:spPr>
+          <a:xfrm>
+            <a:off x="640080" y="3977640"/>
+            <a:ext cx="6035040" cy="1188720"/>
+          </a:xfrm>
+          <a:prstGeom prst="rect">
+            <a:avLst/>
+          </a:prstGeom>
+          <a:noFill/>
+          <a:ln/>
+        </p:spPr>
+        <p:txBody>
+          <a:bodyPr wrap="square" rtlCol="0" anchor="ctr"/>
+          <a:lstStyle/>
+          <a:p>
+            <a:pPr indent="0" marL="0">
+              <a:lnSpc>
+                <a:spcPts val="2600"/>
+              </a:lnSpc>
+              <a:buNone/>
+            </a:pPr>
+            <a:r>
+              <a:rPr lang="en-US" sz="1700" b="1" dirty="0">
+                <a:solidFill>
+                  <a:srgbClr val="1E1B16"/>
+                </a:solidFill>
+                <a:latin typeface="Calibri" pitchFamily="34" charset="0"/>
+                <a:ea typeface="Calibri" pitchFamily="34" charset="-122"/>
+                <a:cs typeface="Calibri" pitchFamily="34" charset="-120"/>
+              </a:rPr>
+              <a:t>No alarm rings. No one calls. </a:t>
+            </a:r>
+            <a:pPr indent="0" marL="0">
+              <a:lnSpc>
+                <a:spcPts val="2600"/>
+              </a:lnSpc>
+              <a:buNone/>
+            </a:pPr>
+            <a:r>
+              <a:rPr lang="en-US" sz="1700" dirty="0">
+                <a:solidFill>
+                  <a:srgbClr val="4A443B"/>
+                </a:solidFill>
+                <a:latin typeface="Calibri" pitchFamily="34" charset="0"/>
+                <a:ea typeface="Calibri" pitchFamily="34" charset="-122"/>
+                <a:cs typeface="Calibri" pitchFamily="34" charset="-120"/>
+              </a:rPr>
+              <a:t>The family it was meant for never learns it existed — and next cycle, it happens again.</a:t>
+            </a:r>
+            <a:endParaRPr lang="en-US" sz="1700" dirty="0"/>
+          </a:p>
+        </p:txBody>
+      </p:sp>
+      <p:sp>
+        <p:nvSpPr>
+          <p:cNvPr id="6" name="Shape 4"/>
+          <p:cNvSpPr/>
+          <p:nvPr/>
+        </p:nvSpPr>
+        <p:spPr>
+          <a:xfrm>
+            <a:off x="7635240" y="2468880"/>
+            <a:ext cx="3749040" cy="2377440"/>
+          </a:xfrm>
+          <a:prstGeom prst="roundRect">
+            <a:avLst>
+              <a:gd name="adj" fmla="val 4615"/>
+            </a:avLst>
+          </a:prstGeom>
+          <a:solidFill>
+            <a:srgbClr val="F6F2EA"/>
+          </a:solidFill>
+          <a:ln w="12700">
+            <a:solidFill>
+              <a:srgbClr val="E2DACB"/>
+            </a:solidFill>
+            <a:prstDash val="solid"/>
+          </a:ln>
+          <a:effectLst>
+            <a:outerShdw sx="100000" sy="100000" kx="0" ky="0" algn="bl" rotWithShape="0" blurRad="152400" dist="38100" dir="5400000">
+              <a:srgbClr val="000000">
+                <a:alpha val="16000"/>
+              </a:srgbClr>
+            </a:outerShdw>
+          </a:effectLst>
+        </p:spPr>
+      </p:sp>
+      <p:sp>
+        <p:nvSpPr>
+          <p:cNvPr id="7" name="Text 5"/>
+          <p:cNvSpPr/>
+          <p:nvPr/>
+        </p:nvSpPr>
+        <p:spPr>
+          <a:xfrm>
+            <a:off x="7635240" y="2743200"/>
+            <a:ext cx="3749040" cy="822960"/>
+          </a:xfrm>
+          <a:prstGeom prst="rect">
+            <a:avLst/>
+          </a:prstGeom>
+          <a:noFill/>
+          <a:ln/>
+        </p:spPr>
+        <p:txBody>
+          <a:bodyPr wrap="square" rtlCol="0" anchor="ctr"/>
+          <a:lstStyle/>
+          <a:p>
+            <a:pPr algn="ctr" indent="0" marL="0">
+              <a:buNone/>
+            </a:pPr>
+            <a:r>
+              <a:rPr lang="en-US" sz="4400" b="1" dirty="0">
                 <a:solidFill>
                   <a:srgbClr val="1E1B16"/>
                 </a:solidFill>
@@ -4075,81 +4016,81 @@
                 <a:ea typeface="Cambria" pitchFamily="34" charset="-122"/>
                 <a:cs typeface="Cambria" pitchFamily="34" charset="-120"/>
               </a:rPr>
-              <a:t>The account went dormant</a:t>
-            </a:r>
-            <a:endParaRPr lang="en-US" sz="2100" dirty="0"/>
-          </a:p>
-        </p:txBody>
-      </p:sp>
-      <p:sp>
-        <p:nvSpPr>
-          <p:cNvPr id="7" name="Text 5"/>
-          <p:cNvSpPr/>
-          <p:nvPr/>
-        </p:nvSpPr>
-        <p:spPr>
-          <a:xfrm>
-            <a:off x="1600200" y="2670048"/>
-            <a:ext cx="9601200" cy="457200"/>
-          </a:xfrm>
-          <a:prstGeom prst="rect">
-            <a:avLst/>
-          </a:prstGeom>
-          <a:noFill/>
-          <a:ln/>
-        </p:spPr>
-        <p:txBody>
-          <a:bodyPr wrap="square" rtlCol="0" anchor="ctr"/>
-          <a:lstStyle/>
-          <a:p>
-            <a:pPr indent="0" marL="0">
-              <a:buNone/>
-            </a:pPr>
-            <a:r>
-              <a:rPr lang="en-US" sz="1500" dirty="0">
-                <a:solidFill>
-                  <a:srgbClr val="4A443B"/>
+              <a:t>₹2,000</a:t>
+            </a:r>
+            <a:endParaRPr lang="en-US" sz="4400" dirty="0"/>
+          </a:p>
+        </p:txBody>
+      </p:sp>
+      <p:sp>
+        <p:nvSpPr>
+          <p:cNvPr id="8" name="Text 6"/>
+          <p:cNvSpPr/>
+          <p:nvPr/>
+        </p:nvSpPr>
+        <p:spPr>
+          <a:xfrm>
+            <a:off x="7635240" y="3566160"/>
+            <a:ext cx="3749040" cy="365760"/>
+          </a:xfrm>
+          <a:prstGeom prst="rect">
+            <a:avLst/>
+          </a:prstGeom>
+          <a:noFill/>
+          <a:ln/>
+        </p:spPr>
+        <p:txBody>
+          <a:bodyPr wrap="square" rtlCol="0" anchor="ctr"/>
+          <a:lstStyle/>
+          <a:p>
+            <a:pPr algn="ctr" indent="0" marL="0">
+              <a:buNone/>
+            </a:pPr>
+            <a:r>
+              <a:rPr lang="en-US" sz="1300" dirty="0">
+                <a:solidFill>
+                  <a:srgbClr val="837C6E"/>
                 </a:solidFill>
                 <a:latin typeface="Calibri" pitchFamily="34" charset="0"/>
                 <a:ea typeface="Calibri" pitchFamily="34" charset="-122"/>
                 <a:cs typeface="Calibri" pitchFamily="34" charset="-120"/>
               </a:rPr>
-              <a:t>Unused for months, so the credit is turned away or sits unclaimed.</a:t>
-            </a:r>
-            <a:endParaRPr lang="en-US" sz="1500" dirty="0"/>
-          </a:p>
-        </p:txBody>
-      </p:sp>
-      <p:sp>
-        <p:nvSpPr>
-          <p:cNvPr id="8" name="Shape 6"/>
-          <p:cNvSpPr/>
-          <p:nvPr/>
-        </p:nvSpPr>
-        <p:spPr>
-          <a:xfrm>
-            <a:off x="640080" y="3520440"/>
-            <a:ext cx="685800" cy="685800"/>
-          </a:xfrm>
-          <a:prstGeom prst="ellipse">
+              <a:t>PM-KISAN  ·  for Ramesh Kumar</a:t>
+            </a:r>
+            <a:endParaRPr lang="en-US" sz="1300" dirty="0"/>
+          </a:p>
+        </p:txBody>
+      </p:sp>
+      <p:sp>
+        <p:nvSpPr>
+          <p:cNvPr id="9" name="Shape 7"/>
+          <p:cNvSpPr/>
+          <p:nvPr/>
+        </p:nvSpPr>
+        <p:spPr>
+          <a:xfrm rot="-240000">
+            <a:off x="8778240" y="4069080"/>
+            <a:ext cx="1463040" cy="457200"/>
+          </a:xfrm>
+          <a:prstGeom prst="rect">
             <a:avLst/>
           </a:prstGeom>
           <a:solidFill>
-            <a:srgbClr val="C4694A"/>
+            <a:srgbClr val="B23B32"/>
           </a:solidFill>
           <a:ln/>
         </p:spPr>
       </p:sp>
       <p:sp>
         <p:nvSpPr>
-          <p:cNvPr id="9" name="Text 7"/>
-          <p:cNvSpPr/>
-          <p:nvPr/>
-        </p:nvSpPr>
-        <p:spPr>
-          <a:xfrm>
-            <a:off x="640080" y="3520440"/>
-            <a:ext cx="685800" cy="685800"/>
+          <p:cNvPr id="10" name="Text 8"/>
+          <p:cNvSpPr/>
+          <p:nvPr/>
+        </p:nvSpPr>
+        <p:spPr>
+          <a:xfrm rot="-240000">
+            <a:off x="8778240" y="4069080"/>
+            <a:ext cx="1463040" cy="457200"/>
           </a:xfrm>
           <a:prstGeom prst="rect">
             <a:avLst/>
@@ -4165,285 +4106,17 @@
               <a:buNone/>
             </a:pPr>
             <a:r>
-              <a:rPr lang="en-US" sz="1950" b="1" dirty="0">
+              <a:rPr lang="en-US" sz="1300" b="1" spc="100" kern="0" dirty="0">
                 <a:solidFill>
                   <a:srgbClr val="FFFFFF"/>
-                </a:solidFill>
-                <a:latin typeface="Cambria" pitchFamily="34" charset="0"/>
-                <a:ea typeface="Cambria" pitchFamily="34" charset="-122"/>
-                <a:cs typeface="Cambria" pitchFamily="34" charset="-120"/>
-              </a:rPr>
-              <a:t>2</a:t>
-            </a:r>
-            <a:endParaRPr lang="en-US" sz="1950" dirty="0"/>
-          </a:p>
-        </p:txBody>
-      </p:sp>
-      <p:sp>
-        <p:nvSpPr>
-          <p:cNvPr id="10" name="Text 8"/>
-          <p:cNvSpPr/>
-          <p:nvPr/>
-        </p:nvSpPr>
-        <p:spPr>
-          <a:xfrm>
-            <a:off x="1600200" y="3502152"/>
-            <a:ext cx="9601200" cy="457200"/>
-          </a:xfrm>
-          <a:prstGeom prst="rect">
-            <a:avLst/>
-          </a:prstGeom>
-          <a:noFill/>
-          <a:ln/>
-        </p:spPr>
-        <p:txBody>
-          <a:bodyPr wrap="square" rtlCol="0" anchor="ctr"/>
-          <a:lstStyle/>
-          <a:p>
-            <a:pPr indent="0" marL="0">
-              <a:buNone/>
-            </a:pPr>
-            <a:r>
-              <a:rPr lang="en-US" sz="2100" b="1" dirty="0">
-                <a:solidFill>
-                  <a:srgbClr val="1E1B16"/>
-                </a:solidFill>
-                <a:latin typeface="Cambria" pitchFamily="34" charset="0"/>
-                <a:ea typeface="Cambria" pitchFamily="34" charset="-122"/>
-                <a:cs typeface="Cambria" pitchFamily="34" charset="-120"/>
-              </a:rPr>
-              <a:t>The Aadhaar was never linked</a:t>
-            </a:r>
-            <a:endParaRPr lang="en-US" sz="2100" dirty="0"/>
-          </a:p>
-        </p:txBody>
-      </p:sp>
-      <p:sp>
-        <p:nvSpPr>
-          <p:cNvPr id="11" name="Text 9"/>
-          <p:cNvSpPr/>
-          <p:nvPr/>
-        </p:nvSpPr>
-        <p:spPr>
-          <a:xfrm>
-            <a:off x="1600200" y="3904488"/>
-            <a:ext cx="9601200" cy="457200"/>
-          </a:xfrm>
-          <a:prstGeom prst="rect">
-            <a:avLst/>
-          </a:prstGeom>
-          <a:noFill/>
-          <a:ln/>
-        </p:spPr>
-        <p:txBody>
-          <a:bodyPr wrap="square" rtlCol="0" anchor="ctr"/>
-          <a:lstStyle/>
-          <a:p>
-            <a:pPr indent="0" marL="0">
-              <a:buNone/>
-            </a:pPr>
-            <a:r>
-              <a:rPr lang="en-US" sz="1500" dirty="0">
-                <a:solidFill>
-                  <a:srgbClr val="4A443B"/>
                 </a:solidFill>
                 <a:latin typeface="Calibri" pitchFamily="34" charset="0"/>
                 <a:ea typeface="Calibri" pitchFamily="34" charset="-122"/>
                 <a:cs typeface="Calibri" pitchFamily="34" charset="-120"/>
               </a:rPr>
-              <a:t>Not seeded in the mapper that routes the payment, so the rails reject it.</a:t>
-            </a:r>
-            <a:endParaRPr lang="en-US" sz="1500" dirty="0"/>
-          </a:p>
-        </p:txBody>
-      </p:sp>
-      <p:sp>
-        <p:nvSpPr>
-          <p:cNvPr id="12" name="Shape 10"/>
-          <p:cNvSpPr/>
-          <p:nvPr/>
-        </p:nvSpPr>
-        <p:spPr>
-          <a:xfrm>
-            <a:off x="640080" y="4754880"/>
-            <a:ext cx="685800" cy="685800"/>
-          </a:xfrm>
-          <a:prstGeom prst="ellipse">
-            <a:avLst/>
-          </a:prstGeom>
-          <a:solidFill>
-            <a:srgbClr val="C4694A"/>
-          </a:solidFill>
-          <a:ln/>
-        </p:spPr>
-      </p:sp>
-      <p:sp>
-        <p:nvSpPr>
-          <p:cNvPr id="13" name="Text 11"/>
-          <p:cNvSpPr/>
-          <p:nvPr/>
-        </p:nvSpPr>
-        <p:spPr>
-          <a:xfrm>
-            <a:off x="640080" y="4754880"/>
-            <a:ext cx="685800" cy="685800"/>
-          </a:xfrm>
-          <a:prstGeom prst="rect">
-            <a:avLst/>
-          </a:prstGeom>
-          <a:noFill/>
-          <a:ln/>
-        </p:spPr>
-        <p:txBody>
-          <a:bodyPr wrap="square" rtlCol="0" anchor="ctr"/>
-          <a:lstStyle/>
-          <a:p>
-            <a:pPr algn="ctr" indent="0" marL="0">
-              <a:buNone/>
-            </a:pPr>
-            <a:r>
-              <a:rPr lang="en-US" sz="1950" b="1" dirty="0">
-                <a:solidFill>
-                  <a:srgbClr val="FFFFFF"/>
-                </a:solidFill>
-                <a:latin typeface="Cambria" pitchFamily="34" charset="0"/>
-                <a:ea typeface="Cambria" pitchFamily="34" charset="-122"/>
-                <a:cs typeface="Cambria" pitchFamily="34" charset="-120"/>
-              </a:rPr>
-              <a:t>3</a:t>
-            </a:r>
-            <a:endParaRPr lang="en-US" sz="1950" dirty="0"/>
-          </a:p>
-        </p:txBody>
-      </p:sp>
-      <p:sp>
-        <p:nvSpPr>
-          <p:cNvPr id="14" name="Text 12"/>
-          <p:cNvSpPr/>
-          <p:nvPr/>
-        </p:nvSpPr>
-        <p:spPr>
-          <a:xfrm>
-            <a:off x="1600200" y="4736592"/>
-            <a:ext cx="9601200" cy="457200"/>
-          </a:xfrm>
-          <a:prstGeom prst="rect">
-            <a:avLst/>
-          </a:prstGeom>
-          <a:noFill/>
-          <a:ln/>
-        </p:spPr>
-        <p:txBody>
-          <a:bodyPr wrap="square" rtlCol="0" anchor="ctr"/>
-          <a:lstStyle/>
-          <a:p>
-            <a:pPr indent="0" marL="0">
-              <a:buNone/>
-            </a:pPr>
-            <a:r>
-              <a:rPr lang="en-US" sz="2100" b="1" dirty="0">
-                <a:solidFill>
-                  <a:srgbClr val="1E1B16"/>
-                </a:solidFill>
-                <a:latin typeface="Cambria" pitchFamily="34" charset="0"/>
-                <a:ea typeface="Cambria" pitchFamily="34" charset="-122"/>
-                <a:cs typeface="Cambria" pitchFamily="34" charset="-120"/>
-              </a:rPr>
-              <a:t>The KYC lapsed</a:t>
-            </a:r>
-            <a:endParaRPr lang="en-US" sz="2100" dirty="0"/>
-          </a:p>
-        </p:txBody>
-      </p:sp>
-      <p:sp>
-        <p:nvSpPr>
-          <p:cNvPr id="15" name="Text 13"/>
-          <p:cNvSpPr/>
-          <p:nvPr/>
-        </p:nvSpPr>
-        <p:spPr>
-          <a:xfrm>
-            <a:off x="1600200" y="5138928"/>
-            <a:ext cx="9601200" cy="457200"/>
-          </a:xfrm>
-          <a:prstGeom prst="rect">
-            <a:avLst/>
-          </a:prstGeom>
-          <a:noFill/>
-          <a:ln/>
-        </p:spPr>
-        <p:txBody>
-          <a:bodyPr wrap="square" rtlCol="0" anchor="ctr"/>
-          <a:lstStyle/>
-          <a:p>
-            <a:pPr indent="0" marL="0">
-              <a:buNone/>
-            </a:pPr>
-            <a:r>
-              <a:rPr lang="en-US" sz="1500" dirty="0">
-                <a:solidFill>
-                  <a:srgbClr val="4A443B"/>
-                </a:solidFill>
-                <a:latin typeface="Calibri" pitchFamily="34" charset="0"/>
-                <a:ea typeface="Calibri" pitchFamily="34" charset="-122"/>
-                <a:cs typeface="Calibri" pitchFamily="34" charset="-120"/>
-              </a:rPr>
-              <a:t>A periodic identity check expired, and the account froze against new credits.</a:t>
-            </a:r>
-            <a:endParaRPr lang="en-US" sz="1500" dirty="0"/>
-          </a:p>
-        </p:txBody>
-      </p:sp>
-      <p:sp>
-        <p:nvSpPr>
-          <p:cNvPr id="16" name="Text 14"/>
-          <p:cNvSpPr/>
-          <p:nvPr/>
-        </p:nvSpPr>
-        <p:spPr>
-          <a:xfrm>
-            <a:off x="640080" y="5989320"/>
-            <a:ext cx="10881360" cy="548640"/>
-          </a:xfrm>
-          <a:prstGeom prst="rect">
-            <a:avLst/>
-          </a:prstGeom>
-          <a:noFill/>
-          <a:ln/>
-        </p:spPr>
-        <p:txBody>
-          <a:bodyPr wrap="square" rtlCol="0" anchor="ctr"/>
-          <a:lstStyle/>
-          <a:p>
-            <a:pPr indent="0" marL="0">
-              <a:buNone/>
-            </a:pPr>
-            <a:r>
-              <a:rPr lang="en-US" sz="1550" b="1" dirty="0">
-                <a:solidFill>
-                  <a:srgbClr val="A9532F"/>
-                </a:solidFill>
-                <a:latin typeface="Calibri" pitchFamily="34" charset="0"/>
-                <a:ea typeface="Calibri" pitchFamily="34" charset="-122"/>
-                <a:cs typeface="Calibri" pitchFamily="34" charset="-120"/>
-              </a:rPr>
-              <a:t>None of these is fraud. None is the person's fault. </a:t>
-            </a:r>
-            <a:pPr indent="0" marL="0">
-              <a:buNone/>
-            </a:pPr>
-            <a:r>
-              <a:rPr lang="en-US" sz="1550" dirty="0">
-                <a:solidFill>
-                  <a:srgbClr val="4A443B"/>
-                </a:solidFill>
-                <a:latin typeface="Calibri" pitchFamily="34" charset="0"/>
-                <a:ea typeface="Calibri" pitchFamily="34" charset="-122"/>
-                <a:cs typeface="Calibri" pitchFamily="34" charset="-120"/>
-              </a:rPr>
-              <a:t>And the bank's own systems can see every one of them, days before the cycle runs.</a:t>
-            </a:r>
-            <a:endParaRPr lang="en-US" sz="1550" dirty="0"/>
+              <a:t>RETURNED</a:t>
+            </a:r>
+            <a:endParaRPr lang="en-US" sz="1300" dirty="0"/>
           </a:p>
         </p:txBody>
       </p:sp>
@@ -4458,6 +4131,593 @@
 <file path=ppt/slides/slide4.xml><?xml version="1.0" encoding="utf-8"?>
 <p:sld xmlns:a="http://schemas.openxmlformats.org/drawingml/2006/main" xmlns:r="http://schemas.openxmlformats.org/officeDocument/2006/relationships" xmlns:p="http://schemas.openxmlformats.org/presentationml/2006/main">
   <p:cSld name="Slide 4">
+    <p:bg>
+      <p:bgPr>
+        <a:solidFill>
+          <a:srgbClr val="FFFFFF"/>
+        </a:solidFill>
+      </p:bgPr>
+    </p:bg>
+    <p:spTree>
+      <p:nvGrpSpPr>
+        <p:cNvPr id="1" name=""/>
+        <p:cNvGrpSpPr/>
+        <p:nvPr/>
+      </p:nvGrpSpPr>
+      <p:grpSpPr>
+        <a:xfrm>
+          <a:off x="0" y="0"/>
+          <a:ext cx="0" cy="0"/>
+          <a:chOff x="0" y="0"/>
+          <a:chExt cx="0" cy="0"/>
+        </a:xfrm>
+      </p:grpSpPr>
+      <p:sp>
+        <p:nvSpPr>
+          <p:cNvPr id="2" name="Text 0"/>
+          <p:cNvSpPr/>
+          <p:nvPr/>
+        </p:nvSpPr>
+        <p:spPr>
+          <a:xfrm>
+            <a:off x="640080" y="475488"/>
+            <a:ext cx="10911535" cy="320040"/>
+          </a:xfrm>
+          <a:prstGeom prst="rect">
+            <a:avLst/>
+          </a:prstGeom>
+          <a:noFill/>
+          <a:ln/>
+        </p:spPr>
+        <p:txBody>
+          <a:bodyPr wrap="square" rtlCol="0" anchor="ctr"/>
+          <a:lstStyle/>
+          <a:p>
+            <a:pPr indent="0" marL="0">
+              <a:buNone/>
+            </a:pPr>
+            <a:r>
+              <a:rPr lang="en-US" sz="1250" b="1" spc="250" kern="0" dirty="0">
+                <a:solidFill>
+                  <a:srgbClr val="C4694A"/>
+                </a:solidFill>
+                <a:latin typeface="Calibri" pitchFamily="34" charset="0"/>
+                <a:ea typeface="Calibri" pitchFamily="34" charset="-122"/>
+                <a:cs typeface="Calibri" pitchFamily="34" charset="-120"/>
+              </a:rPr>
+              <a:t>AND THE DATA NAMES THE CAUSE</a:t>
+            </a:r>
+            <a:endParaRPr lang="en-US" sz="1250" dirty="0"/>
+          </a:p>
+        </p:txBody>
+      </p:sp>
+      <p:sp>
+        <p:nvSpPr>
+          <p:cNvPr id="3" name="Text 1"/>
+          <p:cNvSpPr/>
+          <p:nvPr/>
+        </p:nvSpPr>
+        <p:spPr>
+          <a:xfrm>
+            <a:off x="640080" y="841248"/>
+            <a:ext cx="10911535" cy="1188720"/>
+          </a:xfrm>
+          <a:prstGeom prst="rect">
+            <a:avLst/>
+          </a:prstGeom>
+          <a:noFill/>
+          <a:ln/>
+        </p:spPr>
+        <p:txBody>
+          <a:bodyPr wrap="square" rtlCol="0" anchor="ctr"/>
+          <a:lstStyle/>
+          <a:p>
+            <a:pPr indent="0" marL="0">
+              <a:lnSpc>
+                <a:spcPts val="3536"/>
+              </a:lnSpc>
+              <a:buNone/>
+            </a:pPr>
+            <a:r>
+              <a:rPr lang="en-US" sz="3400" b="1" dirty="0">
+                <a:solidFill>
+                  <a:srgbClr val="1E1B16"/>
+                </a:solidFill>
+                <a:latin typeface="Cambria" pitchFamily="34" charset="0"/>
+                <a:ea typeface="Cambria" pitchFamily="34" charset="-122"/>
+                <a:cs typeface="Cambria" pitchFamily="34" charset="-120"/>
+              </a:rPr>
+              <a:t>Three fixable fields. Not one is fraud.</a:t>
+            </a:r>
+            <a:endParaRPr lang="en-US" sz="3400" dirty="0"/>
+          </a:p>
+        </p:txBody>
+      </p:sp>
+      <p:sp>
+        <p:nvSpPr>
+          <p:cNvPr id="4" name="Text 2"/>
+          <p:cNvSpPr/>
+          <p:nvPr/>
+        </p:nvSpPr>
+        <p:spPr>
+          <a:xfrm>
+            <a:off x="640080" y="2423160"/>
+            <a:ext cx="3383280" cy="914400"/>
+          </a:xfrm>
+          <a:prstGeom prst="rect">
+            <a:avLst/>
+          </a:prstGeom>
+          <a:noFill/>
+          <a:ln/>
+        </p:spPr>
+        <p:txBody>
+          <a:bodyPr wrap="square" rtlCol="0" anchor="ctr"/>
+          <a:lstStyle/>
+          <a:p>
+            <a:pPr indent="0" marL="0">
+              <a:buNone/>
+            </a:pPr>
+            <a:r>
+              <a:rPr lang="en-US" sz="5200" b="1" dirty="0">
+                <a:solidFill>
+                  <a:srgbClr val="C4694A"/>
+                </a:solidFill>
+                <a:latin typeface="Cambria" pitchFamily="34" charset="0"/>
+                <a:ea typeface="Cambria" pitchFamily="34" charset="-122"/>
+                <a:cs typeface="Cambria" pitchFamily="34" charset="-120"/>
+              </a:rPr>
+              <a:t>51.3%</a:t>
+            </a:r>
+            <a:endParaRPr lang="en-US" sz="5200" dirty="0"/>
+          </a:p>
+        </p:txBody>
+      </p:sp>
+      <p:sp>
+        <p:nvSpPr>
+          <p:cNvPr id="5" name="Text 3"/>
+          <p:cNvSpPr/>
+          <p:nvPr/>
+        </p:nvSpPr>
+        <p:spPr>
+          <a:xfrm>
+            <a:off x="640080" y="3429000"/>
+            <a:ext cx="3291840" cy="457200"/>
+          </a:xfrm>
+          <a:prstGeom prst="rect">
+            <a:avLst/>
+          </a:prstGeom>
+          <a:noFill/>
+          <a:ln/>
+        </p:spPr>
+        <p:txBody>
+          <a:bodyPr wrap="square" rtlCol="0" anchor="ctr"/>
+          <a:lstStyle/>
+          <a:p>
+            <a:pPr indent="0" marL="0">
+              <a:buNone/>
+            </a:pPr>
+            <a:r>
+              <a:rPr lang="en-US" sz="1800" b="1" dirty="0">
+                <a:solidFill>
+                  <a:srgbClr val="1E1B16"/>
+                </a:solidFill>
+                <a:latin typeface="Cambria" pitchFamily="34" charset="0"/>
+                <a:ea typeface="Cambria" pitchFamily="34" charset="-122"/>
+                <a:cs typeface="Cambria" pitchFamily="34" charset="-120"/>
+              </a:rPr>
+              <a:t>Aadhaar not seeded</a:t>
+            </a:r>
+            <a:endParaRPr lang="en-US" sz="1800" dirty="0"/>
+          </a:p>
+        </p:txBody>
+      </p:sp>
+      <p:sp>
+        <p:nvSpPr>
+          <p:cNvPr id="6" name="Text 4"/>
+          <p:cNvSpPr/>
+          <p:nvPr/>
+        </p:nvSpPr>
+        <p:spPr>
+          <a:xfrm>
+            <a:off x="640080" y="3931920"/>
+            <a:ext cx="3291840" cy="1554480"/>
+          </a:xfrm>
+          <a:prstGeom prst="rect">
+            <a:avLst/>
+          </a:prstGeom>
+          <a:noFill/>
+          <a:ln/>
+        </p:spPr>
+        <p:txBody>
+          <a:bodyPr wrap="square" rtlCol="0" anchor="ctr"/>
+          <a:lstStyle/>
+          <a:p>
+            <a:pPr indent="0" marL="0">
+              <a:lnSpc>
+                <a:spcPts val="2100"/>
+              </a:lnSpc>
+              <a:buNone/>
+            </a:pPr>
+            <a:r>
+              <a:rPr lang="en-US" sz="1400" dirty="0">
+                <a:solidFill>
+                  <a:srgbClr val="4A443B"/>
+                </a:solidFill>
+                <a:latin typeface="Calibri" pitchFamily="34" charset="0"/>
+                <a:ea typeface="Calibri" pitchFamily="34" charset="-122"/>
+                <a:cs typeface="Calibri" pitchFamily="34" charset="-120"/>
+              </a:rPr>
+              <a:t>in the NPCI mapper that routes the payment — so it is rejected outright.</a:t>
+            </a:r>
+            <a:endParaRPr lang="en-US" sz="1400" dirty="0"/>
+          </a:p>
+        </p:txBody>
+      </p:sp>
+      <p:sp>
+        <p:nvSpPr>
+          <p:cNvPr id="7" name="Text 5"/>
+          <p:cNvSpPr/>
+          <p:nvPr/>
+        </p:nvSpPr>
+        <p:spPr>
+          <a:xfrm>
+            <a:off x="4297680" y="2423160"/>
+            <a:ext cx="3383280" cy="914400"/>
+          </a:xfrm>
+          <a:prstGeom prst="rect">
+            <a:avLst/>
+          </a:prstGeom>
+          <a:noFill/>
+          <a:ln/>
+        </p:spPr>
+        <p:txBody>
+          <a:bodyPr wrap="square" rtlCol="0" anchor="ctr"/>
+          <a:lstStyle/>
+          <a:p>
+            <a:pPr indent="0" marL="0">
+              <a:buNone/>
+            </a:pPr>
+            <a:r>
+              <a:rPr lang="en-US" sz="5200" b="1" dirty="0">
+                <a:solidFill>
+                  <a:srgbClr val="B4842E"/>
+                </a:solidFill>
+                <a:latin typeface="Cambria" pitchFamily="34" charset="0"/>
+                <a:ea typeface="Cambria" pitchFamily="34" charset="-122"/>
+                <a:cs typeface="Cambria" pitchFamily="34" charset="-120"/>
+              </a:rPr>
+              <a:t>32%</a:t>
+            </a:r>
+            <a:endParaRPr lang="en-US" sz="5200" dirty="0"/>
+          </a:p>
+        </p:txBody>
+      </p:sp>
+      <p:sp>
+        <p:nvSpPr>
+          <p:cNvPr id="8" name="Text 6"/>
+          <p:cNvSpPr/>
+          <p:nvPr/>
+        </p:nvSpPr>
+        <p:spPr>
+          <a:xfrm>
+            <a:off x="4297680" y="3429000"/>
+            <a:ext cx="3291840" cy="457200"/>
+          </a:xfrm>
+          <a:prstGeom prst="rect">
+            <a:avLst/>
+          </a:prstGeom>
+          <a:noFill/>
+          <a:ln/>
+        </p:spPr>
+        <p:txBody>
+          <a:bodyPr wrap="square" rtlCol="0" anchor="ctr"/>
+          <a:lstStyle/>
+          <a:p>
+            <a:pPr indent="0" marL="0">
+              <a:buNone/>
+            </a:pPr>
+            <a:r>
+              <a:rPr lang="en-US" sz="1800" b="1" dirty="0">
+                <a:solidFill>
+                  <a:srgbClr val="1E1B16"/>
+                </a:solidFill>
+                <a:latin typeface="Cambria" pitchFamily="34" charset="0"/>
+                <a:ea typeface="Cambria" pitchFamily="34" charset="-122"/>
+                <a:cs typeface="Cambria" pitchFamily="34" charset="-120"/>
+              </a:rPr>
+              <a:t>KYC pending or lapsed</a:t>
+            </a:r>
+            <a:endParaRPr lang="en-US" sz="1800" dirty="0"/>
+          </a:p>
+        </p:txBody>
+      </p:sp>
+      <p:sp>
+        <p:nvSpPr>
+          <p:cNvPr id="9" name="Text 7"/>
+          <p:cNvSpPr/>
+          <p:nvPr/>
+        </p:nvSpPr>
+        <p:spPr>
+          <a:xfrm>
+            <a:off x="4297680" y="3931920"/>
+            <a:ext cx="3291840" cy="1554480"/>
+          </a:xfrm>
+          <a:prstGeom prst="rect">
+            <a:avLst/>
+          </a:prstGeom>
+          <a:noFill/>
+          <a:ln/>
+        </p:spPr>
+        <p:txBody>
+          <a:bodyPr wrap="square" rtlCol="0" anchor="ctr"/>
+          <a:lstStyle/>
+          <a:p>
+            <a:pPr indent="0" marL="0">
+              <a:lnSpc>
+                <a:spcPts val="2100"/>
+              </a:lnSpc>
+              <a:buNone/>
+            </a:pPr>
+            <a:r>
+              <a:rPr lang="en-US" sz="1400" dirty="0">
+                <a:solidFill>
+                  <a:srgbClr val="4A443B"/>
+                </a:solidFill>
+                <a:latin typeface="Calibri" pitchFamily="34" charset="0"/>
+                <a:ea typeface="Calibri" pitchFamily="34" charset="-122"/>
+                <a:cs typeface="Calibri" pitchFamily="34" charset="-120"/>
+              </a:rPr>
+              <a:t>a periodic identity check expired, and the account froze against new credits.</a:t>
+            </a:r>
+            <a:endParaRPr lang="en-US" sz="1400" dirty="0"/>
+          </a:p>
+        </p:txBody>
+      </p:sp>
+      <p:sp>
+        <p:nvSpPr>
+          <p:cNvPr id="10" name="Text 8"/>
+          <p:cNvSpPr/>
+          <p:nvPr/>
+        </p:nvSpPr>
+        <p:spPr>
+          <a:xfrm>
+            <a:off x="7955280" y="2423160"/>
+            <a:ext cx="3383280" cy="914400"/>
+          </a:xfrm>
+          <a:prstGeom prst="rect">
+            <a:avLst/>
+          </a:prstGeom>
+          <a:noFill/>
+          <a:ln/>
+        </p:spPr>
+        <p:txBody>
+          <a:bodyPr wrap="square" rtlCol="0" anchor="ctr"/>
+          <a:lstStyle/>
+          <a:p>
+            <a:pPr indent="0" marL="0">
+              <a:buNone/>
+            </a:pPr>
+            <a:r>
+              <a:rPr lang="en-US" sz="5200" b="1" dirty="0">
+                <a:solidFill>
+                  <a:srgbClr val="5F6B57"/>
+                </a:solidFill>
+                <a:latin typeface="Cambria" pitchFamily="34" charset="0"/>
+                <a:ea typeface="Cambria" pitchFamily="34" charset="-122"/>
+                <a:cs typeface="Cambria" pitchFamily="34" charset="-120"/>
+              </a:rPr>
+              <a:t>36%</a:t>
+            </a:r>
+            <a:endParaRPr lang="en-US" sz="5200" dirty="0"/>
+          </a:p>
+        </p:txBody>
+      </p:sp>
+      <p:sp>
+        <p:nvSpPr>
+          <p:cNvPr id="11" name="Text 9"/>
+          <p:cNvSpPr/>
+          <p:nvPr/>
+        </p:nvSpPr>
+        <p:spPr>
+          <a:xfrm>
+            <a:off x="7955280" y="3429000"/>
+            <a:ext cx="3291840" cy="457200"/>
+          </a:xfrm>
+          <a:prstGeom prst="rect">
+            <a:avLst/>
+          </a:prstGeom>
+          <a:noFill/>
+          <a:ln/>
+        </p:spPr>
+        <p:txBody>
+          <a:bodyPr wrap="square" rtlCol="0" anchor="ctr"/>
+          <a:lstStyle/>
+          <a:p>
+            <a:pPr indent="0" marL="0">
+              <a:buNone/>
+            </a:pPr>
+            <a:r>
+              <a:rPr lang="en-US" sz="1800" b="1" dirty="0">
+                <a:solidFill>
+                  <a:srgbClr val="1E1B16"/>
+                </a:solidFill>
+                <a:latin typeface="Cambria" pitchFamily="34" charset="0"/>
+                <a:ea typeface="Cambria" pitchFamily="34" charset="-122"/>
+                <a:cs typeface="Cambria" pitchFamily="34" charset="-120"/>
+              </a:rPr>
+              <a:t>just a spelling error</a:t>
+            </a:r>
+            <a:endParaRPr lang="en-US" sz="1800" dirty="0"/>
+          </a:p>
+        </p:txBody>
+      </p:sp>
+      <p:sp>
+        <p:nvSpPr>
+          <p:cNvPr id="12" name="Text 10"/>
+          <p:cNvSpPr/>
+          <p:nvPr/>
+        </p:nvSpPr>
+        <p:spPr>
+          <a:xfrm>
+            <a:off x="7955280" y="3931920"/>
+            <a:ext cx="3291840" cy="1554480"/>
+          </a:xfrm>
+          <a:prstGeom prst="rect">
+            <a:avLst/>
+          </a:prstGeom>
+          <a:noFill/>
+          <a:ln/>
+        </p:spPr>
+        <p:txBody>
+          <a:bodyPr wrap="square" rtlCol="0" anchor="ctr"/>
+          <a:lstStyle/>
+          <a:p>
+            <a:pPr indent="0" marL="0">
+              <a:lnSpc>
+                <a:spcPts val="2100"/>
+              </a:lnSpc>
+              <a:buNone/>
+            </a:pPr>
+            <a:r>
+              <a:rPr lang="en-US" sz="1400" dirty="0">
+                <a:solidFill>
+                  <a:srgbClr val="4A443B"/>
+                </a:solidFill>
+                <a:latin typeface="Calibri" pitchFamily="34" charset="0"/>
+                <a:ea typeface="Calibri" pitchFamily="34" charset="-122"/>
+                <a:cs typeface="Calibri" pitchFamily="34" charset="-120"/>
+              </a:rPr>
+              <a:t>in the name — the kind of mismatch our name-reconciliation fixes with zero contact.</a:t>
+            </a:r>
+            <a:endParaRPr lang="en-US" sz="1400" dirty="0"/>
+          </a:p>
+        </p:txBody>
+      </p:sp>
+      <p:sp>
+        <p:nvSpPr>
+          <p:cNvPr id="13" name="Shape 11"/>
+          <p:cNvSpPr/>
+          <p:nvPr/>
+        </p:nvSpPr>
+        <p:spPr>
+          <a:xfrm>
+            <a:off x="640080" y="5623560"/>
+            <a:ext cx="10881360" cy="685800"/>
+          </a:xfrm>
+          <a:prstGeom prst="roundRect">
+            <a:avLst>
+              <a:gd name="adj" fmla="val 13333"/>
+            </a:avLst>
+          </a:prstGeom>
+          <a:solidFill>
+            <a:srgbClr val="F6F2EA"/>
+          </a:solidFill>
+          <a:ln/>
+        </p:spPr>
+      </p:sp>
+      <p:sp>
+        <p:nvSpPr>
+          <p:cNvPr id="14" name="Text 12"/>
+          <p:cNvSpPr/>
+          <p:nvPr/>
+        </p:nvSpPr>
+        <p:spPr>
+          <a:xfrm>
+            <a:off x="914400" y="5623560"/>
+            <a:ext cx="10332720" cy="685800"/>
+          </a:xfrm>
+          <a:prstGeom prst="rect">
+            <a:avLst/>
+          </a:prstGeom>
+          <a:noFill/>
+          <a:ln/>
+        </p:spPr>
+        <p:txBody>
+          <a:bodyPr wrap="square" rtlCol="0" anchor="ctr"/>
+          <a:lstStyle/>
+          <a:p>
+            <a:pPr indent="0" marL="0">
+              <a:buNone/>
+            </a:pPr>
+            <a:r>
+              <a:rPr lang="en-US" sz="1450" b="1" dirty="0">
+                <a:solidFill>
+                  <a:srgbClr val="1E1B16"/>
+                </a:solidFill>
+                <a:latin typeface="Calibri" pitchFamily="34" charset="0"/>
+                <a:ea typeface="Calibri" pitchFamily="34" charset="-122"/>
+                <a:cs typeface="Calibri" pitchFamily="34" charset="-120"/>
+              </a:rPr>
+              <a:t>Every one of these sits in the bank's own database </a:t>
+            </a:r>
+            <a:pPr indent="0" marL="0">
+              <a:buNone/>
+            </a:pPr>
+            <a:r>
+              <a:rPr lang="en-US" sz="1450" dirty="0">
+                <a:solidFill>
+                  <a:srgbClr val="4A443B"/>
+                </a:solidFill>
+                <a:latin typeface="Calibri" pitchFamily="34" charset="0"/>
+                <a:ea typeface="Calibri" pitchFamily="34" charset="-122"/>
+                <a:cs typeface="Calibri" pitchFamily="34" charset="-120"/>
+              </a:rPr>
+              <a:t>days before the payment runs. The failure is fully predictable — it is simply never acted on.</a:t>
+            </a:r>
+            <a:endParaRPr lang="en-US" sz="1450" dirty="0"/>
+          </a:p>
+        </p:txBody>
+      </p:sp>
+      <p:sp>
+        <p:nvSpPr>
+          <p:cNvPr id="15" name="Text 13"/>
+          <p:cNvSpPr/>
+          <p:nvPr/>
+        </p:nvSpPr>
+        <p:spPr>
+          <a:xfrm>
+            <a:off x="640080" y="6355080"/>
+            <a:ext cx="10911535" cy="320040"/>
+          </a:xfrm>
+          <a:prstGeom prst="rect">
+            <a:avLst/>
+          </a:prstGeom>
+          <a:noFill/>
+          <a:ln/>
+        </p:spPr>
+        <p:txBody>
+          <a:bodyPr wrap="square" rtlCol="0" anchor="ctr"/>
+          <a:lstStyle/>
+          <a:p>
+            <a:pPr indent="0" marL="0">
+              <a:buNone/>
+            </a:pPr>
+            <a:r>
+              <a:rPr lang="en-US" sz="1150" i="1" dirty="0">
+                <a:solidFill>
+                  <a:srgbClr val="837C6E"/>
+                </a:solidFill>
+                <a:latin typeface="Calibri" pitchFamily="34" charset="0"/>
+                <a:ea typeface="Calibri" pitchFamily="34" charset="-122"/>
+                <a:cs typeface="Calibri" pitchFamily="34" charset="-120"/>
+              </a:rPr>
+              <a:t>Sources: East Godavari PM-KISAN administrative data (N=39,655) and Dvara beneficiary survey, 2022.</a:t>
+            </a:r>
+            <a:endParaRPr lang="en-US" sz="1150" dirty="0"/>
+          </a:p>
+        </p:txBody>
+      </p:sp>
+    </p:spTree>
+  </p:cSld>
+  <p:clrMapOvr>
+    <a:masterClrMapping/>
+  </p:clrMapOvr>
+</p:sld>
+</file>
+
+<file path=ppt/slides/slide5.xml><?xml version="1.0" encoding="utf-8"?>
+<p:sld xmlns:a="http://schemas.openxmlformats.org/drawingml/2006/main" xmlns:r="http://schemas.openxmlformats.org/officeDocument/2006/relationships" xmlns:p="http://schemas.openxmlformats.org/presentationml/2006/main">
+  <p:cSld name="Slide 5">
     <p:bg>
       <p:bgPr>
         <a:solidFill>
@@ -4487,7 +4747,7 @@
         </p:nvSpPr>
         <p:spPr>
           <a:xfrm>
-            <a:off x="640080" y="502920"/>
+            <a:off x="640080" y="475488"/>
             <a:ext cx="10911535" cy="320040"/>
           </a:xfrm>
           <a:prstGeom prst="rect">
@@ -4504,7 +4764,7 @@
               <a:buNone/>
             </a:pPr>
             <a:r>
-              <a:rPr lang="en-US" sz="1250" b="1" spc="200" kern="0" dirty="0">
+              <a:rPr lang="en-US" sz="1250" b="1" spc="250" kern="0" dirty="0">
                 <a:solidFill>
                   <a:srgbClr val="C4694A"/>
                 </a:solidFill>
@@ -4512,7 +4772,7 @@
                 <a:ea typeface="Calibri" pitchFamily="34" charset="-122"/>
                 <a:cs typeface="Calibri" pitchFamily="34" charset="-120"/>
               </a:rPr>
-              <a:t>THE MOAT</a:t>
+              <a:t>THE IDEA</a:t>
             </a:r>
             <a:endParaRPr lang="en-US" sz="1250" dirty="0"/>
           </a:p>
@@ -4526,8 +4786,8 @@
         </p:nvSpPr>
         <p:spPr>
           <a:xfrm>
-            <a:off x="640080" y="868680"/>
-            <a:ext cx="10911535" cy="1005840"/>
+            <a:off x="640080" y="841248"/>
+            <a:ext cx="10911535" cy="1188720"/>
           </a:xfrm>
           <a:prstGeom prst="rect">
             <a:avLst/>
@@ -4541,12 +4801,12 @@
           <a:p>
             <a:pPr indent="0" marL="0">
               <a:lnSpc>
-                <a:spcPts val="3570"/>
+                <a:spcPts val="3432"/>
               </a:lnSpc>
               <a:buNone/>
             </a:pPr>
             <a:r>
-              <a:rPr lang="en-US" sz="3400" b="1" dirty="0">
+              <a:rPr lang="en-US" sz="3300" b="1" dirty="0">
                 <a:solidFill>
                   <a:srgbClr val="F6F2EA"/>
                 </a:solidFill>
@@ -4554,9 +4814,29 @@
                 <a:ea typeface="Cambria" pitchFamily="34" charset="-122"/>
                 <a:cs typeface="Cambria" pitchFamily="34" charset="-120"/>
               </a:rPr>
-              <a:t>Only one bank can build this.</a:t>
-            </a:r>
-            <a:endParaRPr lang="en-US" sz="3400" dirty="0"/>
+              <a:t>Stop rescuing payments.</a:t>
+            </a:r>
+            <a:endParaRPr lang="en-US" sz="3300" dirty="0"/>
+          </a:p>
+          <a:p>
+            <a:pPr indent="0" marL="0">
+              <a:lnSpc>
+                <a:spcPts val="3432"/>
+              </a:lnSpc>
+              <a:buNone/>
+            </a:pPr>
+            <a:r>
+              <a:rPr lang="en-US" sz="3300" b="1" dirty="0">
+                <a:solidFill>
+                  <a:srgbClr val="F6F2EA"/>
+                </a:solidFill>
+                <a:latin typeface="Cambria" pitchFamily="34" charset="0"/>
+                <a:ea typeface="Cambria" pitchFamily="34" charset="-122"/>
+                <a:cs typeface="Cambria" pitchFamily="34" charset="-120"/>
+              </a:rPr>
+              <a:t>Keep every account payment-ready.</a:t>
+            </a:r>
+            <a:endParaRPr lang="en-US" sz="3300" dirty="0"/>
           </a:p>
         </p:txBody>
       </p:sp>
@@ -4568,24 +4848,27 @@
         </p:nvSpPr>
         <p:spPr>
           <a:xfrm>
-            <a:off x="640080" y="1783080"/>
-            <a:ext cx="10515600" cy="457200"/>
-          </a:xfrm>
-          <a:prstGeom prst="rect">
-            <a:avLst/>
-          </a:prstGeom>
-          <a:noFill/>
-          <a:ln/>
-        </p:spPr>
-        <p:txBody>
-          <a:bodyPr wrap="square" rtlCol="0" anchor="ctr"/>
-          <a:lstStyle/>
-          <a:p>
-            <a:pPr indent="0" marL="0">
-              <a:buNone/>
-            </a:pPr>
-            <a:r>
-              <a:rPr lang="en-US" sz="1600" i="1" dirty="0">
+            <a:off x="640080" y="2606040"/>
+            <a:ext cx="6766560" cy="1828800"/>
+          </a:xfrm>
+          <a:prstGeom prst="rect">
+            <a:avLst/>
+          </a:prstGeom>
+          <a:noFill/>
+          <a:ln/>
+        </p:spPr>
+        <p:txBody>
+          <a:bodyPr wrap="square" rtlCol="0" anchor="ctr"/>
+          <a:lstStyle/>
+          <a:p>
+            <a:pPr indent="0" marL="0">
+              <a:lnSpc>
+                <a:spcPts val="2700"/>
+              </a:lnSpc>
+              <a:buNone/>
+            </a:pPr>
+            <a:r>
+              <a:rPr lang="en-US" sz="1700" dirty="0">
                 <a:solidFill>
                   <a:srgbClr val="C9C2B6"/>
                 </a:solidFill>
@@ -4593,39 +4876,33 @@
                 <a:ea typeface="Calibri" pitchFamily="34" charset="-122"/>
                 <a:cs typeface="Calibri" pitchFamily="34" charset="-120"/>
               </a:rPr>
-              <a:t>Any bank could write the software. It would then have nothing to run it on.</a:t>
-            </a:r>
-            <a:endParaRPr lang="en-US" sz="1600" dirty="0"/>
-          </a:p>
-        </p:txBody>
-      </p:sp>
-      <p:sp>
-        <p:nvSpPr>
-          <p:cNvPr id="5" name="Text 3"/>
-          <p:cNvSpPr/>
-          <p:nvPr/>
-        </p:nvSpPr>
-        <p:spPr>
-          <a:xfrm>
-            <a:off x="640080" y="2514600"/>
-            <a:ext cx="5486400" cy="365760"/>
-          </a:xfrm>
-          <a:prstGeom prst="rect">
-            <a:avLst/>
-          </a:prstGeom>
-          <a:noFill/>
-          <a:ln/>
-        </p:spPr>
-        <p:txBody>
-          <a:bodyPr wrap="square" rtlCol="0" anchor="ctr"/>
-          <a:lstStyle/>
-          <a:p>
-            <a:pPr indent="0" marL="0">
-              <a:buNone/>
-            </a:pPr>
-            <a:endParaRPr lang="en-US" dirty="0"/>
-          </a:p>
-        </p:txBody>
+              <a:t>Model each account as a set of fields a payment needs to land — Aadhaar seeded, KYC valid, name reconciled, account active. The agent's job is to keep every account green before the disbursement calendar event, not to firefight after it bounces.</a:t>
+            </a:r>
+            <a:endParaRPr lang="en-US" sz="1700" dirty="0"/>
+          </a:p>
+        </p:txBody>
+      </p:sp>
+      <p:sp>
+        <p:nvSpPr>
+          <p:cNvPr id="5" name="Shape 3"/>
+          <p:cNvSpPr/>
+          <p:nvPr/>
+        </p:nvSpPr>
+        <p:spPr>
+          <a:xfrm>
+            <a:off x="7772400" y="2606040"/>
+            <a:ext cx="3794760" cy="3108960"/>
+          </a:xfrm>
+          <a:prstGeom prst="roundRect">
+            <a:avLst>
+              <a:gd name="adj" fmla="val 3529"/>
+            </a:avLst>
+          </a:prstGeom>
+          <a:solidFill>
+            <a:srgbClr val="2A2620"/>
+          </a:solidFill>
+          <a:ln/>
+        </p:spPr>
       </p:sp>
       <p:sp>
         <p:nvSpPr>
@@ -4635,34 +4912,34 @@
         </p:nvSpPr>
         <p:spPr>
           <a:xfrm>
-            <a:off x="6126480" y="2487168"/>
-            <a:ext cx="2743200" cy="365760"/>
-          </a:xfrm>
-          <a:prstGeom prst="rect">
-            <a:avLst/>
-          </a:prstGeom>
-          <a:noFill/>
-          <a:ln/>
-        </p:spPr>
-        <p:txBody>
-          <a:bodyPr wrap="square" rtlCol="0" anchor="ctr"/>
-          <a:lstStyle/>
-          <a:p>
-            <a:pPr algn="l" indent="0" marL="0">
-              <a:buNone/>
-            </a:pPr>
-            <a:r>
-              <a:rPr lang="en-US" sz="1500" b="1" dirty="0">
-                <a:solidFill>
-                  <a:srgbClr val="5F6B57"/>
+            <a:off x="8046720" y="2834640"/>
+            <a:ext cx="3291840" cy="365760"/>
+          </a:xfrm>
+          <a:prstGeom prst="rect">
+            <a:avLst/>
+          </a:prstGeom>
+          <a:noFill/>
+          <a:ln/>
+        </p:spPr>
+        <p:txBody>
+          <a:bodyPr wrap="square" rtlCol="0" anchor="ctr"/>
+          <a:lstStyle/>
+          <a:p>
+            <a:pPr indent="0" marL="0">
+              <a:buNone/>
+            </a:pPr>
+            <a:r>
+              <a:rPr lang="en-US" sz="1250" b="1" spc="100" kern="0" dirty="0">
+                <a:solidFill>
+                  <a:srgbClr val="C4694A"/>
                 </a:solidFill>
                 <a:latin typeface="Calibri" pitchFamily="34" charset="0"/>
                 <a:ea typeface="Calibri" pitchFamily="34" charset="-122"/>
                 <a:cs typeface="Calibri" pitchFamily="34" charset="-120"/>
               </a:rPr>
-              <a:t>SBI</a:t>
-            </a:r>
-            <a:endParaRPr lang="en-US" sz="1500" dirty="0"/>
+              <a:t>FIX ONCE, BENEFIT FOREVER</a:t>
+            </a:r>
+            <a:endParaRPr lang="en-US" sz="1250" dirty="0"/>
           </a:p>
         </p:txBody>
       </p:sp>
@@ -4674,94 +4951,35 @@
         </p:nvSpPr>
         <p:spPr>
           <a:xfrm>
-            <a:off x="9052560" y="2487168"/>
-            <a:ext cx="2743200" cy="365760"/>
-          </a:xfrm>
-          <a:prstGeom prst="rect">
-            <a:avLst/>
-          </a:prstGeom>
-          <a:noFill/>
-          <a:ln/>
-        </p:spPr>
-        <p:txBody>
-          <a:bodyPr wrap="square" rtlCol="0" anchor="ctr"/>
-          <a:lstStyle/>
-          <a:p>
-            <a:pPr algn="l" indent="0" marL="0">
-              <a:buNone/>
-            </a:pPr>
-            <a:r>
-              <a:rPr lang="en-US" sz="1500" b="1" dirty="0">
-                <a:solidFill>
-                  <a:srgbClr val="B98A82"/>
+            <a:off x="8046720" y="3246120"/>
+            <a:ext cx="3246120" cy="1188720"/>
+          </a:xfrm>
+          <a:prstGeom prst="rect">
+            <a:avLst/>
+          </a:prstGeom>
+          <a:noFill/>
+          <a:ln/>
+        </p:spPr>
+        <p:txBody>
+          <a:bodyPr wrap="square" rtlCol="0" anchor="ctr"/>
+          <a:lstStyle/>
+          <a:p>
+            <a:pPr indent="0" marL="0">
+              <a:lnSpc>
+                <a:spcPts val="2300"/>
+              </a:lnSpc>
+              <a:buNone/>
+            </a:pPr>
+            <a:r>
+              <a:rPr lang="en-US" sz="1550" dirty="0">
+                <a:solidFill>
+                  <a:srgbClr val="F6F2EA"/>
                 </a:solidFill>
                 <a:latin typeface="Calibri" pitchFamily="34" charset="0"/>
                 <a:ea typeface="Calibri" pitchFamily="34" charset="-122"/>
                 <a:cs typeface="Calibri" pitchFamily="34" charset="-120"/>
               </a:rPr>
-              <a:t>A private bank</a:t>
-            </a:r>
-            <a:endParaRPr lang="en-US" sz="1500" dirty="0"/>
-          </a:p>
-        </p:txBody>
-      </p:sp>
-      <p:sp>
-        <p:nvSpPr>
-          <p:cNvPr id="8" name="Shape 6"/>
-          <p:cNvSpPr/>
-          <p:nvPr/>
-        </p:nvSpPr>
-        <p:spPr>
-          <a:xfrm>
-            <a:off x="640080" y="2862072"/>
-            <a:ext cx="10972800" cy="0"/>
-          </a:xfrm>
-          <a:prstGeom prst="line">
-            <a:avLst/>
-          </a:prstGeom>
-          <a:noFill/>
-          <a:ln w="12700">
-            <a:solidFill>
-              <a:srgbClr val="3A362F"/>
-            </a:solidFill>
-            <a:prstDash val="solid"/>
-          </a:ln>
-        </p:spPr>
-      </p:sp>
-      <p:sp>
-        <p:nvSpPr>
-          <p:cNvPr id="9" name="Text 7"/>
-          <p:cNvSpPr/>
-          <p:nvPr/>
-        </p:nvSpPr>
-        <p:spPr>
-          <a:xfrm>
-            <a:off x="640080" y="2971800"/>
-            <a:ext cx="5394960" cy="640080"/>
-          </a:xfrm>
-          <a:prstGeom prst="rect">
-            <a:avLst/>
-          </a:prstGeom>
-          <a:noFill/>
-          <a:ln/>
-        </p:spPr>
-        <p:txBody>
-          <a:bodyPr wrap="square" rtlCol="0" anchor="ctr"/>
-          <a:lstStyle/>
-          <a:p>
-            <a:pPr indent="0" marL="0">
-              <a:buNone/>
-            </a:pPr>
-            <a:r>
-              <a:rPr lang="en-US" sz="1550" dirty="0">
-                <a:solidFill>
-                  <a:srgbClr val="F6F2EA"/>
-                </a:solidFill>
-                <a:latin typeface="Calibri" pitchFamily="34" charset="0"/>
-                <a:ea typeface="Calibri" pitchFamily="34" charset="-122"/>
-                <a:cs typeface="Calibri" pitchFamily="34" charset="-120"/>
-              </a:rPr>
-              <a:t>Sees the government's payments as they route</a:t>
+              <a:t>Seeding one Aadhaar or renewing one KYC unblocks every scheme, for every future cycle.</a:t>
             </a:r>
             <a:endParaRPr lang="en-US" sz="1550" dirty="0"/>
           </a:p>
@@ -4769,1347 +4987,43 @@
       </p:sp>
       <p:sp>
         <p:nvSpPr>
-          <p:cNvPr id="10" name="Text 8"/>
-          <p:cNvSpPr/>
-          <p:nvPr/>
-        </p:nvSpPr>
-        <p:spPr>
-          <a:xfrm>
-            <a:off x="6126480" y="2971800"/>
-            <a:ext cx="2834640" cy="640080"/>
-          </a:xfrm>
-          <a:prstGeom prst="rect">
-            <a:avLst/>
-          </a:prstGeom>
-          <a:noFill/>
-          <a:ln/>
-        </p:spPr>
-        <p:txBody>
-          <a:bodyPr wrap="square" rtlCol="0" anchor="ctr"/>
-          <a:lstStyle/>
-          <a:p>
-            <a:pPr indent="0" marL="0">
-              <a:buNone/>
-            </a:pPr>
-            <a:r>
-              <a:rPr lang="en-US" sz="1450" b="1" dirty="0">
-                <a:solidFill>
-                  <a:srgbClr val="5F6B57"/>
-                </a:solidFill>
-                <a:latin typeface="Calibri" pitchFamily="34" charset="0"/>
-                <a:ea typeface="Calibri" pitchFamily="34" charset="-122"/>
-                <a:cs typeface="Calibri" pitchFamily="34" charset="-120"/>
-              </a:rPr>
-              <a:t>✓  </a:t>
-            </a:r>
-            <a:pPr indent="0" marL="0">
-              <a:buNone/>
-            </a:pPr>
-            <a:r>
-              <a:rPr lang="en-US" sz="1450" dirty="0">
-                <a:solidFill>
-                  <a:srgbClr val="F6F2EA"/>
-                </a:solidFill>
-                <a:latin typeface="Calibri" pitchFamily="34" charset="0"/>
-                <a:ea typeface="Calibri" pitchFamily="34" charset="-122"/>
-                <a:cs typeface="Calibri" pitchFamily="34" charset="-120"/>
-              </a:rPr>
-              <a:t>A primary DBT pipeline</a:t>
-            </a:r>
-            <a:endParaRPr lang="en-US" sz="1450" dirty="0"/>
-          </a:p>
-        </p:txBody>
-      </p:sp>
-      <p:sp>
-        <p:nvSpPr>
-          <p:cNvPr id="11" name="Text 9"/>
-          <p:cNvSpPr/>
-          <p:nvPr/>
-        </p:nvSpPr>
-        <p:spPr>
-          <a:xfrm>
-            <a:off x="9052560" y="2971800"/>
-            <a:ext cx="2743200" cy="640080"/>
-          </a:xfrm>
-          <a:prstGeom prst="rect">
-            <a:avLst/>
-          </a:prstGeom>
-          <a:noFill/>
-          <a:ln/>
-        </p:spPr>
-        <p:txBody>
-          <a:bodyPr wrap="square" rtlCol="0" anchor="ctr"/>
-          <a:lstStyle/>
-          <a:p>
-            <a:pPr indent="0" marL="0">
-              <a:buNone/>
-            </a:pPr>
-            <a:r>
-              <a:rPr lang="en-US" sz="1450" b="1" dirty="0">
-                <a:solidFill>
-                  <a:srgbClr val="B23B32"/>
-                </a:solidFill>
-                <a:latin typeface="Calibri" pitchFamily="34" charset="0"/>
-                <a:ea typeface="Calibri" pitchFamily="34" charset="-122"/>
-                <a:cs typeface="Calibri" pitchFamily="34" charset="-120"/>
-              </a:rPr>
-              <a:t>✕  </a:t>
-            </a:r>
-            <a:pPr indent="0" marL="0">
-              <a:buNone/>
-            </a:pPr>
-            <a:r>
-              <a:rPr lang="en-US" sz="1450" dirty="0">
-                <a:solidFill>
-                  <a:srgbClr val="9A9288"/>
-                </a:solidFill>
-                <a:latin typeface="Calibri" pitchFamily="34" charset="0"/>
-                <a:ea typeface="Calibri" pitchFamily="34" charset="-122"/>
-                <a:cs typeface="Calibri" pitchFamily="34" charset="-120"/>
-              </a:rPr>
-              <a:t>No equivalent access</a:t>
-            </a:r>
-            <a:endParaRPr lang="en-US" sz="1450" dirty="0"/>
-          </a:p>
-        </p:txBody>
-      </p:sp>
-      <p:sp>
-        <p:nvSpPr>
-          <p:cNvPr id="12" name="Shape 10"/>
-          <p:cNvSpPr/>
-          <p:nvPr/>
-        </p:nvSpPr>
-        <p:spPr>
-          <a:xfrm>
-            <a:off x="640080" y="3822192"/>
-            <a:ext cx="10972800" cy="0"/>
-          </a:xfrm>
-          <a:prstGeom prst="line">
-            <a:avLst/>
-          </a:prstGeom>
-          <a:noFill/>
-          <a:ln w="12700">
-            <a:solidFill>
-              <a:srgbClr val="3A362F"/>
-            </a:solidFill>
-            <a:prstDash val="solid"/>
-          </a:ln>
-        </p:spPr>
-      </p:sp>
-      <p:sp>
-        <p:nvSpPr>
-          <p:cNvPr id="13" name="Text 11"/>
-          <p:cNvSpPr/>
-          <p:nvPr/>
-        </p:nvSpPr>
-        <p:spPr>
-          <a:xfrm>
-            <a:off x="640080" y="3931920"/>
-            <a:ext cx="5394960" cy="640080"/>
-          </a:xfrm>
-          <a:prstGeom prst="rect">
-            <a:avLst/>
-          </a:prstGeom>
-          <a:noFill/>
-          <a:ln/>
-        </p:spPr>
-        <p:txBody>
-          <a:bodyPr wrap="square" rtlCol="0" anchor="ctr"/>
-          <a:lstStyle/>
-          <a:p>
-            <a:pPr indent="0" marL="0">
-              <a:buNone/>
-            </a:pPr>
-            <a:r>
-              <a:rPr lang="en-US" sz="1550" dirty="0">
-                <a:solidFill>
-                  <a:srgbClr val="F6F2EA"/>
-                </a:solidFill>
-                <a:latin typeface="Calibri" pitchFamily="34" charset="0"/>
-                <a:ea typeface="Calibri" pitchFamily="34" charset="-122"/>
-                <a:cs typeface="Calibri" pitchFamily="34" charset="-120"/>
-              </a:rPr>
-              <a:t>Accounts at village-level density</a:t>
-            </a:r>
-            <a:endParaRPr lang="en-US" sz="1550" dirty="0"/>
-          </a:p>
-        </p:txBody>
-      </p:sp>
-      <p:sp>
-        <p:nvSpPr>
-          <p:cNvPr id="14" name="Text 12"/>
-          <p:cNvSpPr/>
-          <p:nvPr/>
-        </p:nvSpPr>
-        <p:spPr>
-          <a:xfrm>
-            <a:off x="6126480" y="3931920"/>
-            <a:ext cx="2834640" cy="640080"/>
-          </a:xfrm>
-          <a:prstGeom prst="rect">
-            <a:avLst/>
-          </a:prstGeom>
-          <a:noFill/>
-          <a:ln/>
-        </p:spPr>
-        <p:txBody>
-          <a:bodyPr wrap="square" rtlCol="0" anchor="ctr"/>
-          <a:lstStyle/>
-          <a:p>
-            <a:pPr indent="0" marL="0">
-              <a:buNone/>
-            </a:pPr>
-            <a:r>
-              <a:rPr lang="en-US" sz="1450" b="1" dirty="0">
-                <a:solidFill>
-                  <a:srgbClr val="5F6B57"/>
-                </a:solidFill>
-                <a:latin typeface="Calibri" pitchFamily="34" charset="0"/>
-                <a:ea typeface="Calibri" pitchFamily="34" charset="-122"/>
-                <a:cs typeface="Calibri" pitchFamily="34" charset="-120"/>
-              </a:rPr>
-              <a:t>✓  </a:t>
-            </a:r>
-            <a:pPr indent="0" marL="0">
-              <a:buNone/>
-            </a:pPr>
-            <a:r>
-              <a:rPr lang="en-US" sz="1450" dirty="0">
-                <a:solidFill>
-                  <a:srgbClr val="F6F2EA"/>
-                </a:solidFill>
-                <a:latin typeface="Calibri" pitchFamily="34" charset="0"/>
-                <a:ea typeface="Calibri" pitchFamily="34" charset="-122"/>
-                <a:cs typeface="Calibri" pitchFamily="34" charset="-120"/>
-              </a:rPr>
-              <a:t>~53 crore, every district</a:t>
-            </a:r>
-            <a:endParaRPr lang="en-US" sz="1450" dirty="0"/>
-          </a:p>
-        </p:txBody>
-      </p:sp>
-      <p:sp>
-        <p:nvSpPr>
-          <p:cNvPr id="15" name="Text 13"/>
-          <p:cNvSpPr/>
-          <p:nvPr/>
-        </p:nvSpPr>
-        <p:spPr>
-          <a:xfrm>
-            <a:off x="9052560" y="3931920"/>
-            <a:ext cx="2743200" cy="640080"/>
-          </a:xfrm>
-          <a:prstGeom prst="rect">
-            <a:avLst/>
-          </a:prstGeom>
-          <a:noFill/>
-          <a:ln/>
-        </p:spPr>
-        <p:txBody>
-          <a:bodyPr wrap="square" rtlCol="0" anchor="ctr"/>
-          <a:lstStyle/>
-          <a:p>
-            <a:pPr indent="0" marL="0">
-              <a:buNone/>
-            </a:pPr>
-            <a:r>
-              <a:rPr lang="en-US" sz="1450" b="1" dirty="0">
-                <a:solidFill>
-                  <a:srgbClr val="B23B32"/>
-                </a:solidFill>
-                <a:latin typeface="Calibri" pitchFamily="34" charset="0"/>
-                <a:ea typeface="Calibri" pitchFamily="34" charset="-122"/>
-                <a:cs typeface="Calibri" pitchFamily="34" charset="-120"/>
-              </a:rPr>
-              <a:t>✕  </a:t>
-            </a:r>
-            <a:pPr indent="0" marL="0">
-              <a:buNone/>
-            </a:pPr>
-            <a:r>
-              <a:rPr lang="en-US" sz="1450" dirty="0">
-                <a:solidFill>
-                  <a:srgbClr val="9A9288"/>
-                </a:solidFill>
-                <a:latin typeface="Calibri" pitchFamily="34" charset="0"/>
-                <a:ea typeface="Calibri" pitchFamily="34" charset="-122"/>
-                <a:cs typeface="Calibri" pitchFamily="34" charset="-120"/>
-              </a:rPr>
-              <a:t>Urban-concentrated</a:t>
-            </a:r>
-            <a:endParaRPr lang="en-US" sz="1450" dirty="0"/>
-          </a:p>
-        </p:txBody>
-      </p:sp>
-      <p:sp>
-        <p:nvSpPr>
-          <p:cNvPr id="16" name="Shape 14"/>
-          <p:cNvSpPr/>
-          <p:nvPr/>
-        </p:nvSpPr>
-        <p:spPr>
-          <a:xfrm>
-            <a:off x="640080" y="4782312"/>
-            <a:ext cx="10972800" cy="0"/>
-          </a:xfrm>
-          <a:prstGeom prst="line">
-            <a:avLst/>
-          </a:prstGeom>
-          <a:noFill/>
-          <a:ln w="12700">
-            <a:solidFill>
-              <a:srgbClr val="3A362F"/>
-            </a:solidFill>
-            <a:prstDash val="solid"/>
-          </a:ln>
-        </p:spPr>
-      </p:sp>
-      <p:sp>
-        <p:nvSpPr>
-          <p:cNvPr id="17" name="Text 15"/>
-          <p:cNvSpPr/>
-          <p:nvPr/>
-        </p:nvSpPr>
-        <p:spPr>
-          <a:xfrm>
-            <a:off x="640080" y="4892040"/>
-            <a:ext cx="5394960" cy="640080"/>
-          </a:xfrm>
-          <a:prstGeom prst="rect">
-            <a:avLst/>
-          </a:prstGeom>
-          <a:noFill/>
-          <a:ln/>
-        </p:spPr>
-        <p:txBody>
-          <a:bodyPr wrap="square" rtlCol="0" anchor="ctr"/>
-          <a:lstStyle/>
-          <a:p>
-            <a:pPr indent="0" marL="0">
-              <a:buNone/>
-            </a:pPr>
-            <a:r>
-              <a:rPr lang="en-US" sz="1550" dirty="0">
-                <a:solidFill>
-                  <a:srgbClr val="F6F2EA"/>
-                </a:solidFill>
-                <a:latin typeface="Calibri" pitchFamily="34" charset="0"/>
-                <a:ea typeface="Calibri" pitchFamily="34" charset="-122"/>
-                <a:cs typeface="Calibri" pitchFamily="34" charset="-120"/>
-              </a:rPr>
-              <a:t>The mandate to fix inclusion gaps</a:t>
-            </a:r>
-            <a:endParaRPr lang="en-US" sz="1550" dirty="0"/>
-          </a:p>
-        </p:txBody>
-      </p:sp>
-      <p:sp>
-        <p:nvSpPr>
-          <p:cNvPr id="18" name="Text 16"/>
-          <p:cNvSpPr/>
-          <p:nvPr/>
-        </p:nvSpPr>
-        <p:spPr>
-          <a:xfrm>
-            <a:off x="6126480" y="4892040"/>
-            <a:ext cx="2834640" cy="640080"/>
-          </a:xfrm>
-          <a:prstGeom prst="rect">
-            <a:avLst/>
-          </a:prstGeom>
-          <a:noFill/>
-          <a:ln/>
-        </p:spPr>
-        <p:txBody>
-          <a:bodyPr wrap="square" rtlCol="0" anchor="ctr"/>
-          <a:lstStyle/>
-          <a:p>
-            <a:pPr indent="0" marL="0">
-              <a:buNone/>
-            </a:pPr>
-            <a:r>
-              <a:rPr lang="en-US" sz="1450" b="1" dirty="0">
-                <a:solidFill>
-                  <a:srgbClr val="5F6B57"/>
-                </a:solidFill>
-                <a:latin typeface="Calibri" pitchFamily="34" charset="0"/>
-                <a:ea typeface="Calibri" pitchFamily="34" charset="-122"/>
-                <a:cs typeface="Calibri" pitchFamily="34" charset="-120"/>
-              </a:rPr>
-              <a:t>✓  </a:t>
-            </a:r>
-            <a:pPr indent="0" marL="0">
-              <a:buNone/>
-            </a:pPr>
-            <a:r>
-              <a:rPr lang="en-US" sz="1450" dirty="0">
-                <a:solidFill>
-                  <a:srgbClr val="F6F2EA"/>
-                </a:solidFill>
-                <a:latin typeface="Calibri" pitchFamily="34" charset="0"/>
-                <a:ea typeface="Calibri" pitchFamily="34" charset="-122"/>
-                <a:cs typeface="Calibri" pitchFamily="34" charset="-120"/>
-              </a:rPr>
-              <a:t>Banker to the nation</a:t>
-            </a:r>
-            <a:endParaRPr lang="en-US" sz="1450" dirty="0"/>
-          </a:p>
-        </p:txBody>
-      </p:sp>
-      <p:sp>
-        <p:nvSpPr>
-          <p:cNvPr id="19" name="Text 17"/>
-          <p:cNvSpPr/>
-          <p:nvPr/>
-        </p:nvSpPr>
-        <p:spPr>
-          <a:xfrm>
-            <a:off x="9052560" y="4892040"/>
-            <a:ext cx="2743200" cy="640080"/>
-          </a:xfrm>
-          <a:prstGeom prst="rect">
-            <a:avLst/>
-          </a:prstGeom>
-          <a:noFill/>
-          <a:ln/>
-        </p:spPr>
-        <p:txBody>
-          <a:bodyPr wrap="square" rtlCol="0" anchor="ctr"/>
-          <a:lstStyle/>
-          <a:p>
-            <a:pPr indent="0" marL="0">
-              <a:buNone/>
-            </a:pPr>
-            <a:r>
-              <a:rPr lang="en-US" sz="1450" b="1" dirty="0">
-                <a:solidFill>
-                  <a:srgbClr val="B23B32"/>
-                </a:solidFill>
-                <a:latin typeface="Calibri" pitchFamily="34" charset="0"/>
-                <a:ea typeface="Calibri" pitchFamily="34" charset="-122"/>
-                <a:cs typeface="Calibri" pitchFamily="34" charset="-120"/>
-              </a:rPr>
-              <a:t>✕  </a:t>
-            </a:r>
-            <a:pPr indent="0" marL="0">
-              <a:buNone/>
-            </a:pPr>
-            <a:r>
-              <a:rPr lang="en-US" sz="1450" dirty="0">
-                <a:solidFill>
-                  <a:srgbClr val="9A9288"/>
-                </a:solidFill>
-                <a:latin typeface="Calibri" pitchFamily="34" charset="0"/>
-                <a:ea typeface="Calibri" pitchFamily="34" charset="-122"/>
-                <a:cs typeface="Calibri" pitchFamily="34" charset="-120"/>
-              </a:rPr>
-              <a:t>No such mandate</a:t>
-            </a:r>
-            <a:endParaRPr lang="en-US" sz="1450" dirty="0"/>
-          </a:p>
-        </p:txBody>
-      </p:sp>
-      <p:sp>
-        <p:nvSpPr>
-          <p:cNvPr id="20" name="Text 18"/>
-          <p:cNvSpPr/>
-          <p:nvPr/>
-        </p:nvSpPr>
-        <p:spPr>
-          <a:xfrm>
-            <a:off x="640080" y="6126480"/>
-            <a:ext cx="10515600" cy="457200"/>
-          </a:xfrm>
-          <a:prstGeom prst="rect">
-            <a:avLst/>
-          </a:prstGeom>
-          <a:noFill/>
-          <a:ln/>
-        </p:spPr>
-        <p:txBody>
-          <a:bodyPr wrap="square" rtlCol="0" anchor="ctr"/>
-          <a:lstStyle/>
-          <a:p>
-            <a:pPr indent="0" marL="0">
-              <a:buNone/>
-            </a:pPr>
-            <a:r>
-              <a:rPr lang="en-US" sz="1800" i="1" dirty="0">
-                <a:solidFill>
-                  <a:srgbClr val="C4694A"/>
+          <p:cNvPr id="8" name="Text 6"/>
+          <p:cNvSpPr/>
+          <p:nvPr/>
+        </p:nvSpPr>
+        <p:spPr>
+          <a:xfrm>
+            <a:off x="8046720" y="4709160"/>
+            <a:ext cx="3246120" cy="822960"/>
+          </a:xfrm>
+          <a:prstGeom prst="rect">
+            <a:avLst/>
+          </a:prstGeom>
+          <a:noFill/>
+          <a:ln/>
+        </p:spPr>
+        <p:txBody>
+          <a:bodyPr wrap="square" rtlCol="0" anchor="ctr"/>
+          <a:lstStyle/>
+          <a:p>
+            <a:pPr indent="0" marL="0">
+              <a:lnSpc>
+                <a:spcPts val="2200"/>
+              </a:lnSpc>
+              <a:buNone/>
+            </a:pPr>
+            <a:r>
+              <a:rPr lang="en-US" sz="1600" i="1" dirty="0">
+                <a:solidFill>
+                  <a:srgbClr val="FFD9C7"/>
                 </a:solidFill>
                 <a:latin typeface="Cambria" pitchFamily="34" charset="0"/>
                 <a:ea typeface="Cambria" pitchFamily="34" charset="-122"/>
                 <a:cs typeface="Cambria" pitchFamily="34" charset="-120"/>
               </a:rPr>
-              <a:t>It sells nothing. It gets people money that is already theirs.</a:t>
-            </a:r>
-            <a:endParaRPr lang="en-US" sz="1800" dirty="0"/>
-          </a:p>
-        </p:txBody>
-      </p:sp>
-    </p:spTree>
-  </p:cSld>
-  <p:clrMapOvr>
-    <a:masterClrMapping/>
-  </p:clrMapOvr>
-</p:sld>
-</file>
-
-<file path=ppt/slides/slide5.xml><?xml version="1.0" encoding="utf-8"?>
-<p:sld xmlns:a="http://schemas.openxmlformats.org/drawingml/2006/main" xmlns:r="http://schemas.openxmlformats.org/officeDocument/2006/relationships" xmlns:p="http://schemas.openxmlformats.org/presentationml/2006/main">
-  <p:cSld name="Slide 5">
-    <p:bg>
-      <p:bgPr>
-        <a:solidFill>
-          <a:srgbClr val="FFFFFF"/>
-        </a:solidFill>
-      </p:bgPr>
-    </p:bg>
-    <p:spTree>
-      <p:nvGrpSpPr>
-        <p:cNvPr id="1" name=""/>
-        <p:cNvGrpSpPr/>
-        <p:nvPr/>
-      </p:nvGrpSpPr>
-      <p:grpSpPr>
-        <a:xfrm>
-          <a:off x="0" y="0"/>
-          <a:ext cx="0" cy="0"/>
-          <a:chOff x="0" y="0"/>
-          <a:chExt cx="0" cy="0"/>
-        </a:xfrm>
-      </p:grpSpPr>
-      <p:sp>
-        <p:nvSpPr>
-          <p:cNvPr id="2" name="Text 0"/>
-          <p:cNvSpPr/>
-          <p:nvPr/>
-        </p:nvSpPr>
-        <p:spPr>
-          <a:xfrm>
-            <a:off x="640080" y="502920"/>
-            <a:ext cx="10911535" cy="320040"/>
-          </a:xfrm>
-          <a:prstGeom prst="rect">
-            <a:avLst/>
-          </a:prstGeom>
-          <a:noFill/>
-          <a:ln/>
-        </p:spPr>
-        <p:txBody>
-          <a:bodyPr wrap="square" rtlCol="0" anchor="ctr"/>
-          <a:lstStyle/>
-          <a:p>
-            <a:pPr indent="0" marL="0">
-              <a:buNone/>
-            </a:pPr>
-            <a:r>
-              <a:rPr lang="en-US" sz="1250" b="1" spc="200" kern="0" dirty="0">
-                <a:solidFill>
-                  <a:srgbClr val="C4694A"/>
-                </a:solidFill>
-                <a:latin typeface="Calibri" pitchFamily="34" charset="0"/>
-                <a:ea typeface="Calibri" pitchFamily="34" charset="-122"/>
-                <a:cs typeface="Calibri" pitchFamily="34" charset="-120"/>
-              </a:rPr>
-              <a:t>HOW IT WORKS</a:t>
-            </a:r>
-            <a:endParaRPr lang="en-US" sz="1250" dirty="0"/>
-          </a:p>
-        </p:txBody>
-      </p:sp>
-      <p:sp>
-        <p:nvSpPr>
-          <p:cNvPr id="3" name="Text 1"/>
-          <p:cNvSpPr/>
-          <p:nvPr/>
-        </p:nvSpPr>
-        <p:spPr>
-          <a:xfrm>
-            <a:off x="640080" y="868680"/>
-            <a:ext cx="10911535" cy="1005840"/>
-          </a:xfrm>
-          <a:prstGeom prst="rect">
-            <a:avLst/>
-          </a:prstGeom>
-          <a:noFill/>
-          <a:ln/>
-        </p:spPr>
-        <p:txBody>
-          <a:bodyPr wrap="square" rtlCol="0" anchor="ctr"/>
-          <a:lstStyle/>
-          <a:p>
-            <a:pPr indent="0" marL="0">
-              <a:lnSpc>
-                <a:spcPts val="3570"/>
-              </a:lnSpc>
-              <a:buNone/>
-            </a:pPr>
-            <a:r>
-              <a:rPr lang="en-US" sz="3400" b="1" dirty="0">
-                <a:solidFill>
-                  <a:srgbClr val="1E1B16"/>
-                </a:solidFill>
-                <a:latin typeface="Cambria" pitchFamily="34" charset="0"/>
-                <a:ea typeface="Cambria" pitchFamily="34" charset="-122"/>
-                <a:cs typeface="Cambria" pitchFamily="34" charset="-120"/>
-              </a:rPr>
-              <a:t>Notice. Reach. Fix by voice. Arrive.</a:t>
-            </a:r>
-            <a:endParaRPr lang="en-US" sz="3400" dirty="0"/>
-          </a:p>
-        </p:txBody>
-      </p:sp>
-      <p:sp>
-        <p:nvSpPr>
-          <p:cNvPr id="4" name="Shape 2"/>
-          <p:cNvSpPr/>
-          <p:nvPr/>
-        </p:nvSpPr>
-        <p:spPr>
-          <a:xfrm>
-            <a:off x="640080" y="2468880"/>
-            <a:ext cx="777240" cy="777240"/>
-          </a:xfrm>
-          <a:prstGeom prst="ellipse">
-            <a:avLst/>
-          </a:prstGeom>
-          <a:solidFill>
-            <a:srgbClr val="C4694A"/>
-          </a:solidFill>
-          <a:ln/>
-        </p:spPr>
-      </p:sp>
-      <p:sp>
-        <p:nvSpPr>
-          <p:cNvPr id="5" name="Text 3"/>
-          <p:cNvSpPr/>
-          <p:nvPr/>
-        </p:nvSpPr>
-        <p:spPr>
-          <a:xfrm>
-            <a:off x="640080" y="2468880"/>
-            <a:ext cx="777240" cy="777240"/>
-          </a:xfrm>
-          <a:prstGeom prst="rect">
-            <a:avLst/>
-          </a:prstGeom>
-          <a:noFill/>
-          <a:ln/>
-        </p:spPr>
-        <p:txBody>
-          <a:bodyPr wrap="square" rtlCol="0" anchor="ctr"/>
-          <a:lstStyle/>
-          <a:p>
-            <a:pPr algn="ctr" indent="0" marL="0">
-              <a:buNone/>
-            </a:pPr>
-            <a:r>
-              <a:rPr lang="en-US" sz="2210" b="1" dirty="0">
-                <a:solidFill>
-                  <a:srgbClr val="FFFFFF"/>
-                </a:solidFill>
-                <a:latin typeface="Cambria" pitchFamily="34" charset="0"/>
-                <a:ea typeface="Cambria" pitchFamily="34" charset="-122"/>
-                <a:cs typeface="Cambria" pitchFamily="34" charset="-120"/>
-              </a:rPr>
-              <a:t>1</a:t>
-            </a:r>
-            <a:endParaRPr lang="en-US" sz="2210" dirty="0"/>
-          </a:p>
-        </p:txBody>
-      </p:sp>
-      <p:sp>
-        <p:nvSpPr>
-          <p:cNvPr id="6" name="Text 4"/>
-          <p:cNvSpPr/>
-          <p:nvPr/>
-        </p:nvSpPr>
-        <p:spPr>
-          <a:xfrm>
-            <a:off x="1600200" y="2468880"/>
-            <a:ext cx="1737360" cy="777240"/>
-          </a:xfrm>
-          <a:prstGeom prst="rect">
-            <a:avLst/>
-          </a:prstGeom>
-          <a:noFill/>
-          <a:ln/>
-        </p:spPr>
-        <p:txBody>
-          <a:bodyPr wrap="square" rtlCol="0" anchor="ctr"/>
-          <a:lstStyle/>
-          <a:p>
-            <a:pPr algn="ctr" indent="0" marL="0">
-              <a:buNone/>
-            </a:pPr>
-            <a:r>
-              <a:rPr lang="en-US" sz="3000" dirty="0">
-                <a:solidFill>
-                  <a:srgbClr val="EAD9CF"/>
-                </a:solidFill>
-                <a:latin typeface="Calibri" pitchFamily="34" charset="0"/>
-                <a:ea typeface="Calibri" pitchFamily="34" charset="-122"/>
-                <a:cs typeface="Calibri" pitchFamily="34" charset="-120"/>
-              </a:rPr>
-              <a:t>→</a:t>
-            </a:r>
-            <a:endParaRPr lang="en-US" sz="3000" dirty="0"/>
-          </a:p>
-        </p:txBody>
-      </p:sp>
-      <p:sp>
-        <p:nvSpPr>
-          <p:cNvPr id="7" name="Text 5"/>
-          <p:cNvSpPr/>
-          <p:nvPr/>
-        </p:nvSpPr>
-        <p:spPr>
-          <a:xfrm>
-            <a:off x="502920" y="3429000"/>
-            <a:ext cx="2651760" cy="411480"/>
-          </a:xfrm>
-          <a:prstGeom prst="rect">
-            <a:avLst/>
-          </a:prstGeom>
-          <a:noFill/>
-          <a:ln/>
-        </p:spPr>
-        <p:txBody>
-          <a:bodyPr wrap="square" rtlCol="0" anchor="ctr"/>
-          <a:lstStyle/>
-          <a:p>
-            <a:pPr indent="0" marL="0">
-              <a:buNone/>
-            </a:pPr>
-            <a:r>
-              <a:rPr lang="en-US" sz="1900" b="1" dirty="0">
-                <a:solidFill>
-                  <a:srgbClr val="1E1B16"/>
-                </a:solidFill>
-                <a:latin typeface="Cambria" pitchFamily="34" charset="0"/>
-                <a:ea typeface="Cambria" pitchFamily="34" charset="-122"/>
-                <a:cs typeface="Cambria" pitchFamily="34" charset="-120"/>
-              </a:rPr>
-              <a:t>Notice</a:t>
-            </a:r>
-            <a:endParaRPr lang="en-US" sz="1900" dirty="0"/>
-          </a:p>
-        </p:txBody>
-      </p:sp>
-      <p:sp>
-        <p:nvSpPr>
-          <p:cNvPr id="8" name="Text 6"/>
-          <p:cNvSpPr/>
-          <p:nvPr/>
-        </p:nvSpPr>
-        <p:spPr>
-          <a:xfrm>
-            <a:off x="502920" y="3886200"/>
-            <a:ext cx="2514600" cy="1463040"/>
-          </a:xfrm>
-          <a:prstGeom prst="rect">
-            <a:avLst/>
-          </a:prstGeom>
-          <a:noFill/>
-          <a:ln/>
-        </p:spPr>
-        <p:txBody>
-          <a:bodyPr wrap="square" rtlCol="0" anchor="ctr"/>
-          <a:lstStyle/>
-          <a:p>
-            <a:pPr indent="0" marL="0">
-              <a:lnSpc>
-                <a:spcPts val="2000"/>
-              </a:lnSpc>
-              <a:buNone/>
-            </a:pPr>
-            <a:r>
-              <a:rPr lang="en-US" sz="1400" dirty="0">
-                <a:solidFill>
-                  <a:srgbClr val="4A443B"/>
-                </a:solidFill>
-                <a:latin typeface="Calibri" pitchFamily="34" charset="0"/>
-                <a:ea typeface="Calibri" pitchFamily="34" charset="-122"/>
-                <a:cs typeface="Calibri" pitchFamily="34" charset="-120"/>
-              </a:rPr>
-              <a:t>Days before the cycle, flag every account that will bounce — and why.</a:t>
-            </a:r>
-            <a:endParaRPr lang="en-US" sz="1400" dirty="0"/>
-          </a:p>
-        </p:txBody>
-      </p:sp>
-      <p:sp>
-        <p:nvSpPr>
-          <p:cNvPr id="9" name="Shape 7"/>
-          <p:cNvSpPr/>
-          <p:nvPr/>
-        </p:nvSpPr>
-        <p:spPr>
-          <a:xfrm>
-            <a:off x="3429000" y="2468880"/>
-            <a:ext cx="777240" cy="777240"/>
-          </a:xfrm>
-          <a:prstGeom prst="ellipse">
-            <a:avLst/>
-          </a:prstGeom>
-          <a:solidFill>
-            <a:srgbClr val="C4694A"/>
-          </a:solidFill>
-          <a:ln/>
-        </p:spPr>
-      </p:sp>
-      <p:sp>
-        <p:nvSpPr>
-          <p:cNvPr id="10" name="Text 8"/>
-          <p:cNvSpPr/>
-          <p:nvPr/>
-        </p:nvSpPr>
-        <p:spPr>
-          <a:xfrm>
-            <a:off x="3429000" y="2468880"/>
-            <a:ext cx="777240" cy="777240"/>
-          </a:xfrm>
-          <a:prstGeom prst="rect">
-            <a:avLst/>
-          </a:prstGeom>
-          <a:noFill/>
-          <a:ln/>
-        </p:spPr>
-        <p:txBody>
-          <a:bodyPr wrap="square" rtlCol="0" anchor="ctr"/>
-          <a:lstStyle/>
-          <a:p>
-            <a:pPr algn="ctr" indent="0" marL="0">
-              <a:buNone/>
-            </a:pPr>
-            <a:r>
-              <a:rPr lang="en-US" sz="2210" b="1" dirty="0">
-                <a:solidFill>
-                  <a:srgbClr val="FFFFFF"/>
-                </a:solidFill>
-                <a:latin typeface="Cambria" pitchFamily="34" charset="0"/>
-                <a:ea typeface="Cambria" pitchFamily="34" charset="-122"/>
-                <a:cs typeface="Cambria" pitchFamily="34" charset="-120"/>
-              </a:rPr>
-              <a:t>2</a:t>
-            </a:r>
-            <a:endParaRPr lang="en-US" sz="2210" dirty="0"/>
-          </a:p>
-        </p:txBody>
-      </p:sp>
-      <p:sp>
-        <p:nvSpPr>
-          <p:cNvPr id="11" name="Text 9"/>
-          <p:cNvSpPr/>
-          <p:nvPr/>
-        </p:nvSpPr>
-        <p:spPr>
-          <a:xfrm>
-            <a:off x="4389120" y="2468880"/>
-            <a:ext cx="1737360" cy="777240"/>
-          </a:xfrm>
-          <a:prstGeom prst="rect">
-            <a:avLst/>
-          </a:prstGeom>
-          <a:noFill/>
-          <a:ln/>
-        </p:spPr>
-        <p:txBody>
-          <a:bodyPr wrap="square" rtlCol="0" anchor="ctr"/>
-          <a:lstStyle/>
-          <a:p>
-            <a:pPr algn="ctr" indent="0" marL="0">
-              <a:buNone/>
-            </a:pPr>
-            <a:r>
-              <a:rPr lang="en-US" sz="3000" dirty="0">
-                <a:solidFill>
-                  <a:srgbClr val="EAD9CF"/>
-                </a:solidFill>
-                <a:latin typeface="Calibri" pitchFamily="34" charset="0"/>
-                <a:ea typeface="Calibri" pitchFamily="34" charset="-122"/>
-                <a:cs typeface="Calibri" pitchFamily="34" charset="-120"/>
-              </a:rPr>
-              <a:t>→</a:t>
-            </a:r>
-            <a:endParaRPr lang="en-US" sz="3000" dirty="0"/>
-          </a:p>
-        </p:txBody>
-      </p:sp>
-      <p:sp>
-        <p:nvSpPr>
-          <p:cNvPr id="12" name="Text 10"/>
-          <p:cNvSpPr/>
-          <p:nvPr/>
-        </p:nvSpPr>
-        <p:spPr>
-          <a:xfrm>
-            <a:off x="3291840" y="3429000"/>
-            <a:ext cx="2651760" cy="411480"/>
-          </a:xfrm>
-          <a:prstGeom prst="rect">
-            <a:avLst/>
-          </a:prstGeom>
-          <a:noFill/>
-          <a:ln/>
-        </p:spPr>
-        <p:txBody>
-          <a:bodyPr wrap="square" rtlCol="0" anchor="ctr"/>
-          <a:lstStyle/>
-          <a:p>
-            <a:pPr indent="0" marL="0">
-              <a:buNone/>
-            </a:pPr>
-            <a:r>
-              <a:rPr lang="en-US" sz="1900" b="1" dirty="0">
-                <a:solidFill>
-                  <a:srgbClr val="1E1B16"/>
-                </a:solidFill>
-                <a:latin typeface="Cambria" pitchFamily="34" charset="0"/>
-                <a:ea typeface="Cambria" pitchFamily="34" charset="-122"/>
-                <a:cs typeface="Cambria" pitchFamily="34" charset="-120"/>
-              </a:rPr>
-              <a:t>Reach</a:t>
-            </a:r>
-            <a:endParaRPr lang="en-US" sz="1900" dirty="0"/>
-          </a:p>
-        </p:txBody>
-      </p:sp>
-      <p:sp>
-        <p:nvSpPr>
-          <p:cNvPr id="13" name="Text 11"/>
-          <p:cNvSpPr/>
-          <p:nvPr/>
-        </p:nvSpPr>
-        <p:spPr>
-          <a:xfrm>
-            <a:off x="3291840" y="3886200"/>
-            <a:ext cx="2514600" cy="1463040"/>
-          </a:xfrm>
-          <a:prstGeom prst="rect">
-            <a:avLst/>
-          </a:prstGeom>
-          <a:noFill/>
-          <a:ln/>
-        </p:spPr>
-        <p:txBody>
-          <a:bodyPr wrap="square" rtlCol="0" anchor="ctr"/>
-          <a:lstStyle/>
-          <a:p>
-            <a:pPr indent="0" marL="0">
-              <a:lnSpc>
-                <a:spcPts val="2000"/>
-              </a:lnSpc>
-              <a:buNone/>
-            </a:pPr>
-            <a:r>
-              <a:rPr lang="en-US" sz="1400" dirty="0">
-                <a:solidFill>
-                  <a:srgbClr val="4A443B"/>
-                </a:solidFill>
-                <a:latin typeface="Calibri" pitchFamily="34" charset="0"/>
-                <a:ea typeface="Calibri" pitchFamily="34" charset="-122"/>
-                <a:cs typeface="Calibri" pitchFamily="34" charset="-120"/>
-              </a:rPr>
-              <a:t>A message and a call in the person's own language, not an English app.</a:t>
-            </a:r>
-            <a:endParaRPr lang="en-US" sz="1400" dirty="0"/>
-          </a:p>
-        </p:txBody>
-      </p:sp>
-      <p:sp>
-        <p:nvSpPr>
-          <p:cNvPr id="14" name="Shape 12"/>
-          <p:cNvSpPr/>
-          <p:nvPr/>
-        </p:nvSpPr>
-        <p:spPr>
-          <a:xfrm>
-            <a:off x="6217920" y="2468880"/>
-            <a:ext cx="777240" cy="777240"/>
-          </a:xfrm>
-          <a:prstGeom prst="ellipse">
-            <a:avLst/>
-          </a:prstGeom>
-          <a:solidFill>
-            <a:srgbClr val="C4694A"/>
-          </a:solidFill>
-          <a:ln/>
-        </p:spPr>
-      </p:sp>
-      <p:sp>
-        <p:nvSpPr>
-          <p:cNvPr id="15" name="Text 13"/>
-          <p:cNvSpPr/>
-          <p:nvPr/>
-        </p:nvSpPr>
-        <p:spPr>
-          <a:xfrm>
-            <a:off x="6217920" y="2468880"/>
-            <a:ext cx="777240" cy="777240"/>
-          </a:xfrm>
-          <a:prstGeom prst="rect">
-            <a:avLst/>
-          </a:prstGeom>
-          <a:noFill/>
-          <a:ln/>
-        </p:spPr>
-        <p:txBody>
-          <a:bodyPr wrap="square" rtlCol="0" anchor="ctr"/>
-          <a:lstStyle/>
-          <a:p>
-            <a:pPr algn="ctr" indent="0" marL="0">
-              <a:buNone/>
-            </a:pPr>
-            <a:r>
-              <a:rPr lang="en-US" sz="2210" b="1" dirty="0">
-                <a:solidFill>
-                  <a:srgbClr val="FFFFFF"/>
-                </a:solidFill>
-                <a:latin typeface="Cambria" pitchFamily="34" charset="0"/>
-                <a:ea typeface="Cambria" pitchFamily="34" charset="-122"/>
-                <a:cs typeface="Cambria" pitchFamily="34" charset="-120"/>
-              </a:rPr>
-              <a:t>3</a:t>
-            </a:r>
-            <a:endParaRPr lang="en-US" sz="2210" dirty="0"/>
-          </a:p>
-        </p:txBody>
-      </p:sp>
-      <p:sp>
-        <p:nvSpPr>
-          <p:cNvPr id="16" name="Text 14"/>
-          <p:cNvSpPr/>
-          <p:nvPr/>
-        </p:nvSpPr>
-        <p:spPr>
-          <a:xfrm>
-            <a:off x="7178040" y="2468880"/>
-            <a:ext cx="1737360" cy="777240"/>
-          </a:xfrm>
-          <a:prstGeom prst="rect">
-            <a:avLst/>
-          </a:prstGeom>
-          <a:noFill/>
-          <a:ln/>
-        </p:spPr>
-        <p:txBody>
-          <a:bodyPr wrap="square" rtlCol="0" anchor="ctr"/>
-          <a:lstStyle/>
-          <a:p>
-            <a:pPr algn="ctr" indent="0" marL="0">
-              <a:buNone/>
-            </a:pPr>
-            <a:r>
-              <a:rPr lang="en-US" sz="3000" dirty="0">
-                <a:solidFill>
-                  <a:srgbClr val="EAD9CF"/>
-                </a:solidFill>
-                <a:latin typeface="Calibri" pitchFamily="34" charset="0"/>
-                <a:ea typeface="Calibri" pitchFamily="34" charset="-122"/>
-                <a:cs typeface="Calibri" pitchFamily="34" charset="-120"/>
-              </a:rPr>
-              <a:t>→</a:t>
-            </a:r>
-            <a:endParaRPr lang="en-US" sz="3000" dirty="0"/>
-          </a:p>
-        </p:txBody>
-      </p:sp>
-      <p:sp>
-        <p:nvSpPr>
-          <p:cNvPr id="17" name="Text 15"/>
-          <p:cNvSpPr/>
-          <p:nvPr/>
-        </p:nvSpPr>
-        <p:spPr>
-          <a:xfrm>
-            <a:off x="6080760" y="3429000"/>
-            <a:ext cx="2651760" cy="411480"/>
-          </a:xfrm>
-          <a:prstGeom prst="rect">
-            <a:avLst/>
-          </a:prstGeom>
-          <a:noFill/>
-          <a:ln/>
-        </p:spPr>
-        <p:txBody>
-          <a:bodyPr wrap="square" rtlCol="0" anchor="ctr"/>
-          <a:lstStyle/>
-          <a:p>
-            <a:pPr indent="0" marL="0">
-              <a:buNone/>
-            </a:pPr>
-            <a:r>
-              <a:rPr lang="en-US" sz="1900" b="1" dirty="0">
-                <a:solidFill>
-                  <a:srgbClr val="1E1B16"/>
-                </a:solidFill>
-                <a:latin typeface="Cambria" pitchFamily="34" charset="0"/>
-                <a:ea typeface="Cambria" pitchFamily="34" charset="-122"/>
-                <a:cs typeface="Cambria" pitchFamily="34" charset="-120"/>
-              </a:rPr>
-              <a:t>Fix by voice</a:t>
-            </a:r>
-            <a:endParaRPr lang="en-US" sz="1900" dirty="0"/>
-          </a:p>
-        </p:txBody>
-      </p:sp>
-      <p:sp>
-        <p:nvSpPr>
-          <p:cNvPr id="18" name="Text 16"/>
-          <p:cNvSpPr/>
-          <p:nvPr/>
-        </p:nvSpPr>
-        <p:spPr>
-          <a:xfrm>
-            <a:off x="6080760" y="3886200"/>
-            <a:ext cx="2514600" cy="1463040"/>
-          </a:xfrm>
-          <a:prstGeom prst="rect">
-            <a:avLst/>
-          </a:prstGeom>
-          <a:noFill/>
-          <a:ln/>
-        </p:spPr>
-        <p:txBody>
-          <a:bodyPr wrap="square" rtlCol="0" anchor="ctr"/>
-          <a:lstStyle/>
-          <a:p>
-            <a:pPr indent="0" marL="0">
-              <a:lnSpc>
-                <a:spcPts val="2000"/>
-              </a:lnSpc>
-              <a:buNone/>
-            </a:pPr>
-            <a:r>
-              <a:rPr lang="en-US" sz="1400" dirty="0">
-                <a:solidFill>
-                  <a:srgbClr val="4A443B"/>
-                </a:solidFill>
-                <a:latin typeface="Calibri" pitchFamily="34" charset="0"/>
-                <a:ea typeface="Calibri" pitchFamily="34" charset="-122"/>
-                <a:cs typeface="Calibri" pitchFamily="34" charset="-120"/>
-              </a:rPr>
-              <a:t>A voice agent re-verifies identity out loud and self-heals name mismatches.</a:t>
-            </a:r>
-            <a:endParaRPr lang="en-US" sz="1400" dirty="0"/>
-          </a:p>
-        </p:txBody>
-      </p:sp>
-      <p:sp>
-        <p:nvSpPr>
-          <p:cNvPr id="19" name="Shape 17"/>
-          <p:cNvSpPr/>
-          <p:nvPr/>
-        </p:nvSpPr>
-        <p:spPr>
-          <a:xfrm>
-            <a:off x="9006840" y="2468880"/>
-            <a:ext cx="777240" cy="777240"/>
-          </a:xfrm>
-          <a:prstGeom prst="ellipse">
-            <a:avLst/>
-          </a:prstGeom>
-          <a:solidFill>
-            <a:srgbClr val="C4694A"/>
-          </a:solidFill>
-          <a:ln/>
-        </p:spPr>
-      </p:sp>
-      <p:sp>
-        <p:nvSpPr>
-          <p:cNvPr id="20" name="Text 18"/>
-          <p:cNvSpPr/>
-          <p:nvPr/>
-        </p:nvSpPr>
-        <p:spPr>
-          <a:xfrm>
-            <a:off x="9006840" y="2468880"/>
-            <a:ext cx="777240" cy="777240"/>
-          </a:xfrm>
-          <a:prstGeom prst="rect">
-            <a:avLst/>
-          </a:prstGeom>
-          <a:noFill/>
-          <a:ln/>
-        </p:spPr>
-        <p:txBody>
-          <a:bodyPr wrap="square" rtlCol="0" anchor="ctr"/>
-          <a:lstStyle/>
-          <a:p>
-            <a:pPr algn="ctr" indent="0" marL="0">
-              <a:buNone/>
-            </a:pPr>
-            <a:r>
-              <a:rPr lang="en-US" sz="2210" b="1" dirty="0">
-                <a:solidFill>
-                  <a:srgbClr val="FFFFFF"/>
-                </a:solidFill>
-                <a:latin typeface="Cambria" pitchFamily="34" charset="0"/>
-                <a:ea typeface="Cambria" pitchFamily="34" charset="-122"/>
-                <a:cs typeface="Cambria" pitchFamily="34" charset="-120"/>
-              </a:rPr>
-              <a:t>4</a:t>
-            </a:r>
-            <a:endParaRPr lang="en-US" sz="2210" dirty="0"/>
-          </a:p>
-        </p:txBody>
-      </p:sp>
-      <p:sp>
-        <p:nvSpPr>
-          <p:cNvPr id="21" name="Text 19"/>
-          <p:cNvSpPr/>
-          <p:nvPr/>
-        </p:nvSpPr>
-        <p:spPr>
-          <a:xfrm>
-            <a:off x="8869680" y="3429000"/>
-            <a:ext cx="2651760" cy="411480"/>
-          </a:xfrm>
-          <a:prstGeom prst="rect">
-            <a:avLst/>
-          </a:prstGeom>
-          <a:noFill/>
-          <a:ln/>
-        </p:spPr>
-        <p:txBody>
-          <a:bodyPr wrap="square" rtlCol="0" anchor="ctr"/>
-          <a:lstStyle/>
-          <a:p>
-            <a:pPr indent="0" marL="0">
-              <a:buNone/>
-            </a:pPr>
-            <a:r>
-              <a:rPr lang="en-US" sz="1900" b="1" dirty="0">
-                <a:solidFill>
-                  <a:srgbClr val="1E1B16"/>
-                </a:solidFill>
-                <a:latin typeface="Cambria" pitchFamily="34" charset="0"/>
-                <a:ea typeface="Cambria" pitchFamily="34" charset="-122"/>
-                <a:cs typeface="Cambria" pitchFamily="34" charset="-120"/>
-              </a:rPr>
-              <a:t>Arrive</a:t>
-            </a:r>
-            <a:endParaRPr lang="en-US" sz="1900" dirty="0"/>
-          </a:p>
-        </p:txBody>
-      </p:sp>
-      <p:sp>
-        <p:nvSpPr>
-          <p:cNvPr id="22" name="Text 20"/>
-          <p:cNvSpPr/>
-          <p:nvPr/>
-        </p:nvSpPr>
-        <p:spPr>
-          <a:xfrm>
-            <a:off x="8869680" y="3886200"/>
-            <a:ext cx="2514600" cy="1463040"/>
-          </a:xfrm>
-          <a:prstGeom prst="rect">
-            <a:avLst/>
-          </a:prstGeom>
-          <a:noFill/>
-          <a:ln/>
-        </p:spPr>
-        <p:txBody>
-          <a:bodyPr wrap="square" rtlCol="0" anchor="ctr"/>
-          <a:lstStyle/>
-          <a:p>
-            <a:pPr indent="0" marL="0">
-              <a:lnSpc>
-                <a:spcPts val="2000"/>
-              </a:lnSpc>
-              <a:buNone/>
-            </a:pPr>
-            <a:r>
-              <a:rPr lang="en-US" sz="1400" dirty="0">
-                <a:solidFill>
-                  <a:srgbClr val="4A443B"/>
-                </a:solidFill>
-                <a:latin typeface="Calibri" pitchFamily="34" charset="0"/>
-                <a:ea typeface="Calibri" pitchFamily="34" charset="-122"/>
-                <a:cs typeface="Calibri" pitchFamily="34" charset="-120"/>
-              </a:rPr>
-              <a:t>The account is live when the cycle runs. The money lands.</a:t>
-            </a:r>
-            <a:endParaRPr lang="en-US" sz="1400" dirty="0"/>
-          </a:p>
-        </p:txBody>
-      </p:sp>
-      <p:sp>
-        <p:nvSpPr>
-          <p:cNvPr id="23" name="Shape 21"/>
-          <p:cNvSpPr/>
-          <p:nvPr/>
-        </p:nvSpPr>
-        <p:spPr>
-          <a:xfrm>
-            <a:off x="640080" y="5669280"/>
-            <a:ext cx="10881360" cy="777240"/>
-          </a:xfrm>
-          <a:prstGeom prst="roundRect">
-            <a:avLst>
-              <a:gd name="adj" fmla="val 11765"/>
-            </a:avLst>
-          </a:prstGeom>
-          <a:solidFill>
-            <a:srgbClr val="F6F2EA"/>
-          </a:solidFill>
-          <a:ln/>
-        </p:spPr>
-      </p:sp>
-      <p:sp>
-        <p:nvSpPr>
-          <p:cNvPr id="24" name="Text 22"/>
-          <p:cNvSpPr/>
-          <p:nvPr/>
-        </p:nvSpPr>
-        <p:spPr>
-          <a:xfrm>
-            <a:off x="914400" y="5669280"/>
-            <a:ext cx="10332720" cy="777240"/>
-          </a:xfrm>
-          <a:prstGeom prst="rect">
-            <a:avLst/>
-          </a:prstGeom>
-          <a:noFill/>
-          <a:ln/>
-        </p:spPr>
-        <p:txBody>
-          <a:bodyPr wrap="square" rtlCol="0" anchor="ctr"/>
-          <a:lstStyle/>
-          <a:p>
-            <a:pPr indent="0" marL="0">
-              <a:buNone/>
-            </a:pPr>
-            <a:r>
-              <a:rPr lang="en-US" sz="1500" b="1" dirty="0">
-                <a:solidFill>
-                  <a:srgbClr val="1E1B16"/>
-                </a:solidFill>
-                <a:latin typeface="Calibri" pitchFamily="34" charset="0"/>
-                <a:ea typeface="Calibri" pitchFamily="34" charset="-122"/>
-                <a:cs typeface="Calibri" pitchFamily="34" charset="-120"/>
-              </a:rPr>
-              <a:t>Most of this is a boring, auditable database check — deliberately. </a:t>
-            </a:r>
-            <a:pPr indent="0" marL="0">
-              <a:buNone/>
-            </a:pPr>
-            <a:r>
-              <a:rPr lang="en-US" sz="1500" dirty="0">
-                <a:solidFill>
-                  <a:srgbClr val="4A443B"/>
-                </a:solidFill>
-                <a:latin typeface="Calibri" pitchFamily="34" charset="0"/>
-                <a:ea typeface="Calibri" pitchFamily="34" charset="-122"/>
-                <a:cs typeface="Calibri" pitchFamily="34" charset="-120"/>
-              </a:rPr>
-              <a:t>The AI is concentrated in exactly one place: the last hundred metres, fixing the account without a branch visit.</a:t>
-            </a:r>
-            <a:endParaRPr lang="en-US" sz="1500" dirty="0"/>
+              <a:t>The return isn't per-payment. It is per-account-lifetime.</a:t>
+            </a:r>
+            <a:endParaRPr lang="en-US" sz="1600" dirty="0"/>
           </a:p>
         </p:txBody>
       </p:sp>
@@ -6153,7 +5067,7 @@
         </p:nvSpPr>
         <p:spPr>
           <a:xfrm>
-            <a:off x="640080" y="502920"/>
+            <a:off x="640080" y="475488"/>
             <a:ext cx="10911535" cy="320040"/>
           </a:xfrm>
           <a:prstGeom prst="rect">
@@ -6170,7 +5084,7 @@
               <a:buNone/>
             </a:pPr>
             <a:r>
-              <a:rPr lang="en-US" sz="1250" b="1" spc="200" kern="0" dirty="0">
+              <a:rPr lang="en-US" sz="1250" b="1" spc="250" kern="0" dirty="0">
                 <a:solidFill>
                   <a:srgbClr val="C4694A"/>
                 </a:solidFill>
@@ -6178,7 +5092,7 @@
                 <a:ea typeface="Calibri" pitchFamily="34" charset="-122"/>
                 <a:cs typeface="Calibri" pitchFamily="34" charset="-120"/>
               </a:rPr>
-              <a:t>WHERE THE AI IS — AND ISN'T</a:t>
+              <a:t>WHY ONLY SBI</a:t>
             </a:r>
             <a:endParaRPr lang="en-US" sz="1250" dirty="0"/>
           </a:p>
@@ -6192,8 +5106,8 @@
         </p:nvSpPr>
         <p:spPr>
           <a:xfrm>
-            <a:off x="640080" y="868680"/>
-            <a:ext cx="10911535" cy="1005840"/>
+            <a:off x="640080" y="841248"/>
+            <a:ext cx="10911535" cy="1188720"/>
           </a:xfrm>
           <a:prstGeom prst="rect">
             <a:avLst/>
@@ -6207,7 +5121,7 @@
           <a:p>
             <a:pPr indent="0" marL="0">
               <a:lnSpc>
-                <a:spcPts val="3570"/>
+                <a:spcPts val="3536"/>
               </a:lnSpc>
               <a:buNone/>
             </a:pPr>
@@ -6220,14 +5134,14 @@
                 <a:ea typeface="Cambria" pitchFamily="34" charset="-122"/>
                 <a:cs typeface="Cambria" pitchFamily="34" charset="-120"/>
               </a:rPr>
-              <a:t>The AI can talk.</a:t>
+              <a:t>The rails exist. The auth exists.</a:t>
             </a:r>
             <a:endParaRPr lang="en-US" sz="3400" dirty="0"/>
           </a:p>
           <a:p>
             <a:pPr indent="0" marL="0">
               <a:lnSpc>
-                <a:spcPts val="3570"/>
+                <a:spcPts val="3536"/>
               </a:lnSpc>
               <a:buNone/>
             </a:pPr>
@@ -6240,7 +5154,7 @@
                 <a:ea typeface="Cambria" pitchFamily="34" charset="-122"/>
                 <a:cs typeface="Cambria" pitchFamily="34" charset="-120"/>
               </a:rPr>
-              <a:t>It cannot open the gate.</a:t>
+              <a:t>The last-mile fix doesn't.</a:t>
             </a:r>
             <a:endParaRPr lang="en-US" sz="3400" dirty="0"/>
           </a:p>
@@ -6254,8 +5168,8 @@
         </p:nvSpPr>
         <p:spPr>
           <a:xfrm>
-            <a:off x="640080" y="2514600"/>
-            <a:ext cx="6035040" cy="1645920"/>
+            <a:off x="640080" y="2377440"/>
+            <a:ext cx="10607040" cy="1005840"/>
           </a:xfrm>
           <a:prstGeom prst="rect">
             <a:avLst/>
@@ -6269,12 +5183,12 @@
           <a:p>
             <a:pPr indent="0" marL="0">
               <a:lnSpc>
-                <a:spcPts val="2600"/>
+                <a:spcPts val="2400"/>
               </a:lnSpc>
               <a:buNone/>
             </a:pPr>
             <a:r>
-              <a:rPr lang="en-US" sz="1700" dirty="0">
+              <a:rPr lang="en-US" sz="1600" dirty="0">
                 <a:solidFill>
                   <a:srgbClr val="4A443B"/>
                 </a:solidFill>
@@ -6282,121 +5196,234 @@
                 <a:ea typeface="Calibri" pitchFamily="34" charset="-122"/>
                 <a:cs typeface="Calibri" pitchFamily="34" charset="-120"/>
               </a:rPr>
-              <a:t>The conversation re-skins the mandatory verification steps; it removes none of them. Every consequential decision runs through deterministic code — a gate the conversational layer cannot talk its way past.</a:t>
-            </a:r>
-            <a:endParaRPr lang="en-US" sz="1700" dirty="0"/>
-          </a:p>
-        </p:txBody>
-      </p:sp>
-      <p:sp>
-        <p:nvSpPr>
-          <p:cNvPr id="5" name="Text 3"/>
-          <p:cNvSpPr/>
-          <p:nvPr/>
-        </p:nvSpPr>
-        <p:spPr>
-          <a:xfrm>
-            <a:off x="640080" y="4114800"/>
-            <a:ext cx="6035040" cy="1188720"/>
-          </a:xfrm>
-          <a:prstGeom prst="rect">
-            <a:avLst/>
-          </a:prstGeom>
-          <a:noFill/>
-          <a:ln/>
-        </p:spPr>
-        <p:txBody>
-          <a:bodyPr wrap="square" rtlCol="0" anchor="ctr"/>
-          <a:lstStyle/>
-          <a:p>
-            <a:pPr indent="0" marL="0">
-              <a:lnSpc>
-                <a:spcPts val="2600"/>
-              </a:lnSpc>
-              <a:buNone/>
-            </a:pPr>
-            <a:r>
-              <a:rPr lang="en-US" sz="1700" dirty="0">
-                <a:solidFill>
-                  <a:srgbClr val="4A443B"/>
+              <a:t>NPCI runs the payment rails; Aadhaar libraries do the auth; the failure data is public. What nobody has built — and only SBI can run — is the layer that predicts the failure and fixes it. It needs three things a private bank cannot buy:</a:t>
+            </a:r>
+            <a:endParaRPr lang="en-US" sz="1600" dirty="0"/>
+          </a:p>
+        </p:txBody>
+      </p:sp>
+      <p:sp>
+        <p:nvSpPr>
+          <p:cNvPr id="5" name="Shape 3"/>
+          <p:cNvSpPr/>
+          <p:nvPr/>
+        </p:nvSpPr>
+        <p:spPr>
+          <a:xfrm>
+            <a:off x="640080" y="3611880"/>
+            <a:ext cx="457200" cy="457200"/>
+          </a:xfrm>
+          <a:prstGeom prst="ellipse">
+            <a:avLst/>
+          </a:prstGeom>
+          <a:solidFill>
+            <a:srgbClr val="5F6B57"/>
+          </a:solidFill>
+          <a:ln/>
+        </p:spPr>
+      </p:sp>
+      <p:sp>
+        <p:nvSpPr>
+          <p:cNvPr id="6" name="Text 4"/>
+          <p:cNvSpPr/>
+          <p:nvPr/>
+        </p:nvSpPr>
+        <p:spPr>
+          <a:xfrm>
+            <a:off x="640080" y="3611880"/>
+            <a:ext cx="457200" cy="457200"/>
+          </a:xfrm>
+          <a:prstGeom prst="rect">
+            <a:avLst/>
+          </a:prstGeom>
+          <a:noFill/>
+          <a:ln/>
+        </p:spPr>
+        <p:txBody>
+          <a:bodyPr wrap="square" rtlCol="0" anchor="ctr"/>
+          <a:lstStyle/>
+          <a:p>
+            <a:pPr algn="ctr" indent="0" marL="0">
+              <a:buNone/>
+            </a:pPr>
+            <a:r>
+              <a:rPr lang="en-US" sz="1250" b="1" dirty="0">
+                <a:solidFill>
+                  <a:srgbClr val="FFFFFF"/>
+                </a:solidFill>
+                <a:latin typeface="Cambria" pitchFamily="34" charset="0"/>
+                <a:ea typeface="Cambria" pitchFamily="34" charset="-122"/>
+                <a:cs typeface="Cambria" pitchFamily="34" charset="-120"/>
+              </a:rPr>
+              <a:t>✓</a:t>
+            </a:r>
+            <a:endParaRPr lang="en-US" sz="1250" dirty="0"/>
+          </a:p>
+        </p:txBody>
+      </p:sp>
+      <p:sp>
+        <p:nvSpPr>
+          <p:cNvPr id="7" name="Text 5"/>
+          <p:cNvSpPr/>
+          <p:nvPr/>
+        </p:nvSpPr>
+        <p:spPr>
+          <a:xfrm>
+            <a:off x="1298448" y="3611880"/>
+            <a:ext cx="6400800" cy="457200"/>
+          </a:xfrm>
+          <a:prstGeom prst="rect">
+            <a:avLst/>
+          </a:prstGeom>
+          <a:noFill/>
+          <a:ln/>
+        </p:spPr>
+        <p:txBody>
+          <a:bodyPr wrap="square" rtlCol="0" anchor="ctr"/>
+          <a:lstStyle/>
+          <a:p>
+            <a:pPr indent="0" marL="0">
+              <a:buNone/>
+            </a:pPr>
+            <a:r>
+              <a:rPr lang="en-US" sz="1650" dirty="0">
+                <a:solidFill>
+                  <a:srgbClr val="1E1B16"/>
                 </a:solidFill>
                 <a:latin typeface="Calibri" pitchFamily="34" charset="0"/>
                 <a:ea typeface="Calibri" pitchFamily="34" charset="-122"/>
                 <a:cs typeface="Calibri" pitchFamily="34" charset="-120"/>
               </a:rPr>
-              <a:t>The agent's powers are tiny and closed: verify identity, reactivate an account. It never moves money. Anything ambiguous defaults to a human.</a:t>
-            </a:r>
-            <a:endParaRPr lang="en-US" sz="1700" dirty="0"/>
-          </a:p>
-        </p:txBody>
-      </p:sp>
-      <p:sp>
-        <p:nvSpPr>
-          <p:cNvPr id="6" name="Shape 4"/>
-          <p:cNvSpPr/>
-          <p:nvPr/>
-        </p:nvSpPr>
-        <p:spPr>
-          <a:xfrm>
-            <a:off x="7498080" y="2468880"/>
-            <a:ext cx="3931920" cy="2743200"/>
-          </a:xfrm>
-          <a:prstGeom prst="roundRect">
-            <a:avLst>
-              <a:gd name="adj" fmla="val 4000"/>
-            </a:avLst>
-          </a:prstGeom>
-          <a:solidFill>
-            <a:srgbClr val="F6F2EA"/>
-          </a:solidFill>
-          <a:ln w="12700">
-            <a:solidFill>
-              <a:srgbClr val="E2DACB"/>
-            </a:solidFill>
-            <a:prstDash val="solid"/>
-          </a:ln>
-        </p:spPr>
-      </p:sp>
-      <p:sp>
-        <p:nvSpPr>
-          <p:cNvPr id="7" name="Text 5"/>
-          <p:cNvSpPr/>
-          <p:nvPr/>
-        </p:nvSpPr>
-        <p:spPr>
-          <a:xfrm>
-            <a:off x="7818120" y="2743200"/>
-            <a:ext cx="3383280" cy="411480"/>
-          </a:xfrm>
-          <a:prstGeom prst="rect">
-            <a:avLst/>
-          </a:prstGeom>
-          <a:noFill/>
-          <a:ln/>
-        </p:spPr>
-        <p:txBody>
-          <a:bodyPr wrap="square" rtlCol="0" anchor="ctr"/>
-          <a:lstStyle/>
-          <a:p>
-            <a:pPr indent="0" marL="0">
-              <a:buNone/>
-            </a:pPr>
-            <a:r>
-              <a:rPr lang="en-US" sz="1550" b="1" dirty="0">
-                <a:solidFill>
-                  <a:srgbClr val="5F6B57"/>
+              <a:t>Sees government payments as they route</a:t>
+            </a:r>
+            <a:endParaRPr lang="en-US" sz="1650" dirty="0"/>
+          </a:p>
+        </p:txBody>
+      </p:sp>
+      <p:sp>
+        <p:nvSpPr>
+          <p:cNvPr id="8" name="Text 6"/>
+          <p:cNvSpPr/>
+          <p:nvPr/>
+        </p:nvSpPr>
+        <p:spPr>
+          <a:xfrm>
+            <a:off x="7680960" y="3611880"/>
+            <a:ext cx="3840480" cy="457200"/>
+          </a:xfrm>
+          <a:prstGeom prst="rect">
+            <a:avLst/>
+          </a:prstGeom>
+          <a:noFill/>
+          <a:ln/>
+        </p:spPr>
+        <p:txBody>
+          <a:bodyPr wrap="square" rtlCol="0" anchor="ctr"/>
+          <a:lstStyle/>
+          <a:p>
+            <a:pPr indent="0" marL="0">
+              <a:buNone/>
+            </a:pPr>
+            <a:r>
+              <a:rPr lang="en-US" sz="1500" i="1" dirty="0">
+                <a:solidFill>
+                  <a:srgbClr val="A9532F"/>
                 </a:solidFill>
                 <a:latin typeface="Calibri" pitchFamily="34" charset="0"/>
                 <a:ea typeface="Calibri" pitchFamily="34" charset="-122"/>
                 <a:cs typeface="Calibri" pitchFamily="34" charset="-120"/>
               </a:rPr>
-              <a:t>✓  </a:t>
-            </a:r>
-            <a:pPr indent="0" marL="0">
-              <a:buNone/>
-            </a:pPr>
-            <a:r>
-              <a:rPr lang="en-US" sz="1550" dirty="0">
+              <a:t>— a primary DBT pipeline</a:t>
+            </a:r>
+            <a:endParaRPr lang="en-US" sz="1500" dirty="0"/>
+          </a:p>
+        </p:txBody>
+      </p:sp>
+      <p:sp>
+        <p:nvSpPr>
+          <p:cNvPr id="9" name="Shape 7"/>
+          <p:cNvSpPr/>
+          <p:nvPr/>
+        </p:nvSpPr>
+        <p:spPr>
+          <a:xfrm>
+            <a:off x="640080" y="4361688"/>
+            <a:ext cx="457200" cy="457200"/>
+          </a:xfrm>
+          <a:prstGeom prst="ellipse">
+            <a:avLst/>
+          </a:prstGeom>
+          <a:solidFill>
+            <a:srgbClr val="5F6B57"/>
+          </a:solidFill>
+          <a:ln/>
+        </p:spPr>
+      </p:sp>
+      <p:sp>
+        <p:nvSpPr>
+          <p:cNvPr id="10" name="Text 8"/>
+          <p:cNvSpPr/>
+          <p:nvPr/>
+        </p:nvSpPr>
+        <p:spPr>
+          <a:xfrm>
+            <a:off x="640080" y="4361688"/>
+            <a:ext cx="457200" cy="457200"/>
+          </a:xfrm>
+          <a:prstGeom prst="rect">
+            <a:avLst/>
+          </a:prstGeom>
+          <a:noFill/>
+          <a:ln/>
+        </p:spPr>
+        <p:txBody>
+          <a:bodyPr wrap="square" rtlCol="0" anchor="ctr"/>
+          <a:lstStyle/>
+          <a:p>
+            <a:pPr algn="ctr" indent="0" marL="0">
+              <a:buNone/>
+            </a:pPr>
+            <a:r>
+              <a:rPr lang="en-US" sz="1250" b="1" dirty="0">
+                <a:solidFill>
+                  <a:srgbClr val="FFFFFF"/>
+                </a:solidFill>
+                <a:latin typeface="Cambria" pitchFamily="34" charset="0"/>
+                <a:ea typeface="Cambria" pitchFamily="34" charset="-122"/>
+                <a:cs typeface="Cambria" pitchFamily="34" charset="-120"/>
+              </a:rPr>
+              <a:t>✓</a:t>
+            </a:r>
+            <a:endParaRPr lang="en-US" sz="1250" dirty="0"/>
+          </a:p>
+        </p:txBody>
+      </p:sp>
+      <p:sp>
+        <p:nvSpPr>
+          <p:cNvPr id="11" name="Text 9"/>
+          <p:cNvSpPr/>
+          <p:nvPr/>
+        </p:nvSpPr>
+        <p:spPr>
+          <a:xfrm>
+            <a:off x="1298448" y="4361688"/>
+            <a:ext cx="6400800" cy="457200"/>
+          </a:xfrm>
+          <a:prstGeom prst="rect">
+            <a:avLst/>
+          </a:prstGeom>
+          <a:noFill/>
+          <a:ln/>
+        </p:spPr>
+        <p:txBody>
+          <a:bodyPr wrap="square" rtlCol="0" anchor="ctr"/>
+          <a:lstStyle/>
+          <a:p>
+            <a:pPr indent="0" marL="0">
+              <a:buNone/>
+            </a:pPr>
+            <a:r>
+              <a:rPr lang="en-US" sz="1650" dirty="0">
                 <a:solidFill>
                   <a:srgbClr val="1E1B16"/>
                 </a:solidFill>
@@ -6404,52 +5431,136 @@
                 <a:ea typeface="Calibri" pitchFamily="34" charset="-122"/>
                 <a:cs typeface="Calibri" pitchFamily="34" charset="-120"/>
               </a:rPr>
-              <a:t>identity reconciled</a:t>
-            </a:r>
-            <a:endParaRPr lang="en-US" sz="1550" dirty="0"/>
-          </a:p>
-        </p:txBody>
-      </p:sp>
-      <p:sp>
-        <p:nvSpPr>
-          <p:cNvPr id="8" name="Text 6"/>
-          <p:cNvSpPr/>
-          <p:nvPr/>
-        </p:nvSpPr>
-        <p:spPr>
-          <a:xfrm>
-            <a:off x="7818120" y="3246120"/>
-            <a:ext cx="3383280" cy="411480"/>
-          </a:xfrm>
-          <a:prstGeom prst="rect">
-            <a:avLst/>
-          </a:prstGeom>
-          <a:noFill/>
-          <a:ln/>
-        </p:spPr>
-        <p:txBody>
-          <a:bodyPr wrap="square" rtlCol="0" anchor="ctr"/>
-          <a:lstStyle/>
-          <a:p>
-            <a:pPr indent="0" marL="0">
-              <a:buNone/>
-            </a:pPr>
-            <a:r>
-              <a:rPr lang="en-US" sz="1550" b="1" dirty="0">
-                <a:solidFill>
-                  <a:srgbClr val="5F6B57"/>
+              <a:t>Accounts at village density</a:t>
+            </a:r>
+            <a:endParaRPr lang="en-US" sz="1650" dirty="0"/>
+          </a:p>
+        </p:txBody>
+      </p:sp>
+      <p:sp>
+        <p:nvSpPr>
+          <p:cNvPr id="12" name="Text 10"/>
+          <p:cNvSpPr/>
+          <p:nvPr/>
+        </p:nvSpPr>
+        <p:spPr>
+          <a:xfrm>
+            <a:off x="7680960" y="4361688"/>
+            <a:ext cx="3840480" cy="457200"/>
+          </a:xfrm>
+          <a:prstGeom prst="rect">
+            <a:avLst/>
+          </a:prstGeom>
+          <a:noFill/>
+          <a:ln/>
+        </p:spPr>
+        <p:txBody>
+          <a:bodyPr wrap="square" rtlCol="0" anchor="ctr"/>
+          <a:lstStyle/>
+          <a:p>
+            <a:pPr indent="0" marL="0">
+              <a:buNone/>
+            </a:pPr>
+            <a:r>
+              <a:rPr lang="en-US" sz="1500" i="1" dirty="0">
+                <a:solidFill>
+                  <a:srgbClr val="A9532F"/>
                 </a:solidFill>
                 <a:latin typeface="Calibri" pitchFamily="34" charset="0"/>
                 <a:ea typeface="Calibri" pitchFamily="34" charset="-122"/>
                 <a:cs typeface="Calibri" pitchFamily="34" charset="-120"/>
               </a:rPr>
-              <a:t>✓  </a:t>
-            </a:r>
-            <a:pPr indent="0" marL="0">
-              <a:buNone/>
-            </a:pPr>
-            <a:r>
-              <a:rPr lang="en-US" sz="1550" dirty="0">
+              <a:t>— ~53 crore, every district</a:t>
+            </a:r>
+            <a:endParaRPr lang="en-US" sz="1500" dirty="0"/>
+          </a:p>
+        </p:txBody>
+      </p:sp>
+      <p:sp>
+        <p:nvSpPr>
+          <p:cNvPr id="13" name="Shape 11"/>
+          <p:cNvSpPr/>
+          <p:nvPr/>
+        </p:nvSpPr>
+        <p:spPr>
+          <a:xfrm>
+            <a:off x="640080" y="5111496"/>
+            <a:ext cx="457200" cy="457200"/>
+          </a:xfrm>
+          <a:prstGeom prst="ellipse">
+            <a:avLst/>
+          </a:prstGeom>
+          <a:solidFill>
+            <a:srgbClr val="5F6B57"/>
+          </a:solidFill>
+          <a:ln/>
+        </p:spPr>
+      </p:sp>
+      <p:sp>
+        <p:nvSpPr>
+          <p:cNvPr id="14" name="Text 12"/>
+          <p:cNvSpPr/>
+          <p:nvPr/>
+        </p:nvSpPr>
+        <p:spPr>
+          <a:xfrm>
+            <a:off x="640080" y="5111496"/>
+            <a:ext cx="457200" cy="457200"/>
+          </a:xfrm>
+          <a:prstGeom prst="rect">
+            <a:avLst/>
+          </a:prstGeom>
+          <a:noFill/>
+          <a:ln/>
+        </p:spPr>
+        <p:txBody>
+          <a:bodyPr wrap="square" rtlCol="0" anchor="ctr"/>
+          <a:lstStyle/>
+          <a:p>
+            <a:pPr algn="ctr" indent="0" marL="0">
+              <a:buNone/>
+            </a:pPr>
+            <a:r>
+              <a:rPr lang="en-US" sz="1250" b="1" dirty="0">
+                <a:solidFill>
+                  <a:srgbClr val="FFFFFF"/>
+                </a:solidFill>
+                <a:latin typeface="Cambria" pitchFamily="34" charset="0"/>
+                <a:ea typeface="Cambria" pitchFamily="34" charset="-122"/>
+                <a:cs typeface="Cambria" pitchFamily="34" charset="-120"/>
+              </a:rPr>
+              <a:t>✓</a:t>
+            </a:r>
+            <a:endParaRPr lang="en-US" sz="1250" dirty="0"/>
+          </a:p>
+        </p:txBody>
+      </p:sp>
+      <p:sp>
+        <p:nvSpPr>
+          <p:cNvPr id="15" name="Text 13"/>
+          <p:cNvSpPr/>
+          <p:nvPr/>
+        </p:nvSpPr>
+        <p:spPr>
+          <a:xfrm>
+            <a:off x="1298448" y="5111496"/>
+            <a:ext cx="6400800" cy="457200"/>
+          </a:xfrm>
+          <a:prstGeom prst="rect">
+            <a:avLst/>
+          </a:prstGeom>
+          <a:noFill/>
+          <a:ln/>
+        </p:spPr>
+        <p:txBody>
+          <a:bodyPr wrap="square" rtlCol="0" anchor="ctr"/>
+          <a:lstStyle/>
+          <a:p>
+            <a:pPr indent="0" marL="0">
+              <a:buNone/>
+            </a:pPr>
+            <a:r>
+              <a:rPr lang="en-US" sz="1650" dirty="0">
                 <a:solidFill>
                   <a:srgbClr val="1E1B16"/>
                 </a:solidFill>
@@ -6457,138 +5568,87 @@
                 <a:ea typeface="Calibri" pitchFamily="34" charset="-122"/>
                 <a:cs typeface="Calibri" pitchFamily="34" charset="-120"/>
               </a:rPr>
-              <a:t>screening clear</a:t>
-            </a:r>
-            <a:endParaRPr lang="en-US" sz="1550" dirty="0"/>
-          </a:p>
-        </p:txBody>
-      </p:sp>
-      <p:sp>
-        <p:nvSpPr>
-          <p:cNvPr id="9" name="Text 7"/>
-          <p:cNvSpPr/>
-          <p:nvPr/>
-        </p:nvSpPr>
-        <p:spPr>
-          <a:xfrm>
-            <a:off x="7818120" y="3749040"/>
-            <a:ext cx="3383280" cy="411480"/>
-          </a:xfrm>
-          <a:prstGeom prst="rect">
-            <a:avLst/>
-          </a:prstGeom>
-          <a:noFill/>
-          <a:ln/>
-        </p:spPr>
-        <p:txBody>
-          <a:bodyPr wrap="square" rtlCol="0" anchor="ctr"/>
-          <a:lstStyle/>
-          <a:p>
-            <a:pPr indent="0" marL="0">
-              <a:buNone/>
-            </a:pPr>
-            <a:r>
-              <a:rPr lang="en-US" sz="1550" b="1" dirty="0">
-                <a:solidFill>
-                  <a:srgbClr val="5F6B57"/>
+              <a:t>The mandate to fix inclusion gaps</a:t>
+            </a:r>
+            <a:endParaRPr lang="en-US" sz="1650" dirty="0"/>
+          </a:p>
+        </p:txBody>
+      </p:sp>
+      <p:sp>
+        <p:nvSpPr>
+          <p:cNvPr id="16" name="Text 14"/>
+          <p:cNvSpPr/>
+          <p:nvPr/>
+        </p:nvSpPr>
+        <p:spPr>
+          <a:xfrm>
+            <a:off x="7680960" y="5111496"/>
+            <a:ext cx="3840480" cy="457200"/>
+          </a:xfrm>
+          <a:prstGeom prst="rect">
+            <a:avLst/>
+          </a:prstGeom>
+          <a:noFill/>
+          <a:ln/>
+        </p:spPr>
+        <p:txBody>
+          <a:bodyPr wrap="square" rtlCol="0" anchor="ctr"/>
+          <a:lstStyle/>
+          <a:p>
+            <a:pPr indent="0" marL="0">
+              <a:buNone/>
+            </a:pPr>
+            <a:r>
+              <a:rPr lang="en-US" sz="1500" i="1" dirty="0">
+                <a:solidFill>
+                  <a:srgbClr val="A9532F"/>
                 </a:solidFill>
                 <a:latin typeface="Calibri" pitchFamily="34" charset="0"/>
                 <a:ea typeface="Calibri" pitchFamily="34" charset="-122"/>
                 <a:cs typeface="Calibri" pitchFamily="34" charset="-120"/>
               </a:rPr>
-              <a:t>✓  </a:t>
-            </a:r>
-            <a:pPr indent="0" marL="0">
-              <a:buNone/>
-            </a:pPr>
-            <a:r>
-              <a:rPr lang="en-US" sz="1550" dirty="0">
-                <a:solidFill>
-                  <a:srgbClr val="1E1B16"/>
+              <a:t>— banker to the nation</a:t>
+            </a:r>
+            <a:endParaRPr lang="en-US" sz="1500" dirty="0"/>
+          </a:p>
+        </p:txBody>
+      </p:sp>
+      <p:sp>
+        <p:nvSpPr>
+          <p:cNvPr id="17" name="Text 15"/>
+          <p:cNvSpPr/>
+          <p:nvPr/>
+        </p:nvSpPr>
+        <p:spPr>
+          <a:xfrm>
+            <a:off x="640080" y="6355080"/>
+            <a:ext cx="10911535" cy="320040"/>
+          </a:xfrm>
+          <a:prstGeom prst="rect">
+            <a:avLst/>
+          </a:prstGeom>
+          <a:noFill/>
+          <a:ln/>
+        </p:spPr>
+        <p:txBody>
+          <a:bodyPr wrap="square" rtlCol="0" anchor="ctr"/>
+          <a:lstStyle/>
+          <a:p>
+            <a:pPr indent="0" marL="0">
+              <a:buNone/>
+            </a:pPr>
+            <a:r>
+              <a:rPr lang="en-US" sz="1150" i="1" dirty="0">
+                <a:solidFill>
+                  <a:srgbClr val="C4694A"/>
                 </a:solidFill>
                 <a:latin typeface="Calibri" pitchFamily="34" charset="0"/>
                 <a:ea typeface="Calibri" pitchFamily="34" charset="-122"/>
                 <a:cs typeface="Calibri" pitchFamily="34" charset="-120"/>
               </a:rPr>
-              <a:t>person confirmed</a:t>
-            </a:r>
-            <a:endParaRPr lang="en-US" sz="1550" dirty="0"/>
-          </a:p>
-        </p:txBody>
-      </p:sp>
-      <p:sp>
-        <p:nvSpPr>
-          <p:cNvPr id="10" name="Shape 8"/>
-          <p:cNvSpPr/>
-          <p:nvPr/>
-        </p:nvSpPr>
-        <p:spPr>
-          <a:xfrm>
-            <a:off x="7818120" y="4343400"/>
-            <a:ext cx="3291840" cy="0"/>
-          </a:xfrm>
-          <a:prstGeom prst="line">
-            <a:avLst/>
-          </a:prstGeom>
-          <a:noFill/>
-          <a:ln w="12700">
-            <a:solidFill>
-              <a:srgbClr val="E2DACB"/>
-            </a:solidFill>
-            <a:prstDash val="solid"/>
-          </a:ln>
-        </p:spPr>
-      </p:sp>
-      <p:sp>
-        <p:nvSpPr>
-          <p:cNvPr id="11" name="Text 9"/>
-          <p:cNvSpPr/>
-          <p:nvPr/>
-        </p:nvSpPr>
-        <p:spPr>
-          <a:xfrm>
-            <a:off x="7818120" y="4480560"/>
-            <a:ext cx="3291840" cy="548640"/>
-          </a:xfrm>
-          <a:prstGeom prst="rect">
-            <a:avLst/>
-          </a:prstGeom>
-          <a:noFill/>
-          <a:ln/>
-        </p:spPr>
-        <p:txBody>
-          <a:bodyPr wrap="square" rtlCol="0" anchor="ctr"/>
-          <a:lstStyle/>
-          <a:p>
-            <a:pPr indent="0" marL="0">
-              <a:buNone/>
-            </a:pPr>
-            <a:r>
-              <a:rPr lang="en-US" sz="1800" b="1" dirty="0">
-                <a:solidFill>
-                  <a:srgbClr val="837C6E"/>
-                </a:solidFill>
-                <a:latin typeface="Courier New" pitchFamily="34" charset="0"/>
-                <a:ea typeface="Courier New" pitchFamily="34" charset="-122"/>
-                <a:cs typeface="Courier New" pitchFamily="34" charset="-120"/>
-              </a:rPr>
-              <a:t>GATE → </a:t>
-            </a:r>
-            <a:pPr indent="0" marL="0">
-              <a:buNone/>
-            </a:pPr>
-            <a:r>
-              <a:rPr lang="en-US" sz="1800" b="1" dirty="0">
-                <a:solidFill>
-                  <a:srgbClr val="5F6B57"/>
-                </a:solidFill>
-                <a:latin typeface="Courier New" pitchFamily="34" charset="0"/>
-                <a:ea typeface="Courier New" pitchFamily="34" charset="-122"/>
-                <a:cs typeface="Courier New" pitchFamily="34" charset="-120"/>
-              </a:rPr>
-              <a:t>OPEN</a:t>
-            </a:r>
-            <a:endParaRPr lang="en-US" sz="1800" dirty="0"/>
+              <a:t>It sells nothing. It gets people money that is already theirs.</a:t>
+            </a:r>
+            <a:endParaRPr lang="en-US" sz="1150" dirty="0"/>
           </a:p>
         </p:txBody>
       </p:sp>
@@ -6632,7 +5692,7 @@
         </p:nvSpPr>
         <p:spPr>
           <a:xfrm>
-            <a:off x="640080" y="502920"/>
+            <a:off x="640080" y="475488"/>
             <a:ext cx="10911535" cy="320040"/>
           </a:xfrm>
           <a:prstGeom prst="rect">
@@ -6649,7 +5709,7 @@
               <a:buNone/>
             </a:pPr>
             <a:r>
-              <a:rPr lang="en-US" sz="1250" b="1" spc="200" kern="0" dirty="0">
+              <a:rPr lang="en-US" sz="1250" b="1" spc="250" kern="0" dirty="0">
                 <a:solidFill>
                   <a:srgbClr val="C4694A"/>
                 </a:solidFill>
@@ -6657,7 +5717,7 @@
                 <a:ea typeface="Calibri" pitchFamily="34" charset="-122"/>
                 <a:cs typeface="Calibri" pitchFamily="34" charset="-120"/>
               </a:rPr>
-              <a:t>HONESTY</a:t>
+              <a:t>HOW — THE CHEAPEST FIX FIRST</a:t>
             </a:r>
             <a:endParaRPr lang="en-US" sz="1250" dirty="0"/>
           </a:p>
@@ -6671,8 +5731,8 @@
         </p:nvSpPr>
         <p:spPr>
           <a:xfrm>
-            <a:off x="640080" y="868680"/>
-            <a:ext cx="10911535" cy="1005840"/>
+            <a:off x="640080" y="841248"/>
+            <a:ext cx="10911535" cy="1188720"/>
           </a:xfrm>
           <a:prstGeom prst="rect">
             <a:avLst/>
@@ -6686,7 +5746,7 @@
           <a:p>
             <a:pPr indent="0" marL="0">
               <a:lnSpc>
-                <a:spcPts val="3570"/>
+                <a:spcPts val="3536"/>
               </a:lnSpc>
               <a:buNone/>
             </a:pPr>
@@ -6699,10 +5759,30 @@
                 <a:ea typeface="Cambria" pitchFamily="34" charset="-122"/>
                 <a:cs typeface="Cambria" pitchFamily="34" charset="-120"/>
               </a:rPr>
-              <a:t>The 20% we can't fix — and we say so.</a:t>
+              <a:t>Most systems would call everyone.</a:t>
             </a:r>
             <a:endParaRPr lang="en-US" sz="3400" dirty="0"/>
           </a:p>
+          <a:p>
+            <a:pPr indent="0" marL="0">
+              <a:lnSpc>
+                <a:spcPts val="3536"/>
+              </a:lnSpc>
+              <a:buNone/>
+            </a:pPr>
+            <a:r>
+              <a:rPr lang="en-US" sz="3400" b="1" dirty="0">
+                <a:solidFill>
+                  <a:srgbClr val="1E1B16"/>
+                </a:solidFill>
+                <a:latin typeface="Cambria" pitchFamily="34" charset="0"/>
+                <a:ea typeface="Cambria" pitchFamily="34" charset="-122"/>
+                <a:cs typeface="Cambria" pitchFamily="34" charset="-120"/>
+              </a:rPr>
+              <a:t>We don't.</a:t>
+            </a:r>
+            <a:endParaRPr lang="en-US" sz="3400" dirty="0"/>
+          </a:p>
         </p:txBody>
       </p:sp>
       <p:sp>
@@ -6713,8 +5793,8 @@
         </p:nvSpPr>
         <p:spPr>
           <a:xfrm>
-            <a:off x="640080" y="2194560"/>
-            <a:ext cx="10515600" cy="822960"/>
+            <a:off x="640080" y="2331720"/>
+            <a:ext cx="10607040" cy="731520"/>
           </a:xfrm>
           <a:prstGeom prst="rect">
             <a:avLst/>
@@ -6728,12 +5808,12 @@
           <a:p>
             <a:pPr indent="0" marL="0">
               <a:lnSpc>
-                <a:spcPts val="2500"/>
+                <a:spcPts val="2400"/>
               </a:lnSpc>
               <a:buNone/>
             </a:pPr>
             <a:r>
-              <a:rPr lang="en-US" sz="1650" dirty="0">
+              <a:rPr lang="en-US" sz="1600" dirty="0">
                 <a:solidFill>
                   <a:srgbClr val="4A443B"/>
                 </a:solidFill>
@@ -6741,75 +5821,87 @@
                 <a:ea typeface="Calibri" pitchFamily="34" charset="-122"/>
                 <a:cs typeface="Calibri" pitchFamily="34" charset="-120"/>
               </a:rPr>
-              <a:t>A system that claims to save everyone hasn't met the real world. Ours names its limits out loud and routes those cases to a human, on purpose.</a:t>
-            </a:r>
-            <a:endParaRPr lang="en-US" sz="1650" dirty="0"/>
-          </a:p>
-        </p:txBody>
-      </p:sp>
-      <p:sp>
-        <p:nvSpPr>
-          <p:cNvPr id="5" name="Shape 3"/>
+              <a:t>Resolve in ascending order of cost and customer burden; stop the moment an account goes green. On a modelled district's at-risk cohort:</a:t>
+            </a:r>
+            <a:endParaRPr lang="en-US" sz="1600" dirty="0"/>
+          </a:p>
+        </p:txBody>
+      </p:sp>
+      <p:sp>
+        <p:nvSpPr>
+          <p:cNvPr id="5" name="Text 3"/>
           <p:cNvSpPr/>
           <p:nvPr/>
         </p:nvSpPr>
         <p:spPr>
           <a:xfrm>
             <a:off x="640080" y="3200400"/>
-            <a:ext cx="5212080" cy="2377440"/>
-          </a:xfrm>
-          <a:prstGeom prst="roundRect">
-            <a:avLst>
-              <a:gd name="adj" fmla="val 3846"/>
-            </a:avLst>
-          </a:prstGeom>
-          <a:solidFill>
-            <a:srgbClr val="F6F2EA"/>
-          </a:solidFill>
-          <a:ln w="12700">
-            <a:solidFill>
-              <a:srgbClr val="E2DACB"/>
-            </a:solidFill>
-            <a:prstDash val="solid"/>
-          </a:ln>
-        </p:spPr>
-      </p:sp>
-      <p:sp>
-        <p:nvSpPr>
-          <p:cNvPr id="6" name="Text 4"/>
-          <p:cNvSpPr/>
-          <p:nvPr/>
-        </p:nvSpPr>
-        <p:spPr>
-          <a:xfrm>
-            <a:off x="960120" y="3474720"/>
-            <a:ext cx="4572000" cy="457200"/>
-          </a:xfrm>
-          <a:prstGeom prst="rect">
-            <a:avLst/>
-          </a:prstGeom>
-          <a:noFill/>
-          <a:ln/>
-        </p:spPr>
-        <p:txBody>
-          <a:bodyPr wrap="square" rtlCol="0" anchor="ctr"/>
-          <a:lstStyle/>
-          <a:p>
-            <a:pPr indent="0" marL="0">
-              <a:buNone/>
-            </a:pPr>
-            <a:r>
-              <a:rPr lang="en-US" sz="2000" b="1" dirty="0">
-                <a:solidFill>
-                  <a:srgbClr val="A9532F"/>
+            <a:ext cx="2560320" cy="731520"/>
+          </a:xfrm>
+          <a:prstGeom prst="rect">
+            <a:avLst/>
+          </a:prstGeom>
+          <a:noFill/>
+          <a:ln/>
+        </p:spPr>
+        <p:txBody>
+          <a:bodyPr wrap="square" rtlCol="0" anchor="ctr"/>
+          <a:lstStyle/>
+          <a:p>
+            <a:pPr indent="0" marL="0">
+              <a:buNone/>
+            </a:pPr>
+            <a:r>
+              <a:rPr lang="en-US" sz="4000" b="1" dirty="0">
+                <a:solidFill>
+                  <a:srgbClr val="5F6B57"/>
                 </a:solidFill>
                 <a:latin typeface="Cambria" pitchFamily="34" charset="0"/>
                 <a:ea typeface="Cambria" pitchFamily="34" charset="-122"/>
                 <a:cs typeface="Cambria" pitchFamily="34" charset="-120"/>
               </a:rPr>
-              <a:t>No phone at all</a:t>
-            </a:r>
-            <a:endParaRPr lang="en-US" sz="2000" dirty="0"/>
+              <a:t>22%</a:t>
+            </a:r>
+            <a:endParaRPr lang="en-US" sz="4000" dirty="0"/>
+          </a:p>
+        </p:txBody>
+      </p:sp>
+      <p:sp>
+        <p:nvSpPr>
+          <p:cNvPr id="6" name="Text 4"/>
+          <p:cNvSpPr/>
+          <p:nvPr/>
+        </p:nvSpPr>
+        <p:spPr>
+          <a:xfrm>
+            <a:off x="640080" y="3977640"/>
+            <a:ext cx="2514600" cy="365760"/>
+          </a:xfrm>
+          <a:prstGeom prst="rect">
+            <a:avLst/>
+          </a:prstGeom>
+          <a:noFill/>
+          <a:ln/>
+        </p:spPr>
+        <p:txBody>
+          <a:bodyPr wrap="square" rtlCol="0" anchor="ctr"/>
+          <a:lstStyle/>
+          <a:p>
+            <a:pPr indent="0" marL="0">
+              <a:buNone/>
+            </a:pPr>
+            <a:r>
+              <a:rPr lang="en-US" sz="1600" b="1" dirty="0">
+                <a:solidFill>
+                  <a:srgbClr val="1E1B16"/>
+                </a:solidFill>
+                <a:latin typeface="Cambria" pitchFamily="34" charset="0"/>
+                <a:ea typeface="Cambria" pitchFamily="34" charset="-122"/>
+                <a:cs typeface="Cambria" pitchFamily="34" charset="-120"/>
+              </a:rPr>
+              <a:t>Zero human contact</a:t>
+            </a:r>
+            <a:endParaRPr lang="en-US" sz="1600" dirty="0"/>
           </a:p>
         </p:txBody>
       </p:sp>
@@ -6821,8 +5913,8 @@
         </p:nvSpPr>
         <p:spPr>
           <a:xfrm>
-            <a:off x="960120" y="4023360"/>
-            <a:ext cx="4617720" cy="1463040"/>
+            <a:off x="640080" y="4389120"/>
+            <a:ext cx="2514600" cy="1554480"/>
           </a:xfrm>
           <a:prstGeom prst="rect">
             <a:avLst/>
@@ -6836,12 +5928,12 @@
           <a:p>
             <a:pPr indent="0" marL="0">
               <a:lnSpc>
-                <a:spcPts val="2200"/>
+                <a:spcPts val="1900"/>
               </a:lnSpc>
               <a:buNone/>
             </a:pPr>
             <a:r>
-              <a:rPr lang="en-US" sz="1500" dirty="0">
+              <a:rPr lang="en-US" sz="1300" dirty="0">
                 <a:solidFill>
                   <a:srgbClr val="4A443B"/>
                 </a:solidFill>
@@ -6849,75 +5941,87 @@
                 <a:ea typeface="Calibri" pitchFamily="34" charset="-122"/>
                 <a:cs typeface="Calibri" pitchFamily="34" charset="-120"/>
               </a:rPr>
-              <a:t>Can't be reached digitally. Flagged for the next banking camp — with a pre-filled paper form ready before the team arrives.</a:t>
-            </a:r>
-            <a:endParaRPr lang="en-US" sz="1500" dirty="0"/>
-          </a:p>
-        </p:txBody>
-      </p:sp>
-      <p:sp>
-        <p:nvSpPr>
-          <p:cNvPr id="8" name="Shape 6"/>
-          <p:cNvSpPr/>
-          <p:nvPr/>
-        </p:nvSpPr>
-        <p:spPr>
-          <a:xfrm>
-            <a:off x="6172200" y="3200400"/>
-            <a:ext cx="5212080" cy="2377440"/>
-          </a:xfrm>
-          <a:prstGeom prst="roundRect">
-            <a:avLst>
-              <a:gd name="adj" fmla="val 3846"/>
-            </a:avLst>
-          </a:prstGeom>
-          <a:solidFill>
-            <a:srgbClr val="F6F2EA"/>
-          </a:solidFill>
-          <a:ln w="12700">
-            <a:solidFill>
-              <a:srgbClr val="E2DACB"/>
-            </a:solidFill>
-            <a:prstDash val="solid"/>
-          </a:ln>
-        </p:spPr>
-      </p:sp>
-      <p:sp>
-        <p:nvSpPr>
-          <p:cNvPr id="9" name="Text 7"/>
-          <p:cNvSpPr/>
-          <p:nvPr/>
-        </p:nvSpPr>
-        <p:spPr>
-          <a:xfrm>
-            <a:off x="6492240" y="3474720"/>
-            <a:ext cx="4572000" cy="457200"/>
-          </a:xfrm>
-          <a:prstGeom prst="rect">
-            <a:avLst/>
-          </a:prstGeom>
-          <a:noFill/>
-          <a:ln/>
-        </p:spPr>
-        <p:txBody>
-          <a:bodyPr wrap="square" rtlCol="0" anchor="ctr"/>
-          <a:lstStyle/>
-          <a:p>
-            <a:pPr indent="0" marL="0">
-              <a:buNone/>
-            </a:pPr>
-            <a:r>
-              <a:rPr lang="en-US" sz="2000" b="1" dirty="0">
-                <a:solidFill>
-                  <a:srgbClr val="A9532F"/>
+              <a:t>already fixable from SBI's own data — the spelling-error names, a KYC done at another branch.</a:t>
+            </a:r>
+            <a:endParaRPr lang="en-US" sz="1300" dirty="0"/>
+          </a:p>
+        </p:txBody>
+      </p:sp>
+      <p:sp>
+        <p:nvSpPr>
+          <p:cNvPr id="8" name="Text 6"/>
+          <p:cNvSpPr/>
+          <p:nvPr/>
+        </p:nvSpPr>
+        <p:spPr>
+          <a:xfrm>
+            <a:off x="3383280" y="3200400"/>
+            <a:ext cx="2560320" cy="731520"/>
+          </a:xfrm>
+          <a:prstGeom prst="rect">
+            <a:avLst/>
+          </a:prstGeom>
+          <a:noFill/>
+          <a:ln/>
+        </p:spPr>
+        <p:txBody>
+          <a:bodyPr wrap="square" rtlCol="0" anchor="ctr"/>
+          <a:lstStyle/>
+          <a:p>
+            <a:pPr indent="0" marL="0">
+              <a:buNone/>
+            </a:pPr>
+            <a:r>
+              <a:rPr lang="en-US" sz="4000" b="1" dirty="0">
+                <a:solidFill>
+                  <a:srgbClr val="C4694A"/>
                 </a:solidFill>
                 <a:latin typeface="Cambria" pitchFamily="34" charset="0"/>
                 <a:ea typeface="Cambria" pitchFamily="34" charset="-122"/>
                 <a:cs typeface="Cambria" pitchFamily="34" charset="-120"/>
               </a:rPr>
-              <a:t>Genuine identity conflict</a:t>
-            </a:r>
-            <a:endParaRPr lang="en-US" sz="2000" dirty="0"/>
+              <a:t>+47%</a:t>
+            </a:r>
+            <a:endParaRPr lang="en-US" sz="4000" dirty="0"/>
+          </a:p>
+        </p:txBody>
+      </p:sp>
+      <p:sp>
+        <p:nvSpPr>
+          <p:cNvPr id="9" name="Text 7"/>
+          <p:cNvSpPr/>
+          <p:nvPr/>
+        </p:nvSpPr>
+        <p:spPr>
+          <a:xfrm>
+            <a:off x="3383280" y="3977640"/>
+            <a:ext cx="2514600" cy="365760"/>
+          </a:xfrm>
+          <a:prstGeom prst="rect">
+            <a:avLst/>
+          </a:prstGeom>
+          <a:noFill/>
+          <a:ln/>
+        </p:spPr>
+        <p:txBody>
+          <a:bodyPr wrap="square" rtlCol="0" anchor="ctr"/>
+          <a:lstStyle/>
+          <a:p>
+            <a:pPr indent="0" marL="0">
+              <a:buNone/>
+            </a:pPr>
+            <a:r>
+              <a:rPr lang="en-US" sz="1600" b="1" dirty="0">
+                <a:solidFill>
+                  <a:srgbClr val="1E1B16"/>
+                </a:solidFill>
+                <a:latin typeface="Cambria" pitchFamily="34" charset="0"/>
+                <a:ea typeface="Cambria" pitchFamily="34" charset="-122"/>
+                <a:cs typeface="Cambria" pitchFamily="34" charset="-120"/>
+              </a:rPr>
+              <a:t>Voice / IVR</a:t>
+            </a:r>
+            <a:endParaRPr lang="en-US" sz="1600" dirty="0"/>
           </a:p>
         </p:txBody>
       </p:sp>
@@ -6929,8 +6033,8 @@
         </p:nvSpPr>
         <p:spPr>
           <a:xfrm>
-            <a:off x="6492240" y="4023360"/>
-            <a:ext cx="4617720" cy="1463040"/>
+            <a:off x="3383280" y="4389120"/>
+            <a:ext cx="2514600" cy="1554480"/>
           </a:xfrm>
           <a:prstGeom prst="rect">
             <a:avLst/>
@@ -6944,12 +6048,12 @@
           <a:p>
             <a:pPr indent="0" marL="0">
               <a:lnSpc>
-                <a:spcPts val="2200"/>
+                <a:spcPts val="1900"/>
               </a:lnSpc>
               <a:buNone/>
             </a:pPr>
             <a:r>
-              <a:rPr lang="en-US" sz="1500" dirty="0">
+              <a:rPr lang="en-US" sz="1300" dirty="0">
                 <a:solidFill>
                   <a:srgbClr val="4A443B"/>
                 </a:solidFill>
@@ -6957,9 +6061,9 @@
                 <a:ea typeface="Calibri" pitchFamily="34" charset="-122"/>
                 <a:cs typeface="Calibri" pitchFamily="34" charset="-120"/>
               </a:rPr>
-              <a:t>Two documents, genuinely different names. The gate refuses to auto-reactivate; a human officer reviews it.</a:t>
-            </a:r>
-            <a:endParaRPr lang="en-US" sz="1500" dirty="0"/>
+              <a:t>self-serve re-KYC or one-tap reactivation, by phone. 69% resolved before anyone travels.</a:t>
+            </a:r>
+            <a:endParaRPr lang="en-US" sz="1300" dirty="0"/>
           </a:p>
         </p:txBody>
       </p:sp>
@@ -6971,34 +6075,274 @@
         </p:nvSpPr>
         <p:spPr>
           <a:xfrm>
-            <a:off x="640080" y="5852160"/>
-            <a:ext cx="10881360" cy="548640"/>
-          </a:xfrm>
-          <a:prstGeom prst="rect">
-            <a:avLst/>
-          </a:prstGeom>
-          <a:noFill/>
-          <a:ln/>
-        </p:spPr>
-        <p:txBody>
-          <a:bodyPr wrap="square" rtlCol="0" anchor="ctr"/>
-          <a:lstStyle/>
-          <a:p>
-            <a:pPr indent="0" marL="0">
-              <a:buNone/>
-            </a:pPr>
-            <a:r>
-              <a:rPr lang="en-US" sz="1600" i="1" dirty="0">
-                <a:solidFill>
-                  <a:srgbClr val="1E1B16"/>
+            <a:off x="6126480" y="3200400"/>
+            <a:ext cx="2560320" cy="731520"/>
+          </a:xfrm>
+          <a:prstGeom prst="rect">
+            <a:avLst/>
+          </a:prstGeom>
+          <a:noFill/>
+          <a:ln/>
+        </p:spPr>
+        <p:txBody>
+          <a:bodyPr wrap="square" rtlCol="0" anchor="ctr"/>
+          <a:lstStyle/>
+          <a:p>
+            <a:pPr indent="0" marL="0">
+              <a:buNone/>
+            </a:pPr>
+            <a:r>
+              <a:rPr lang="en-US" sz="4000" b="1" dirty="0">
+                <a:solidFill>
+                  <a:srgbClr val="B4842E"/>
                 </a:solidFill>
                 <a:latin typeface="Cambria" pitchFamily="34" charset="0"/>
                 <a:ea typeface="Cambria" pitchFamily="34" charset="-122"/>
                 <a:cs typeface="Cambria" pitchFamily="34" charset="-120"/>
               </a:rPr>
-              <a:t>Volunteering the boundary of your own system is the strongest signal of maturity there is — and almost no one does it.</a:t>
+              <a:t>27%</a:t>
+            </a:r>
+            <a:endParaRPr lang="en-US" sz="4000" dirty="0"/>
+          </a:p>
+        </p:txBody>
+      </p:sp>
+      <p:sp>
+        <p:nvSpPr>
+          <p:cNvPr id="12" name="Text 10"/>
+          <p:cNvSpPr/>
+          <p:nvPr/>
+        </p:nvSpPr>
+        <p:spPr>
+          <a:xfrm>
+            <a:off x="6126480" y="3977640"/>
+            <a:ext cx="2514600" cy="365760"/>
+          </a:xfrm>
+          <a:prstGeom prst="rect">
+            <a:avLst/>
+          </a:prstGeom>
+          <a:noFill/>
+          <a:ln/>
+        </p:spPr>
+        <p:txBody>
+          <a:bodyPr wrap="square" rtlCol="0" anchor="ctr"/>
+          <a:lstStyle/>
+          <a:p>
+            <a:pPr indent="0" marL="0">
+              <a:buNone/>
+            </a:pPr>
+            <a:r>
+              <a:rPr lang="en-US" sz="1600" b="1" dirty="0">
+                <a:solidFill>
+                  <a:srgbClr val="1E1B16"/>
+                </a:solidFill>
+                <a:latin typeface="Cambria" pitchFamily="34" charset="0"/>
+                <a:ea typeface="Cambria" pitchFamily="34" charset="-122"/>
+                <a:cs typeface="Cambria" pitchFamily="34" charset="-120"/>
+              </a:rPr>
+              <a:t>Banking camp</a:t>
             </a:r>
             <a:endParaRPr lang="en-US" sz="1600" dirty="0"/>
+          </a:p>
+        </p:txBody>
+      </p:sp>
+      <p:sp>
+        <p:nvSpPr>
+          <p:cNvPr id="13" name="Text 11"/>
+          <p:cNvSpPr/>
+          <p:nvPr/>
+        </p:nvSpPr>
+        <p:spPr>
+          <a:xfrm>
+            <a:off x="6126480" y="4389120"/>
+            <a:ext cx="2514600" cy="1554480"/>
+          </a:xfrm>
+          <a:prstGeom prst="rect">
+            <a:avLst/>
+          </a:prstGeom>
+          <a:noFill/>
+          <a:ln/>
+        </p:spPr>
+        <p:txBody>
+          <a:bodyPr wrap="square" rtlCol="0" anchor="ctr"/>
+          <a:lstStyle/>
+          <a:p>
+            <a:pPr indent="0" marL="0">
+              <a:lnSpc>
+                <a:spcPts val="1900"/>
+              </a:lnSpc>
+              <a:buNone/>
+            </a:pPr>
+            <a:r>
+              <a:rPr lang="en-US" sz="1300" dirty="0">
+                <a:solidFill>
+                  <a:srgbClr val="4A443B"/>
+                </a:solidFill>
+                <a:latin typeface="Calibri" pitchFamily="34" charset="0"/>
+                <a:ea typeface="Calibri" pitchFamily="34" charset="-122"/>
+                <a:cs typeface="Calibri" pitchFamily="34" charset="-120"/>
+              </a:rPr>
+              <a:t>batched by field and village — one visit clears hundreds of unseeded Aadhaars.</a:t>
+            </a:r>
+            <a:endParaRPr lang="en-US" sz="1300" dirty="0"/>
+          </a:p>
+        </p:txBody>
+      </p:sp>
+      <p:sp>
+        <p:nvSpPr>
+          <p:cNvPr id="14" name="Text 12"/>
+          <p:cNvSpPr/>
+          <p:nvPr/>
+        </p:nvSpPr>
+        <p:spPr>
+          <a:xfrm>
+            <a:off x="8869680" y="3200400"/>
+            <a:ext cx="2560320" cy="731520"/>
+          </a:xfrm>
+          <a:prstGeom prst="rect">
+            <a:avLst/>
+          </a:prstGeom>
+          <a:noFill/>
+          <a:ln/>
+        </p:spPr>
+        <p:txBody>
+          <a:bodyPr wrap="square" rtlCol="0" anchor="ctr"/>
+          <a:lstStyle/>
+          <a:p>
+            <a:pPr indent="0" marL="0">
+              <a:buNone/>
+            </a:pPr>
+            <a:r>
+              <a:rPr lang="en-US" sz="4000" b="1" dirty="0">
+                <a:solidFill>
+                  <a:srgbClr val="B23B32"/>
+                </a:solidFill>
+                <a:latin typeface="Cambria" pitchFamily="34" charset="0"/>
+                <a:ea typeface="Cambria" pitchFamily="34" charset="-122"/>
+                <a:cs typeface="Cambria" pitchFamily="34" charset="-120"/>
+              </a:rPr>
+              <a:t>3%</a:t>
+            </a:r>
+            <a:endParaRPr lang="en-US" sz="4000" dirty="0"/>
+          </a:p>
+        </p:txBody>
+      </p:sp>
+      <p:sp>
+        <p:nvSpPr>
+          <p:cNvPr id="15" name="Text 13"/>
+          <p:cNvSpPr/>
+          <p:nvPr/>
+        </p:nvSpPr>
+        <p:spPr>
+          <a:xfrm>
+            <a:off x="8869680" y="3977640"/>
+            <a:ext cx="2514600" cy="365760"/>
+          </a:xfrm>
+          <a:prstGeom prst="rect">
+            <a:avLst/>
+          </a:prstGeom>
+          <a:noFill/>
+          <a:ln/>
+        </p:spPr>
+        <p:txBody>
+          <a:bodyPr wrap="square" rtlCol="0" anchor="ctr"/>
+          <a:lstStyle/>
+          <a:p>
+            <a:pPr indent="0" marL="0">
+              <a:buNone/>
+            </a:pPr>
+            <a:r>
+              <a:rPr lang="en-US" sz="1600" b="1" dirty="0">
+                <a:solidFill>
+                  <a:srgbClr val="1E1B16"/>
+                </a:solidFill>
+                <a:latin typeface="Cambria" pitchFamily="34" charset="0"/>
+                <a:ea typeface="Cambria" pitchFamily="34" charset="-122"/>
+                <a:cs typeface="Cambria" pitchFamily="34" charset="-120"/>
+              </a:rPr>
+              <a:t>Human officer</a:t>
+            </a:r>
+            <a:endParaRPr lang="en-US" sz="1600" dirty="0"/>
+          </a:p>
+        </p:txBody>
+      </p:sp>
+      <p:sp>
+        <p:nvSpPr>
+          <p:cNvPr id="16" name="Text 14"/>
+          <p:cNvSpPr/>
+          <p:nvPr/>
+        </p:nvSpPr>
+        <p:spPr>
+          <a:xfrm>
+            <a:off x="8869680" y="4389120"/>
+            <a:ext cx="2514600" cy="1554480"/>
+          </a:xfrm>
+          <a:prstGeom prst="rect">
+            <a:avLst/>
+          </a:prstGeom>
+          <a:noFill/>
+          <a:ln/>
+        </p:spPr>
+        <p:txBody>
+          <a:bodyPr wrap="square" rtlCol="0" anchor="ctr"/>
+          <a:lstStyle/>
+          <a:p>
+            <a:pPr indent="0" marL="0">
+              <a:lnSpc>
+                <a:spcPts val="1900"/>
+              </a:lnSpc>
+              <a:buNone/>
+            </a:pPr>
+            <a:r>
+              <a:rPr lang="en-US" sz="1300" dirty="0">
+                <a:solidFill>
+                  <a:srgbClr val="4A443B"/>
+                </a:solidFill>
+                <a:latin typeface="Calibri" pitchFamily="34" charset="0"/>
+                <a:ea typeface="Calibri" pitchFamily="34" charset="-122"/>
+                <a:cs typeface="Calibri" pitchFamily="34" charset="-120"/>
+              </a:rPr>
+              <a:t>the genuine identity conflicts only. The gate refuses to auto-resolve these.</a:t>
+            </a:r>
+            <a:endParaRPr lang="en-US" sz="1300" dirty="0"/>
+          </a:p>
+        </p:txBody>
+      </p:sp>
+      <p:sp>
+        <p:nvSpPr>
+          <p:cNvPr id="17" name="Text 15"/>
+          <p:cNvSpPr/>
+          <p:nvPr/>
+        </p:nvSpPr>
+        <p:spPr>
+          <a:xfrm>
+            <a:off x="640080" y="6355080"/>
+            <a:ext cx="10911535" cy="320040"/>
+          </a:xfrm>
+          <a:prstGeom prst="rect">
+            <a:avLst/>
+          </a:prstGeom>
+          <a:noFill/>
+          <a:ln/>
+        </p:spPr>
+        <p:txBody>
+          <a:bodyPr wrap="square" rtlCol="0" anchor="ctr"/>
+          <a:lstStyle/>
+          <a:p>
+            <a:pPr indent="0" marL="0">
+              <a:buNone/>
+            </a:pPr>
+            <a:r>
+              <a:rPr lang="en-US" sz="1150" i="1" dirty="0">
+                <a:solidFill>
+                  <a:srgbClr val="837C6E"/>
+                </a:solidFill>
+                <a:latin typeface="Calibri" pitchFamily="34" charset="0"/>
+                <a:ea typeface="Calibri" pitchFamily="34" charset="-122"/>
+                <a:cs typeface="Calibri" pitchFamily="34" charset="-120"/>
+              </a:rPr>
+              <a:t>Percentages computed by the readiness engine in this repo — deterministic, re-derivable. The cheap rungs carry the volume, so cost-per-rescue collapses.</a:t>
+            </a:r>
+            <a:endParaRPr lang="en-US" sz="1150" dirty="0"/>
           </a:p>
         </p:txBody>
       </p:sp>
@@ -7013,6 +6357,485 @@
 <file path=ppt/slides/slide8.xml><?xml version="1.0" encoding="utf-8"?>
 <p:sld xmlns:a="http://schemas.openxmlformats.org/drawingml/2006/main" xmlns:r="http://schemas.openxmlformats.org/officeDocument/2006/relationships" xmlns:p="http://schemas.openxmlformats.org/presentationml/2006/main">
   <p:cSld name="Slide 8">
+    <p:bg>
+      <p:bgPr>
+        <a:solidFill>
+          <a:srgbClr val="FFFFFF"/>
+        </a:solidFill>
+      </p:bgPr>
+    </p:bg>
+    <p:spTree>
+      <p:nvGrpSpPr>
+        <p:cNvPr id="1" name=""/>
+        <p:cNvGrpSpPr/>
+        <p:nvPr/>
+      </p:nvGrpSpPr>
+      <p:grpSpPr>
+        <a:xfrm>
+          <a:off x="0" y="0"/>
+          <a:ext cx="0" cy="0"/>
+          <a:chOff x="0" y="0"/>
+          <a:chExt cx="0" cy="0"/>
+        </a:xfrm>
+      </p:grpSpPr>
+      <p:sp>
+        <p:nvSpPr>
+          <p:cNvPr id="2" name="Text 0"/>
+          <p:cNvSpPr/>
+          <p:nvPr/>
+        </p:nvSpPr>
+        <p:spPr>
+          <a:xfrm>
+            <a:off x="640080" y="475488"/>
+            <a:ext cx="10911535" cy="320040"/>
+          </a:xfrm>
+          <a:prstGeom prst="rect">
+            <a:avLst/>
+          </a:prstGeom>
+          <a:noFill/>
+          <a:ln/>
+        </p:spPr>
+        <p:txBody>
+          <a:bodyPr wrap="square" rtlCol="0" anchor="ctr"/>
+          <a:lstStyle/>
+          <a:p>
+            <a:pPr indent="0" marL="0">
+              <a:buNone/>
+            </a:pPr>
+            <a:r>
+              <a:rPr lang="en-US" sz="1250" b="1" spc="250" kern="0" dirty="0">
+                <a:solidFill>
+                  <a:srgbClr val="C4694A"/>
+                </a:solidFill>
+                <a:latin typeface="Calibri" pitchFamily="34" charset="0"/>
+                <a:ea typeface="Calibri" pitchFamily="34" charset="-122"/>
+                <a:cs typeface="Calibri" pitchFamily="34" charset="-120"/>
+              </a:rPr>
+              <a:t>WHERE THE AI IS — AND ISN'T</a:t>
+            </a:r>
+            <a:endParaRPr lang="en-US" sz="1250" dirty="0"/>
+          </a:p>
+        </p:txBody>
+      </p:sp>
+      <p:sp>
+        <p:nvSpPr>
+          <p:cNvPr id="3" name="Text 1"/>
+          <p:cNvSpPr/>
+          <p:nvPr/>
+        </p:nvSpPr>
+        <p:spPr>
+          <a:xfrm>
+            <a:off x="640080" y="841248"/>
+            <a:ext cx="10911535" cy="1188720"/>
+          </a:xfrm>
+          <a:prstGeom prst="rect">
+            <a:avLst/>
+          </a:prstGeom>
+          <a:noFill/>
+          <a:ln/>
+        </p:spPr>
+        <p:txBody>
+          <a:bodyPr wrap="square" rtlCol="0" anchor="ctr"/>
+          <a:lstStyle/>
+          <a:p>
+            <a:pPr indent="0" marL="0">
+              <a:lnSpc>
+                <a:spcPts val="3536"/>
+              </a:lnSpc>
+              <a:buNone/>
+            </a:pPr>
+            <a:r>
+              <a:rPr lang="en-US" sz="3400" b="1" dirty="0">
+                <a:solidFill>
+                  <a:srgbClr val="1E1B16"/>
+                </a:solidFill>
+                <a:latin typeface="Cambria" pitchFamily="34" charset="0"/>
+                <a:ea typeface="Cambria" pitchFamily="34" charset="-122"/>
+                <a:cs typeface="Cambria" pitchFamily="34" charset="-120"/>
+              </a:rPr>
+              <a:t>The AI can talk.</a:t>
+            </a:r>
+            <a:endParaRPr lang="en-US" sz="3400" dirty="0"/>
+          </a:p>
+          <a:p>
+            <a:pPr indent="0" marL="0">
+              <a:lnSpc>
+                <a:spcPts val="3536"/>
+              </a:lnSpc>
+              <a:buNone/>
+            </a:pPr>
+            <a:r>
+              <a:rPr lang="en-US" sz="3400" b="1" dirty="0">
+                <a:solidFill>
+                  <a:srgbClr val="1E1B16"/>
+                </a:solidFill>
+                <a:latin typeface="Cambria" pitchFamily="34" charset="0"/>
+                <a:ea typeface="Cambria" pitchFamily="34" charset="-122"/>
+                <a:cs typeface="Cambria" pitchFamily="34" charset="-120"/>
+              </a:rPr>
+              <a:t>It cannot open the gate.</a:t>
+            </a:r>
+            <a:endParaRPr lang="en-US" sz="3400" dirty="0"/>
+          </a:p>
+        </p:txBody>
+      </p:sp>
+      <p:sp>
+        <p:nvSpPr>
+          <p:cNvPr id="4" name="Text 2"/>
+          <p:cNvSpPr/>
+          <p:nvPr/>
+        </p:nvSpPr>
+        <p:spPr>
+          <a:xfrm>
+            <a:off x="640080" y="2514600"/>
+            <a:ext cx="6126480" cy="1554480"/>
+          </a:xfrm>
+          <a:prstGeom prst="rect">
+            <a:avLst/>
+          </a:prstGeom>
+          <a:noFill/>
+          <a:ln/>
+        </p:spPr>
+        <p:txBody>
+          <a:bodyPr wrap="square" rtlCol="0" anchor="ctr"/>
+          <a:lstStyle/>
+          <a:p>
+            <a:pPr indent="0" marL="0">
+              <a:lnSpc>
+                <a:spcPts val="2600"/>
+              </a:lnSpc>
+              <a:buNone/>
+            </a:pPr>
+            <a:r>
+              <a:rPr lang="en-US" sz="1700" dirty="0">
+                <a:solidFill>
+                  <a:srgbClr val="4A443B"/>
+                </a:solidFill>
+                <a:latin typeface="Calibri" pitchFamily="34" charset="0"/>
+                <a:ea typeface="Calibri" pitchFamily="34" charset="-122"/>
+                <a:cs typeface="Calibri" pitchFamily="34" charset="-120"/>
+              </a:rPr>
+              <a:t>The one place that genuinely needs AI is the last hundred metres: a patient, vernacular voice conversation that renews a KYC without a branch visit and self-heals a document-name mismatch.</a:t>
+            </a:r>
+            <a:endParaRPr lang="en-US" sz="1700" dirty="0"/>
+          </a:p>
+        </p:txBody>
+      </p:sp>
+      <p:sp>
+        <p:nvSpPr>
+          <p:cNvPr id="5" name="Text 3"/>
+          <p:cNvSpPr/>
+          <p:nvPr/>
+        </p:nvSpPr>
+        <p:spPr>
+          <a:xfrm>
+            <a:off x="640080" y="4114800"/>
+            <a:ext cx="6126480" cy="1188720"/>
+          </a:xfrm>
+          <a:prstGeom prst="rect">
+            <a:avLst/>
+          </a:prstGeom>
+          <a:noFill/>
+          <a:ln/>
+        </p:spPr>
+        <p:txBody>
+          <a:bodyPr wrap="square" rtlCol="0" anchor="ctr"/>
+          <a:lstStyle/>
+          <a:p>
+            <a:pPr indent="0" marL="0">
+              <a:lnSpc>
+                <a:spcPts val="2600"/>
+              </a:lnSpc>
+              <a:buNone/>
+            </a:pPr>
+            <a:r>
+              <a:rPr lang="en-US" sz="1700" dirty="0">
+                <a:solidFill>
+                  <a:srgbClr val="4A443B"/>
+                </a:solidFill>
+                <a:latin typeface="Calibri" pitchFamily="34" charset="0"/>
+                <a:ea typeface="Calibri" pitchFamily="34" charset="-122"/>
+                <a:cs typeface="Calibri" pitchFamily="34" charset="-120"/>
+              </a:rPr>
+              <a:t>Every consequential decision then runs through deterministic code — a gate the conversation cannot talk its way past. The agent never moves money; anything ambiguous defaults to a human.</a:t>
+            </a:r>
+            <a:endParaRPr lang="en-US" sz="1700" dirty="0"/>
+          </a:p>
+        </p:txBody>
+      </p:sp>
+      <p:sp>
+        <p:nvSpPr>
+          <p:cNvPr id="6" name="Shape 4"/>
+          <p:cNvSpPr/>
+          <p:nvPr/>
+        </p:nvSpPr>
+        <p:spPr>
+          <a:xfrm>
+            <a:off x="7589520" y="2514600"/>
+            <a:ext cx="3931920" cy="2743200"/>
+          </a:xfrm>
+          <a:prstGeom prst="roundRect">
+            <a:avLst>
+              <a:gd name="adj" fmla="val 4000"/>
+            </a:avLst>
+          </a:prstGeom>
+          <a:solidFill>
+            <a:srgbClr val="F6F2EA"/>
+          </a:solidFill>
+          <a:ln w="12700">
+            <a:solidFill>
+              <a:srgbClr val="E2DACB"/>
+            </a:solidFill>
+            <a:prstDash val="solid"/>
+          </a:ln>
+        </p:spPr>
+      </p:sp>
+      <p:sp>
+        <p:nvSpPr>
+          <p:cNvPr id="7" name="Text 5"/>
+          <p:cNvSpPr/>
+          <p:nvPr/>
+        </p:nvSpPr>
+        <p:spPr>
+          <a:xfrm>
+            <a:off x="7882128" y="2788920"/>
+            <a:ext cx="3383280" cy="411480"/>
+          </a:xfrm>
+          <a:prstGeom prst="rect">
+            <a:avLst/>
+          </a:prstGeom>
+          <a:noFill/>
+          <a:ln/>
+        </p:spPr>
+        <p:txBody>
+          <a:bodyPr wrap="square" rtlCol="0" anchor="ctr"/>
+          <a:lstStyle/>
+          <a:p>
+            <a:pPr indent="0" marL="0">
+              <a:buNone/>
+            </a:pPr>
+            <a:r>
+              <a:rPr lang="en-US" sz="1550" b="1" dirty="0">
+                <a:solidFill>
+                  <a:srgbClr val="5F6B57"/>
+                </a:solidFill>
+                <a:latin typeface="Calibri" pitchFamily="34" charset="0"/>
+                <a:ea typeface="Calibri" pitchFamily="34" charset="-122"/>
+                <a:cs typeface="Calibri" pitchFamily="34" charset="-120"/>
+              </a:rPr>
+              <a:t>✓  </a:t>
+            </a:r>
+            <a:pPr indent="0" marL="0">
+              <a:buNone/>
+            </a:pPr>
+            <a:r>
+              <a:rPr lang="en-US" sz="1550" dirty="0">
+                <a:solidFill>
+                  <a:srgbClr val="1E1B16"/>
+                </a:solidFill>
+                <a:latin typeface="Calibri" pitchFamily="34" charset="0"/>
+                <a:ea typeface="Calibri" pitchFamily="34" charset="-122"/>
+                <a:cs typeface="Calibri" pitchFamily="34" charset="-120"/>
+              </a:rPr>
+              <a:t>identity reconciled</a:t>
+            </a:r>
+            <a:endParaRPr lang="en-US" sz="1550" dirty="0"/>
+          </a:p>
+        </p:txBody>
+      </p:sp>
+      <p:sp>
+        <p:nvSpPr>
+          <p:cNvPr id="8" name="Text 6"/>
+          <p:cNvSpPr/>
+          <p:nvPr/>
+        </p:nvSpPr>
+        <p:spPr>
+          <a:xfrm>
+            <a:off x="7882128" y="3291840"/>
+            <a:ext cx="3383280" cy="411480"/>
+          </a:xfrm>
+          <a:prstGeom prst="rect">
+            <a:avLst/>
+          </a:prstGeom>
+          <a:noFill/>
+          <a:ln/>
+        </p:spPr>
+        <p:txBody>
+          <a:bodyPr wrap="square" rtlCol="0" anchor="ctr"/>
+          <a:lstStyle/>
+          <a:p>
+            <a:pPr indent="0" marL="0">
+              <a:buNone/>
+            </a:pPr>
+            <a:r>
+              <a:rPr lang="en-US" sz="1550" b="1" dirty="0">
+                <a:solidFill>
+                  <a:srgbClr val="5F6B57"/>
+                </a:solidFill>
+                <a:latin typeface="Calibri" pitchFamily="34" charset="0"/>
+                <a:ea typeface="Calibri" pitchFamily="34" charset="-122"/>
+                <a:cs typeface="Calibri" pitchFamily="34" charset="-120"/>
+              </a:rPr>
+              <a:t>✓  </a:t>
+            </a:r>
+            <a:pPr indent="0" marL="0">
+              <a:buNone/>
+            </a:pPr>
+            <a:r>
+              <a:rPr lang="en-US" sz="1550" dirty="0">
+                <a:solidFill>
+                  <a:srgbClr val="1E1B16"/>
+                </a:solidFill>
+                <a:latin typeface="Calibri" pitchFamily="34" charset="0"/>
+                <a:ea typeface="Calibri" pitchFamily="34" charset="-122"/>
+                <a:cs typeface="Calibri" pitchFamily="34" charset="-120"/>
+              </a:rPr>
+              <a:t>screening clear</a:t>
+            </a:r>
+            <a:endParaRPr lang="en-US" sz="1550" dirty="0"/>
+          </a:p>
+        </p:txBody>
+      </p:sp>
+      <p:sp>
+        <p:nvSpPr>
+          <p:cNvPr id="9" name="Text 7"/>
+          <p:cNvSpPr/>
+          <p:nvPr/>
+        </p:nvSpPr>
+        <p:spPr>
+          <a:xfrm>
+            <a:off x="7882128" y="3794760"/>
+            <a:ext cx="3383280" cy="411480"/>
+          </a:xfrm>
+          <a:prstGeom prst="rect">
+            <a:avLst/>
+          </a:prstGeom>
+          <a:noFill/>
+          <a:ln/>
+        </p:spPr>
+        <p:txBody>
+          <a:bodyPr wrap="square" rtlCol="0" anchor="ctr"/>
+          <a:lstStyle/>
+          <a:p>
+            <a:pPr indent="0" marL="0">
+              <a:buNone/>
+            </a:pPr>
+            <a:r>
+              <a:rPr lang="en-US" sz="1550" b="1" dirty="0">
+                <a:solidFill>
+                  <a:srgbClr val="5F6B57"/>
+                </a:solidFill>
+                <a:latin typeface="Calibri" pitchFamily="34" charset="0"/>
+                <a:ea typeface="Calibri" pitchFamily="34" charset="-122"/>
+                <a:cs typeface="Calibri" pitchFamily="34" charset="-120"/>
+              </a:rPr>
+              <a:t>✓  </a:t>
+            </a:r>
+            <a:pPr indent="0" marL="0">
+              <a:buNone/>
+            </a:pPr>
+            <a:r>
+              <a:rPr lang="en-US" sz="1550" dirty="0">
+                <a:solidFill>
+                  <a:srgbClr val="1E1B16"/>
+                </a:solidFill>
+                <a:latin typeface="Calibri" pitchFamily="34" charset="0"/>
+                <a:ea typeface="Calibri" pitchFamily="34" charset="-122"/>
+                <a:cs typeface="Calibri" pitchFamily="34" charset="-120"/>
+              </a:rPr>
+              <a:t>person confirmed</a:t>
+            </a:r>
+            <a:endParaRPr lang="en-US" sz="1550" dirty="0"/>
+          </a:p>
+        </p:txBody>
+      </p:sp>
+      <p:sp>
+        <p:nvSpPr>
+          <p:cNvPr id="10" name="Shape 8"/>
+          <p:cNvSpPr/>
+          <p:nvPr/>
+        </p:nvSpPr>
+        <p:spPr>
+          <a:xfrm>
+            <a:off x="7882128" y="4389120"/>
+            <a:ext cx="3291840" cy="0"/>
+          </a:xfrm>
+          <a:prstGeom prst="line">
+            <a:avLst/>
+          </a:prstGeom>
+          <a:noFill/>
+          <a:ln w="12700">
+            <a:solidFill>
+              <a:srgbClr val="E2DACB"/>
+            </a:solidFill>
+            <a:prstDash val="solid"/>
+          </a:ln>
+        </p:spPr>
+      </p:sp>
+      <p:sp>
+        <p:nvSpPr>
+          <p:cNvPr id="11" name="Text 9"/>
+          <p:cNvSpPr/>
+          <p:nvPr/>
+        </p:nvSpPr>
+        <p:spPr>
+          <a:xfrm>
+            <a:off x="7882128" y="4526280"/>
+            <a:ext cx="3291840" cy="548640"/>
+          </a:xfrm>
+          <a:prstGeom prst="rect">
+            <a:avLst/>
+          </a:prstGeom>
+          <a:noFill/>
+          <a:ln/>
+        </p:spPr>
+        <p:txBody>
+          <a:bodyPr wrap="square" rtlCol="0" anchor="ctr"/>
+          <a:lstStyle/>
+          <a:p>
+            <a:pPr indent="0" marL="0">
+              <a:buNone/>
+            </a:pPr>
+            <a:r>
+              <a:rPr lang="en-US" sz="1800" b="1" dirty="0">
+                <a:solidFill>
+                  <a:srgbClr val="837C6E"/>
+                </a:solidFill>
+                <a:latin typeface="Courier New" pitchFamily="34" charset="0"/>
+                <a:ea typeface="Courier New" pitchFamily="34" charset="-122"/>
+                <a:cs typeface="Courier New" pitchFamily="34" charset="-120"/>
+              </a:rPr>
+              <a:t>GATE → </a:t>
+            </a:r>
+            <a:pPr indent="0" marL="0">
+              <a:buNone/>
+            </a:pPr>
+            <a:r>
+              <a:rPr lang="en-US" sz="1800" b="1" dirty="0">
+                <a:solidFill>
+                  <a:srgbClr val="5F6B57"/>
+                </a:solidFill>
+                <a:latin typeface="Courier New" pitchFamily="34" charset="0"/>
+                <a:ea typeface="Courier New" pitchFamily="34" charset="-122"/>
+                <a:cs typeface="Courier New" pitchFamily="34" charset="-120"/>
+              </a:rPr>
+              <a:t>OPEN</a:t>
+            </a:r>
+            <a:endParaRPr lang="en-US" sz="1800" dirty="0"/>
+          </a:p>
+        </p:txBody>
+      </p:sp>
+    </p:spTree>
+  </p:cSld>
+  <p:clrMapOvr>
+    <a:masterClrMapping/>
+  </p:clrMapOvr>
+</p:sld>
+</file>
+
+<file path=ppt/slides/slide9.xml><?xml version="1.0" encoding="utf-8"?>
+<p:sld xmlns:a="http://schemas.openxmlformats.org/drawingml/2006/main" xmlns:r="http://schemas.openxmlformats.org/officeDocument/2006/relationships" xmlns:p="http://schemas.openxmlformats.org/presentationml/2006/main">
+  <p:cSld name="Slide 9">
     <p:bg>
       <p:bgPr>
         <a:solidFill>
@@ -7042,7 +6865,7 @@
         </p:nvSpPr>
         <p:spPr>
           <a:xfrm>
-            <a:off x="640080" y="502920"/>
+            <a:off x="640080" y="475488"/>
             <a:ext cx="10911535" cy="320040"/>
           </a:xfrm>
           <a:prstGeom prst="rect">
@@ -7059,7 +6882,7 @@
               <a:buNone/>
             </a:pPr>
             <a:r>
-              <a:rPr lang="en-US" sz="1250" b="1" spc="200" kern="0" dirty="0">
+              <a:rPr lang="en-US" sz="1250" b="1" spc="250" kern="0" dirty="0">
                 <a:solidFill>
                   <a:srgbClr val="C4694A"/>
                 </a:solidFill>
@@ -7067,7 +6890,7 @@
                 <a:ea typeface="Calibri" pitchFamily="34" charset="-122"/>
                 <a:cs typeface="Calibri" pitchFamily="34" charset="-120"/>
               </a:rPr>
-              <a:t>IT GRADES ITSELF</a:t>
+              <a:t>HONESTY — BOTH KINDS</a:t>
             </a:r>
             <a:endParaRPr lang="en-US" sz="1250" dirty="0"/>
           </a:p>
@@ -7081,8 +6904,8 @@
         </p:nvSpPr>
         <p:spPr>
           <a:xfrm>
-            <a:off x="640080" y="868680"/>
-            <a:ext cx="10911535" cy="1005840"/>
+            <a:off x="640080" y="841248"/>
+            <a:ext cx="10911535" cy="1188720"/>
           </a:xfrm>
           <a:prstGeom prst="rect">
             <a:avLst/>
@@ -7096,12 +6919,12 @@
           <a:p>
             <a:pPr indent="0" marL="0">
               <a:lnSpc>
-                <a:spcPts val="3150"/>
+                <a:spcPts val="3328"/>
               </a:lnSpc>
               <a:buNone/>
             </a:pPr>
             <a:r>
-              <a:rPr lang="en-US" sz="3000" b="1" dirty="0">
+              <a:rPr lang="en-US" sz="3200" b="1" dirty="0">
                 <a:solidFill>
                   <a:srgbClr val="F6F2EA"/>
                 </a:solidFill>
@@ -7109,19 +6932,19 @@
                 <a:ea typeface="Cambria" pitchFamily="34" charset="-122"/>
                 <a:cs typeface="Cambria" pitchFamily="34" charset="-120"/>
               </a:rPr>
-              <a:t>We report the number that</a:t>
-            </a:r>
-            <a:endParaRPr lang="en-US" sz="3000" dirty="0"/>
+              <a:t>It names what it can't do,</a:t>
+            </a:r>
+            <a:endParaRPr lang="en-US" sz="3200" dirty="0"/>
           </a:p>
           <a:p>
             <a:pPr indent="0" marL="0">
               <a:lnSpc>
-                <a:spcPts val="3150"/>
+                <a:spcPts val="3328"/>
               </a:lnSpc>
               <a:buNone/>
             </a:pPr>
             <a:r>
-              <a:rPr lang="en-US" sz="3000" b="1" dirty="0">
+              <a:rPr lang="en-US" sz="3200" b="1" dirty="0">
                 <a:solidFill>
                   <a:srgbClr val="F6F2EA"/>
                 </a:solidFill>
@@ -7129,9 +6952,9 @@
                 <a:ea typeface="Cambria" pitchFamily="34" charset="-122"/>
                 <a:cs typeface="Cambria" pitchFamily="34" charset="-120"/>
               </a:rPr>
-              <a:t>makes us look worse.</a:t>
-            </a:r>
-            <a:endParaRPr lang="en-US" sz="3000" dirty="0"/>
+              <a:t>and grades what it can.</a:t>
+            </a:r>
+            <a:endParaRPr lang="en-US" sz="3200" dirty="0"/>
           </a:p>
         </p:txBody>
       </p:sp>
@@ -7143,34 +6966,34 @@
         </p:nvSpPr>
         <p:spPr>
           <a:xfrm>
-            <a:off x="640080" y="2743200"/>
-            <a:ext cx="3291840" cy="1005840"/>
-          </a:xfrm>
-          <a:prstGeom prst="rect">
-            <a:avLst/>
-          </a:prstGeom>
-          <a:noFill/>
-          <a:ln/>
-        </p:spPr>
-        <p:txBody>
-          <a:bodyPr wrap="square" rtlCol="0" anchor="ctr"/>
-          <a:lstStyle/>
-          <a:p>
-            <a:pPr indent="0" marL="0">
-              <a:buNone/>
-            </a:pPr>
-            <a:r>
-              <a:rPr lang="en-US" sz="6000" b="1" dirty="0">
-                <a:solidFill>
-                  <a:srgbClr val="B98A82"/>
+            <a:off x="640080" y="2606040"/>
+            <a:ext cx="5120640" cy="365760"/>
+          </a:xfrm>
+          <a:prstGeom prst="rect">
+            <a:avLst/>
+          </a:prstGeom>
+          <a:noFill/>
+          <a:ln/>
+        </p:spPr>
+        <p:txBody>
+          <a:bodyPr wrap="square" rtlCol="0" anchor="ctr"/>
+          <a:lstStyle/>
+          <a:p>
+            <a:pPr indent="0" marL="0">
+              <a:buNone/>
+            </a:pPr>
+            <a:r>
+              <a:rPr lang="en-US" sz="1800" b="1" dirty="0">
+                <a:solidFill>
+                  <a:srgbClr val="FFD9C7"/>
                 </a:solidFill>
                 <a:latin typeface="Cambria" pitchFamily="34" charset="0"/>
                 <a:ea typeface="Cambria" pitchFamily="34" charset="-122"/>
                 <a:cs typeface="Cambria" pitchFamily="34" charset="-120"/>
               </a:rPr>
-              <a:t>70%</a:t>
-            </a:r>
-            <a:endParaRPr lang="en-US" sz="6000" dirty="0"/>
+              <a:t>The 20% it can't fix</a:t>
+            </a:r>
+            <a:endParaRPr lang="en-US" sz="1800" dirty="0"/>
           </a:p>
         </p:txBody>
       </p:sp>
@@ -7182,34 +7005,37 @@
         </p:nvSpPr>
         <p:spPr>
           <a:xfrm>
-            <a:off x="640080" y="3794760"/>
-            <a:ext cx="3291840" cy="365760"/>
-          </a:xfrm>
-          <a:prstGeom prst="rect">
-            <a:avLst/>
-          </a:prstGeom>
-          <a:noFill/>
-          <a:ln/>
-        </p:spPr>
-        <p:txBody>
-          <a:bodyPr wrap="square" rtlCol="0" anchor="ctr"/>
-          <a:lstStyle/>
-          <a:p>
-            <a:pPr indent="0" marL="0">
-              <a:buNone/>
-            </a:pPr>
-            <a:r>
-              <a:rPr lang="en-US" sz="1500" b="1" dirty="0">
-                <a:solidFill>
-                  <a:srgbClr val="F6F2EA"/>
+            <a:off x="640080" y="3017520"/>
+            <a:ext cx="5120640" cy="1645920"/>
+          </a:xfrm>
+          <a:prstGeom prst="rect">
+            <a:avLst/>
+          </a:prstGeom>
+          <a:noFill/>
+          <a:ln/>
+        </p:spPr>
+        <p:txBody>
+          <a:bodyPr wrap="square" rtlCol="0" anchor="ctr"/>
+          <a:lstStyle/>
+          <a:p>
+            <a:pPr indent="0" marL="0">
+              <a:lnSpc>
+                <a:spcPts val="2400"/>
+              </a:lnSpc>
+              <a:buNone/>
+            </a:pPr>
+            <a:r>
+              <a:rPr lang="en-US" sz="1550" dirty="0">
+                <a:solidFill>
+                  <a:srgbClr val="C9C2B6"/>
                 </a:solidFill>
                 <a:latin typeface="Calibri" pitchFamily="34" charset="0"/>
                 <a:ea typeface="Calibri" pitchFamily="34" charset="-122"/>
                 <a:cs typeface="Calibri" pitchFamily="34" charset="-120"/>
               </a:rPr>
-              <a:t>raw accuracy</a:t>
-            </a:r>
-            <a:endParaRPr lang="en-US" sz="1500" dirty="0"/>
+              <a:t>No phone → a camp is scheduled. A genuine identity conflict → a human reviews it. Volunteering your own limits is the strongest signal of maturity there is.</a:t>
+            </a:r>
+            <a:endParaRPr lang="en-US" sz="1550" dirty="0"/>
           </a:p>
         </p:txBody>
       </p:sp>
@@ -7221,63 +7047,141 @@
         </p:nvSpPr>
         <p:spPr>
           <a:xfrm>
-            <a:off x="640080" y="4114800"/>
-            <a:ext cx="3291840" cy="365760"/>
-          </a:xfrm>
-          <a:prstGeom prst="rect">
-            <a:avLst/>
-          </a:prstGeom>
-          <a:noFill/>
-          <a:ln/>
-        </p:spPr>
-        <p:txBody>
-          <a:bodyPr wrap="square" rtlCol="0" anchor="ctr"/>
-          <a:lstStyle/>
-          <a:p>
-            <a:pPr indent="0" marL="0">
-              <a:buNone/>
-            </a:pPr>
-            <a:r>
-              <a:rPr lang="en-US" sz="1300" i="1" dirty="0">
-                <a:solidFill>
-                  <a:srgbClr val="837C6E"/>
+            <a:off x="6400800" y="2606040"/>
+            <a:ext cx="5120640" cy="365760"/>
+          </a:xfrm>
+          <a:prstGeom prst="rect">
+            <a:avLst/>
+          </a:prstGeom>
+          <a:noFill/>
+          <a:ln/>
+        </p:spPr>
+        <p:txBody>
+          <a:bodyPr wrap="square" rtlCol="0" anchor="ctr"/>
+          <a:lstStyle/>
+          <a:p>
+            <a:pPr indent="0" marL="0">
+              <a:buNone/>
+            </a:pPr>
+            <a:r>
+              <a:rPr lang="en-US" sz="1800" b="1" dirty="0">
+                <a:solidFill>
+                  <a:srgbClr val="FFD9C7"/>
+                </a:solidFill>
+                <a:latin typeface="Cambria" pitchFamily="34" charset="0"/>
+                <a:ea typeface="Cambria" pitchFamily="34" charset="-122"/>
+                <a:cs typeface="Cambria" pitchFamily="34" charset="-120"/>
+              </a:rPr>
+              <a:t>It grades itself in public</a:t>
+            </a:r>
+            <a:endParaRPr lang="en-US" sz="1800" dirty="0"/>
+          </a:p>
+        </p:txBody>
+      </p:sp>
+      <p:sp>
+        <p:nvSpPr>
+          <p:cNvPr id="7" name="Text 5"/>
+          <p:cNvSpPr/>
+          <p:nvPr/>
+        </p:nvSpPr>
+        <p:spPr>
+          <a:xfrm>
+            <a:off x="6400800" y="3063240"/>
+            <a:ext cx="1463040" cy="640080"/>
+          </a:xfrm>
+          <a:prstGeom prst="rect">
+            <a:avLst/>
+          </a:prstGeom>
+          <a:noFill/>
+          <a:ln/>
+        </p:spPr>
+        <p:txBody>
+          <a:bodyPr wrap="square" rtlCol="0" anchor="ctr"/>
+          <a:lstStyle/>
+          <a:p>
+            <a:pPr indent="0" marL="0">
+              <a:buNone/>
+            </a:pPr>
+            <a:r>
+              <a:rPr lang="en-US" sz="3000" b="1" dirty="0">
+                <a:solidFill>
+                  <a:srgbClr val="B98A82"/>
+                </a:solidFill>
+                <a:latin typeface="Cambria" pitchFamily="34" charset="0"/>
+                <a:ea typeface="Cambria" pitchFamily="34" charset="-122"/>
+                <a:cs typeface="Cambria" pitchFamily="34" charset="-120"/>
+              </a:rPr>
+              <a:t>70%</a:t>
+            </a:r>
+            <a:endParaRPr lang="en-US" sz="3000" dirty="0"/>
+          </a:p>
+        </p:txBody>
+      </p:sp>
+      <p:sp>
+        <p:nvSpPr>
+          <p:cNvPr id="8" name="Text 6"/>
+          <p:cNvSpPr/>
+          <p:nvPr/>
+        </p:nvSpPr>
+        <p:spPr>
+          <a:xfrm>
+            <a:off x="7955280" y="3172968"/>
+            <a:ext cx="3840480" cy="457200"/>
+          </a:xfrm>
+          <a:prstGeom prst="rect">
+            <a:avLst/>
+          </a:prstGeom>
+          <a:noFill/>
+          <a:ln/>
+        </p:spPr>
+        <p:txBody>
+          <a:bodyPr wrap="square" rtlCol="0" anchor="ctr"/>
+          <a:lstStyle/>
+          <a:p>
+            <a:pPr indent="0" marL="0">
+              <a:buNone/>
+            </a:pPr>
+            <a:r>
+              <a:rPr lang="en-US" sz="1450" dirty="0">
+                <a:solidFill>
+                  <a:srgbClr val="F6F2EA"/>
                 </a:solidFill>
                 <a:latin typeface="Calibri" pitchFamily="34" charset="0"/>
                 <a:ea typeface="Calibri" pitchFamily="34" charset="-122"/>
                 <a:cs typeface="Calibri" pitchFamily="34" charset="-120"/>
               </a:rPr>
-              <a:t>looks good — is misleading</a:t>
-            </a:r>
-            <a:endParaRPr lang="en-US" sz="1300" dirty="0"/>
-          </a:p>
-        </p:txBody>
-      </p:sp>
-      <p:sp>
-        <p:nvSpPr>
-          <p:cNvPr id="7" name="Text 5"/>
-          <p:cNvSpPr/>
-          <p:nvPr/>
-        </p:nvSpPr>
-        <p:spPr>
-          <a:xfrm>
-            <a:off x="4297680" y="2743200"/>
-            <a:ext cx="3291840" cy="1005840"/>
-          </a:xfrm>
-          <a:prstGeom prst="rect">
-            <a:avLst/>
-          </a:prstGeom>
-          <a:noFill/>
-          <a:ln/>
-        </p:spPr>
-        <p:txBody>
-          <a:bodyPr wrap="square" rtlCol="0" anchor="ctr"/>
-          <a:lstStyle/>
-          <a:p>
-            <a:pPr indent="0" marL="0">
-              <a:buNone/>
-            </a:pPr>
-            <a:r>
-              <a:rPr lang="en-US" sz="6000" b="1" dirty="0">
+              <a:t>raw accuracy — misleading</a:t>
+            </a:r>
+            <a:endParaRPr lang="en-US" sz="1450" dirty="0"/>
+          </a:p>
+        </p:txBody>
+      </p:sp>
+      <p:sp>
+        <p:nvSpPr>
+          <p:cNvPr id="9" name="Text 7"/>
+          <p:cNvSpPr/>
+          <p:nvPr/>
+        </p:nvSpPr>
+        <p:spPr>
+          <a:xfrm>
+            <a:off x="6400800" y="3886200"/>
+            <a:ext cx="1463040" cy="640080"/>
+          </a:xfrm>
+          <a:prstGeom prst="rect">
+            <a:avLst/>
+          </a:prstGeom>
+          <a:noFill/>
+          <a:ln/>
+        </p:spPr>
+        <p:txBody>
+          <a:bodyPr wrap="square" rtlCol="0" anchor="ctr"/>
+          <a:lstStyle/>
+          <a:p>
+            <a:pPr indent="0" marL="0">
+              <a:buNone/>
+            </a:pPr>
+            <a:r>
+              <a:rPr lang="en-US" sz="3000" b="1" dirty="0">
                 <a:solidFill>
                   <a:srgbClr val="5F6B57"/>
                 </a:solidFill>
@@ -7287,36 +7191,36 @@
               </a:rPr>
               <a:t>86%</a:t>
             </a:r>
-            <a:endParaRPr lang="en-US" sz="6000" dirty="0"/>
-          </a:p>
-        </p:txBody>
-      </p:sp>
-      <p:sp>
-        <p:nvSpPr>
-          <p:cNvPr id="8" name="Text 6"/>
-          <p:cNvSpPr/>
-          <p:nvPr/>
-        </p:nvSpPr>
-        <p:spPr>
-          <a:xfrm>
-            <a:off x="4297680" y="3794760"/>
-            <a:ext cx="3291840" cy="365760"/>
-          </a:xfrm>
-          <a:prstGeom prst="rect">
-            <a:avLst/>
-          </a:prstGeom>
-          <a:noFill/>
-          <a:ln/>
-        </p:spPr>
-        <p:txBody>
-          <a:bodyPr wrap="square" rtlCol="0" anchor="ctr"/>
-          <a:lstStyle/>
-          <a:p>
-            <a:pPr indent="0" marL="0">
-              <a:buNone/>
-            </a:pPr>
-            <a:r>
-              <a:rPr lang="en-US" sz="1500" b="1" dirty="0">
+            <a:endParaRPr lang="en-US" sz="3000" dirty="0"/>
+          </a:p>
+        </p:txBody>
+      </p:sp>
+      <p:sp>
+        <p:nvSpPr>
+          <p:cNvPr id="10" name="Text 8"/>
+          <p:cNvSpPr/>
+          <p:nvPr/>
+        </p:nvSpPr>
+        <p:spPr>
+          <a:xfrm>
+            <a:off x="7955280" y="3995928"/>
+            <a:ext cx="3840480" cy="457200"/>
+          </a:xfrm>
+          <a:prstGeom prst="rect">
+            <a:avLst/>
+          </a:prstGeom>
+          <a:noFill/>
+          <a:ln/>
+        </p:spPr>
+        <p:txBody>
+          <a:bodyPr wrap="square" rtlCol="0" anchor="ctr"/>
+          <a:lstStyle/>
+          <a:p>
+            <a:pPr indent="0" marL="0">
+              <a:buNone/>
+            </a:pPr>
+            <a:r>
+              <a:rPr lang="en-US" sz="1450" dirty="0">
                 <a:solidFill>
                   <a:srgbClr val="F6F2EA"/>
                 </a:solidFill>
@@ -7326,717 +7230,124 @@
               </a:rPr>
               <a:t>precision on the riskiest 10%</a:t>
             </a:r>
-            <a:endParaRPr lang="en-US" sz="1500" dirty="0"/>
-          </a:p>
-        </p:txBody>
-      </p:sp>
-      <p:sp>
-        <p:nvSpPr>
-          <p:cNvPr id="9" name="Text 7"/>
-          <p:cNvSpPr/>
-          <p:nvPr/>
-        </p:nvSpPr>
-        <p:spPr>
-          <a:xfrm>
-            <a:off x="4297680" y="4114800"/>
-            <a:ext cx="3291840" cy="365760"/>
-          </a:xfrm>
-          <a:prstGeom prst="rect">
-            <a:avLst/>
-          </a:prstGeom>
-          <a:noFill/>
-          <a:ln/>
-        </p:spPr>
-        <p:txBody>
-          <a:bodyPr wrap="square" rtlCol="0" anchor="ctr"/>
-          <a:lstStyle/>
-          <a:p>
-            <a:pPr indent="0" marL="0">
-              <a:buNone/>
-            </a:pPr>
-            <a:r>
-              <a:rPr lang="en-US" sz="1300" i="1" dirty="0">
-                <a:solidFill>
-                  <a:srgbClr val="837C6E"/>
+            <a:endParaRPr lang="en-US" sz="1450" dirty="0"/>
+          </a:p>
+        </p:txBody>
+      </p:sp>
+      <p:sp>
+        <p:nvSpPr>
+          <p:cNvPr id="11" name="Text 9"/>
+          <p:cNvSpPr/>
+          <p:nvPr/>
+        </p:nvSpPr>
+        <p:spPr>
+          <a:xfrm>
+            <a:off x="6400800" y="4709160"/>
+            <a:ext cx="1463040" cy="640080"/>
+          </a:xfrm>
+          <a:prstGeom prst="rect">
+            <a:avLst/>
+          </a:prstGeom>
+          <a:noFill/>
+          <a:ln/>
+        </p:spPr>
+        <p:txBody>
+          <a:bodyPr wrap="square" rtlCol="0" anchor="ctr"/>
+          <a:lstStyle/>
+          <a:p>
+            <a:pPr indent="0" marL="0">
+              <a:buNone/>
+            </a:pPr>
+            <a:r>
+              <a:rPr lang="en-US" sz="3000" b="1" dirty="0">
+                <a:solidFill>
+                  <a:srgbClr val="5F6B57"/>
+                </a:solidFill>
+                <a:latin typeface="Cambria" pitchFamily="34" charset="0"/>
+                <a:ea typeface="Cambria" pitchFamily="34" charset="-122"/>
+                <a:cs typeface="Cambria" pitchFamily="34" charset="-120"/>
+              </a:rPr>
+              <a:t>2.1×</a:t>
+            </a:r>
+            <a:endParaRPr lang="en-US" sz="3000" dirty="0"/>
+          </a:p>
+        </p:txBody>
+      </p:sp>
+      <p:sp>
+        <p:nvSpPr>
+          <p:cNvPr id="12" name="Text 10"/>
+          <p:cNvSpPr/>
+          <p:nvPr/>
+        </p:nvSpPr>
+        <p:spPr>
+          <a:xfrm>
+            <a:off x="7955280" y="4818888"/>
+            <a:ext cx="3840480" cy="457200"/>
+          </a:xfrm>
+          <a:prstGeom prst="rect">
+            <a:avLst/>
+          </a:prstGeom>
+          <a:noFill/>
+          <a:ln/>
+        </p:spPr>
+        <p:txBody>
+          <a:bodyPr wrap="square" rtlCol="0" anchor="ctr"/>
+          <a:lstStyle/>
+          <a:p>
+            <a:pPr indent="0" marL="0">
+              <a:buNone/>
+            </a:pPr>
+            <a:r>
+              <a:rPr lang="en-US" sz="1450" dirty="0">
+                <a:solidFill>
+                  <a:srgbClr val="F6F2EA"/>
                 </a:solidFill>
                 <a:latin typeface="Calibri" pitchFamily="34" charset="0"/>
                 <a:ea typeface="Calibri" pitchFamily="34" charset="-122"/>
                 <a:cs typeface="Calibri" pitchFamily="34" charset="-120"/>
               </a:rPr>
-              <a:t>what actually matters</a:t>
-            </a:r>
-            <a:endParaRPr lang="en-US" sz="1300" dirty="0"/>
-          </a:p>
-        </p:txBody>
-      </p:sp>
-      <p:sp>
-        <p:nvSpPr>
-          <p:cNvPr id="10" name="Text 8"/>
-          <p:cNvSpPr/>
-          <p:nvPr/>
-        </p:nvSpPr>
-        <p:spPr>
-          <a:xfrm>
-            <a:off x="7955280" y="2743200"/>
-            <a:ext cx="3291840" cy="1005840"/>
-          </a:xfrm>
-          <a:prstGeom prst="rect">
-            <a:avLst/>
-          </a:prstGeom>
-          <a:noFill/>
-          <a:ln/>
-        </p:spPr>
-        <p:txBody>
-          <a:bodyPr wrap="square" rtlCol="0" anchor="ctr"/>
-          <a:lstStyle/>
-          <a:p>
-            <a:pPr indent="0" marL="0">
-              <a:buNone/>
-            </a:pPr>
-            <a:r>
-              <a:rPr lang="en-US" sz="6000" b="1" dirty="0">
-                <a:solidFill>
-                  <a:srgbClr val="5F6B57"/>
-                </a:solidFill>
-                <a:latin typeface="Cambria" pitchFamily="34" charset="0"/>
-                <a:ea typeface="Cambria" pitchFamily="34" charset="-122"/>
-                <a:cs typeface="Cambria" pitchFamily="34" charset="-120"/>
-              </a:rPr>
-              <a:t>2.1×</a:t>
-            </a:r>
-            <a:endParaRPr lang="en-US" sz="6000" dirty="0"/>
-          </a:p>
-        </p:txBody>
-      </p:sp>
-      <p:sp>
-        <p:nvSpPr>
-          <p:cNvPr id="11" name="Text 9"/>
-          <p:cNvSpPr/>
-          <p:nvPr/>
-        </p:nvSpPr>
-        <p:spPr>
-          <a:xfrm>
-            <a:off x="7955280" y="3794760"/>
-            <a:ext cx="3291840" cy="365760"/>
-          </a:xfrm>
-          <a:prstGeom prst="rect">
-            <a:avLst/>
-          </a:prstGeom>
-          <a:noFill/>
-          <a:ln/>
-        </p:spPr>
-        <p:txBody>
-          <a:bodyPr wrap="square" rtlCol="0" anchor="ctr"/>
-          <a:lstStyle/>
-          <a:p>
-            <a:pPr indent="0" marL="0">
-              <a:buNone/>
-            </a:pPr>
-            <a:r>
-              <a:rPr lang="en-US" sz="1500" b="1" dirty="0">
-                <a:solidFill>
-                  <a:srgbClr val="F6F2EA"/>
+              <a:t>better than chance</a:t>
+            </a:r>
+            <a:endParaRPr lang="en-US" sz="1450" dirty="0"/>
+          </a:p>
+        </p:txBody>
+      </p:sp>
+      <p:sp>
+        <p:nvSpPr>
+          <p:cNvPr id="13" name="Text 11"/>
+          <p:cNvSpPr/>
+          <p:nvPr/>
+        </p:nvSpPr>
+        <p:spPr>
+          <a:xfrm>
+            <a:off x="640080" y="6355080"/>
+            <a:ext cx="10911535" cy="320040"/>
+          </a:xfrm>
+          <a:prstGeom prst="rect">
+            <a:avLst/>
+          </a:prstGeom>
+          <a:noFill/>
+          <a:ln/>
+        </p:spPr>
+        <p:txBody>
+          <a:bodyPr wrap="square" rtlCol="0" anchor="ctr"/>
+          <a:lstStyle/>
+          <a:p>
+            <a:pPr indent="0" marL="0">
+              <a:buNone/>
+            </a:pPr>
+            <a:r>
+              <a:rPr lang="en-US" sz="1150" i="1" dirty="0">
+                <a:solidFill>
+                  <a:srgbClr val="6E665A"/>
                 </a:solidFill>
                 <a:latin typeface="Calibri" pitchFamily="34" charset="0"/>
                 <a:ea typeface="Calibri" pitchFamily="34" charset="-122"/>
                 <a:cs typeface="Calibri" pitchFamily="34" charset="-120"/>
               </a:rPr>
-              <a:t>better than chance</a:t>
-            </a:r>
-            <a:endParaRPr lang="en-US" sz="1500" dirty="0"/>
-          </a:p>
-        </p:txBody>
-      </p:sp>
-      <p:sp>
-        <p:nvSpPr>
-          <p:cNvPr id="12" name="Text 10"/>
-          <p:cNvSpPr/>
-          <p:nvPr/>
-        </p:nvSpPr>
-        <p:spPr>
-          <a:xfrm>
-            <a:off x="7955280" y="4114800"/>
-            <a:ext cx="3291840" cy="365760"/>
-          </a:xfrm>
-          <a:prstGeom prst="rect">
-            <a:avLst/>
-          </a:prstGeom>
-          <a:noFill/>
-          <a:ln/>
-        </p:spPr>
-        <p:txBody>
-          <a:bodyPr wrap="square" rtlCol="0" anchor="ctr"/>
-          <a:lstStyle/>
-          <a:p>
-            <a:pPr indent="0" marL="0">
-              <a:buNone/>
-            </a:pPr>
-            <a:r>
-              <a:rPr lang="en-US" sz="1300" i="1" dirty="0">
-                <a:solidFill>
-                  <a:srgbClr val="837C6E"/>
-                </a:solidFill>
-                <a:latin typeface="Calibri" pitchFamily="34" charset="0"/>
-                <a:ea typeface="Calibri" pitchFamily="34" charset="-122"/>
-                <a:cs typeface="Calibri" pitchFamily="34" charset="-120"/>
-              </a:rPr>
-              <a:t>lift over the base rate</a:t>
-            </a:r>
-            <a:endParaRPr lang="en-US" sz="1300" dirty="0"/>
-          </a:p>
-        </p:txBody>
-      </p:sp>
-      <p:sp>
-        <p:nvSpPr>
-          <p:cNvPr id="13" name="Text 11"/>
-          <p:cNvSpPr/>
-          <p:nvPr/>
-        </p:nvSpPr>
-        <p:spPr>
-          <a:xfrm>
-            <a:off x="640080" y="5120640"/>
-            <a:ext cx="10515600" cy="914400"/>
-          </a:xfrm>
-          <a:prstGeom prst="rect">
-            <a:avLst/>
-          </a:prstGeom>
-          <a:noFill/>
-          <a:ln/>
-        </p:spPr>
-        <p:txBody>
-          <a:bodyPr wrap="square" rtlCol="0" anchor="ctr"/>
-          <a:lstStyle/>
-          <a:p>
-            <a:pPr indent="0" marL="0">
-              <a:lnSpc>
-                <a:spcPts val="2400"/>
-              </a:lnSpc>
-              <a:buNone/>
-            </a:pPr>
-            <a:r>
-              <a:rPr lang="en-US" sz="1550" dirty="0">
-                <a:solidFill>
-                  <a:srgbClr val="C9C2B6"/>
-                </a:solidFill>
-                <a:latin typeface="Calibri" pitchFamily="34" charset="0"/>
-                <a:ea typeface="Calibri" pitchFamily="34" charset="-122"/>
-                <a:cs typeface="Calibri" pitchFamily="34" charset="-120"/>
-              </a:rPr>
-              <a:t>Plus a calibration curve and a Brier score — not one flattering figure. A system that will touch entitlements must volunteer its own scorecard. This one does, by construction.</a:t>
-            </a:r>
-            <a:endParaRPr lang="en-US" sz="1550" dirty="0"/>
-          </a:p>
-        </p:txBody>
-      </p:sp>
-    </p:spTree>
-  </p:cSld>
-  <p:clrMapOvr>
-    <a:masterClrMapping/>
-  </p:clrMapOvr>
-</p:sld>
-</file>
-
-<file path=ppt/slides/slide9.xml><?xml version="1.0" encoding="utf-8"?>
-<p:sld xmlns:a="http://schemas.openxmlformats.org/drawingml/2006/main" xmlns:r="http://schemas.openxmlformats.org/officeDocument/2006/relationships" xmlns:p="http://schemas.openxmlformats.org/presentationml/2006/main">
-  <p:cSld name="Slide 9">
-    <p:bg>
-      <p:bgPr>
-        <a:solidFill>
-          <a:srgbClr val="FFFFFF"/>
-        </a:solidFill>
-      </p:bgPr>
-    </p:bg>
-    <p:spTree>
-      <p:nvGrpSpPr>
-        <p:cNvPr id="1" name=""/>
-        <p:cNvGrpSpPr/>
-        <p:nvPr/>
-      </p:nvGrpSpPr>
-      <p:grpSpPr>
-        <a:xfrm>
-          <a:off x="0" y="0"/>
-          <a:ext cx="0" cy="0"/>
-          <a:chOff x="0" y="0"/>
-          <a:chExt cx="0" cy="0"/>
-        </a:xfrm>
-      </p:grpSpPr>
-      <p:sp>
-        <p:nvSpPr>
-          <p:cNvPr id="2" name="Text 0"/>
-          <p:cNvSpPr/>
-          <p:nvPr/>
-        </p:nvSpPr>
-        <p:spPr>
-          <a:xfrm>
-            <a:off x="640080" y="502920"/>
-            <a:ext cx="10911535" cy="320040"/>
-          </a:xfrm>
-          <a:prstGeom prst="rect">
-            <a:avLst/>
-          </a:prstGeom>
-          <a:noFill/>
-          <a:ln/>
-        </p:spPr>
-        <p:txBody>
-          <a:bodyPr wrap="square" rtlCol="0" anchor="ctr"/>
-          <a:lstStyle/>
-          <a:p>
-            <a:pPr indent="0" marL="0">
-              <a:buNone/>
-            </a:pPr>
-            <a:r>
-              <a:rPr lang="en-US" sz="1250" b="1" spc="200" kern="0" dirty="0">
-                <a:solidFill>
-                  <a:srgbClr val="C4694A"/>
-                </a:solidFill>
-                <a:latin typeface="Calibri" pitchFamily="34" charset="0"/>
-                <a:ea typeface="Calibri" pitchFamily="34" charset="-122"/>
-                <a:cs typeface="Calibri" pitchFamily="34" charset="-120"/>
-              </a:rPr>
-              <a:t>WHAT IT'S WORTH</a:t>
-            </a:r>
-            <a:endParaRPr lang="en-US" sz="1250" dirty="0"/>
-          </a:p>
-        </p:txBody>
-      </p:sp>
-      <p:sp>
-        <p:nvSpPr>
-          <p:cNvPr id="3" name="Text 1"/>
-          <p:cNvSpPr/>
-          <p:nvPr/>
-        </p:nvSpPr>
-        <p:spPr>
-          <a:xfrm>
-            <a:off x="640080" y="868680"/>
-            <a:ext cx="10911535" cy="1005840"/>
-          </a:xfrm>
-          <a:prstGeom prst="rect">
-            <a:avLst/>
-          </a:prstGeom>
-          <a:noFill/>
-          <a:ln/>
-        </p:spPr>
-        <p:txBody>
-          <a:bodyPr wrap="square" rtlCol="0" anchor="ctr"/>
-          <a:lstStyle/>
-          <a:p>
-            <a:pPr indent="0" marL="0">
-              <a:lnSpc>
-                <a:spcPts val="3570"/>
-              </a:lnSpc>
-              <a:buNone/>
-            </a:pPr>
-            <a:r>
-              <a:rPr lang="en-US" sz="3400" b="1" dirty="0">
-                <a:solidFill>
-                  <a:srgbClr val="1E1B16"/>
-                </a:solidFill>
-                <a:latin typeface="Cambria" pitchFamily="34" charset="0"/>
-                <a:ea typeface="Cambria" pitchFamily="34" charset="-122"/>
-                <a:cs typeface="Cambria" pitchFamily="34" charset="-120"/>
-              </a:rPr>
-              <a:t>One rescue, three returns.</a:t>
-            </a:r>
-            <a:endParaRPr lang="en-US" sz="3400" dirty="0"/>
-          </a:p>
-        </p:txBody>
-      </p:sp>
-      <p:sp>
-        <p:nvSpPr>
-          <p:cNvPr id="4" name="Text 2"/>
-          <p:cNvSpPr/>
-          <p:nvPr/>
-        </p:nvSpPr>
-        <p:spPr>
-          <a:xfrm>
-            <a:off x="640080" y="2286000"/>
-            <a:ext cx="3383280" cy="320040"/>
-          </a:xfrm>
-          <a:prstGeom prst="rect">
-            <a:avLst/>
-          </a:prstGeom>
-          <a:noFill/>
-          <a:ln/>
-        </p:spPr>
-        <p:txBody>
-          <a:bodyPr wrap="square" rtlCol="0" anchor="ctr"/>
-          <a:lstStyle/>
-          <a:p>
-            <a:pPr indent="0" marL="0">
-              <a:buNone/>
-            </a:pPr>
-            <a:r>
-              <a:rPr lang="en-US" sz="1250" b="1" spc="100" kern="0" dirty="0">
-                <a:solidFill>
-                  <a:srgbClr val="837C6E"/>
-                </a:solidFill>
-                <a:latin typeface="Calibri" pitchFamily="34" charset="0"/>
-                <a:ea typeface="Calibri" pitchFamily="34" charset="-122"/>
-                <a:cs typeface="Calibri" pitchFamily="34" charset="-120"/>
-              </a:rPr>
-              <a:t>TO A FAMILY</a:t>
-            </a:r>
-            <a:endParaRPr lang="en-US" sz="1250" dirty="0"/>
-          </a:p>
-        </p:txBody>
-      </p:sp>
-      <p:sp>
-        <p:nvSpPr>
-          <p:cNvPr id="5" name="Text 3"/>
-          <p:cNvSpPr/>
-          <p:nvPr/>
-        </p:nvSpPr>
-        <p:spPr>
-          <a:xfrm>
-            <a:off x="640080" y="2651760"/>
-            <a:ext cx="3383280" cy="914400"/>
-          </a:xfrm>
-          <a:prstGeom prst="rect">
-            <a:avLst/>
-          </a:prstGeom>
-          <a:noFill/>
-          <a:ln/>
-        </p:spPr>
-        <p:txBody>
-          <a:bodyPr wrap="square" rtlCol="0" anchor="ctr"/>
-          <a:lstStyle/>
-          <a:p>
-            <a:pPr indent="0" marL="0">
-              <a:buNone/>
-            </a:pPr>
-            <a:r>
-              <a:rPr lang="en-US" sz="4600" b="1" dirty="0">
-                <a:solidFill>
-                  <a:srgbClr val="C4694A"/>
-                </a:solidFill>
-                <a:latin typeface="Cambria" pitchFamily="34" charset="0"/>
-                <a:ea typeface="Cambria" pitchFamily="34" charset="-122"/>
-                <a:cs typeface="Cambria" pitchFamily="34" charset="-120"/>
-              </a:rPr>
-              <a:t>₹2,000</a:t>
-            </a:r>
-            <a:endParaRPr lang="en-US" sz="4600" dirty="0"/>
-          </a:p>
-        </p:txBody>
-      </p:sp>
-      <p:sp>
-        <p:nvSpPr>
-          <p:cNvPr id="6" name="Text 4"/>
-          <p:cNvSpPr/>
-          <p:nvPr/>
-        </p:nvSpPr>
-        <p:spPr>
-          <a:xfrm>
-            <a:off x="640080" y="3703320"/>
-            <a:ext cx="3291840" cy="1645920"/>
-          </a:xfrm>
-          <a:prstGeom prst="rect">
-            <a:avLst/>
-          </a:prstGeom>
-          <a:noFill/>
-          <a:ln/>
-        </p:spPr>
-        <p:txBody>
-          <a:bodyPr wrap="square" rtlCol="0" anchor="ctr"/>
-          <a:lstStyle/>
-          <a:p>
-            <a:pPr indent="0" marL="0">
-              <a:lnSpc>
-                <a:spcPts val="2300"/>
-              </a:lnSpc>
-              <a:buNone/>
-            </a:pPr>
-            <a:r>
-              <a:rPr lang="en-US" sz="1550" dirty="0">
-                <a:solidFill>
-                  <a:srgbClr val="4A443B"/>
-                </a:solidFill>
-                <a:latin typeface="Calibri" pitchFamily="34" charset="0"/>
-                <a:ea typeface="Calibri" pitchFamily="34" charset="-122"/>
-                <a:cs typeface="Calibri" pitchFamily="34" charset="-120"/>
-              </a:rPr>
-              <a:t>is a season's seed, a school fee on time, a loan not taken from a moneylender.</a:t>
-            </a:r>
-            <a:endParaRPr lang="en-US" sz="1550" dirty="0"/>
-          </a:p>
-        </p:txBody>
-      </p:sp>
-      <p:sp>
-        <p:nvSpPr>
-          <p:cNvPr id="7" name="Text 5"/>
-          <p:cNvSpPr/>
-          <p:nvPr/>
-        </p:nvSpPr>
-        <p:spPr>
-          <a:xfrm>
-            <a:off x="4297680" y="2286000"/>
-            <a:ext cx="3383280" cy="320040"/>
-          </a:xfrm>
-          <a:prstGeom prst="rect">
-            <a:avLst/>
-          </a:prstGeom>
-          <a:noFill/>
-          <a:ln/>
-        </p:spPr>
-        <p:txBody>
-          <a:bodyPr wrap="square" rtlCol="0" anchor="ctr"/>
-          <a:lstStyle/>
-          <a:p>
-            <a:pPr indent="0" marL="0">
-              <a:buNone/>
-            </a:pPr>
-            <a:r>
-              <a:rPr lang="en-US" sz="1250" b="1" spc="100" kern="0" dirty="0">
-                <a:solidFill>
-                  <a:srgbClr val="837C6E"/>
-                </a:solidFill>
-                <a:latin typeface="Calibri" pitchFamily="34" charset="0"/>
-                <a:ea typeface="Calibri" pitchFamily="34" charset="-122"/>
-                <a:cs typeface="Calibri" pitchFamily="34" charset="-120"/>
-              </a:rPr>
-              <a:t>TO SBI</a:t>
-            </a:r>
-            <a:endParaRPr lang="en-US" sz="1250" dirty="0"/>
-          </a:p>
-        </p:txBody>
-      </p:sp>
-      <p:sp>
-        <p:nvSpPr>
-          <p:cNvPr id="8" name="Text 6"/>
-          <p:cNvSpPr/>
-          <p:nvPr/>
-        </p:nvSpPr>
-        <p:spPr>
-          <a:xfrm>
-            <a:off x="4297680" y="2651760"/>
-            <a:ext cx="3383280" cy="914400"/>
-          </a:xfrm>
-          <a:prstGeom prst="rect">
-            <a:avLst/>
-          </a:prstGeom>
-          <a:noFill/>
-          <a:ln/>
-        </p:spPr>
-        <p:txBody>
-          <a:bodyPr wrap="square" rtlCol="0" anchor="ctr"/>
-          <a:lstStyle/>
-          <a:p>
-            <a:pPr indent="0" marL="0">
-              <a:buNone/>
-            </a:pPr>
-            <a:r>
-              <a:rPr lang="en-US" sz="4600" b="1" dirty="0">
-                <a:solidFill>
-                  <a:srgbClr val="5F6B57"/>
-                </a:solidFill>
-                <a:latin typeface="Cambria" pitchFamily="34" charset="0"/>
-                <a:ea typeface="Cambria" pitchFamily="34" charset="-122"/>
-                <a:cs typeface="Cambria" pitchFamily="34" charset="-120"/>
-              </a:rPr>
-              <a:t>~47×</a:t>
-            </a:r>
-            <a:endParaRPr lang="en-US" sz="4600" dirty="0"/>
-          </a:p>
-        </p:txBody>
-      </p:sp>
-      <p:sp>
-        <p:nvSpPr>
-          <p:cNvPr id="9" name="Text 7"/>
-          <p:cNvSpPr/>
-          <p:nvPr/>
-        </p:nvSpPr>
-        <p:spPr>
-          <a:xfrm>
-            <a:off x="4297680" y="3703320"/>
-            <a:ext cx="3291840" cy="1645920"/>
-          </a:xfrm>
-          <a:prstGeom prst="rect">
-            <a:avLst/>
-          </a:prstGeom>
-          <a:noFill/>
-          <a:ln/>
-        </p:spPr>
-        <p:txBody>
-          <a:bodyPr wrap="square" rtlCol="0" anchor="ctr"/>
-          <a:lstStyle/>
-          <a:p>
-            <a:pPr indent="0" marL="0">
-              <a:lnSpc>
-                <a:spcPts val="2300"/>
-              </a:lnSpc>
-              <a:buNone/>
-            </a:pPr>
-            <a:r>
-              <a:rPr lang="en-US" sz="1550" dirty="0">
-                <a:solidFill>
-                  <a:srgbClr val="4A443B"/>
-                </a:solidFill>
-                <a:latin typeface="Calibri" pitchFamily="34" charset="0"/>
-                <a:ea typeface="Calibri" pitchFamily="34" charset="-122"/>
-                <a:cs typeface="Calibri" pitchFamily="34" charset="-120"/>
-              </a:rPr>
-              <a:t>return in a modelled district — ₹8L of outreach unlocks ₹3.8Cr, with zero cross-sell.</a:t>
-            </a:r>
-            <a:endParaRPr lang="en-US" sz="1550" dirty="0"/>
-          </a:p>
-        </p:txBody>
-      </p:sp>
-      <p:sp>
-        <p:nvSpPr>
-          <p:cNvPr id="10" name="Text 8"/>
-          <p:cNvSpPr/>
-          <p:nvPr/>
-        </p:nvSpPr>
-        <p:spPr>
-          <a:xfrm>
-            <a:off x="7955280" y="2286000"/>
-            <a:ext cx="3383280" cy="320040"/>
-          </a:xfrm>
-          <a:prstGeom prst="rect">
-            <a:avLst/>
-          </a:prstGeom>
-          <a:noFill/>
-          <a:ln/>
-        </p:spPr>
-        <p:txBody>
-          <a:bodyPr wrap="square" rtlCol="0" anchor="ctr"/>
-          <a:lstStyle/>
-          <a:p>
-            <a:pPr indent="0" marL="0">
-              <a:buNone/>
-            </a:pPr>
-            <a:r>
-              <a:rPr lang="en-US" sz="1250" b="1" spc="100" kern="0" dirty="0">
-                <a:solidFill>
-                  <a:srgbClr val="837C6E"/>
-                </a:solidFill>
-                <a:latin typeface="Calibri" pitchFamily="34" charset="0"/>
-                <a:ea typeface="Calibri" pitchFamily="34" charset="-122"/>
-                <a:cs typeface="Calibri" pitchFamily="34" charset="-120"/>
-              </a:rPr>
-              <a:t>TO THE COUNTRY</a:t>
-            </a:r>
-            <a:endParaRPr lang="en-US" sz="1250" dirty="0"/>
-          </a:p>
-        </p:txBody>
-      </p:sp>
-      <p:sp>
-        <p:nvSpPr>
-          <p:cNvPr id="11" name="Text 9"/>
-          <p:cNvSpPr/>
-          <p:nvPr/>
-        </p:nvSpPr>
-        <p:spPr>
-          <a:xfrm>
-            <a:off x="7955280" y="2651760"/>
-            <a:ext cx="3383280" cy="914400"/>
-          </a:xfrm>
-          <a:prstGeom prst="rect">
-            <a:avLst/>
-          </a:prstGeom>
-          <a:noFill/>
-          <a:ln/>
-        </p:spPr>
-        <p:txBody>
-          <a:bodyPr wrap="square" rtlCol="0" anchor="ctr"/>
-          <a:lstStyle/>
-          <a:p>
-            <a:pPr indent="0" marL="0">
-              <a:buNone/>
-            </a:pPr>
-            <a:r>
-              <a:rPr lang="en-US" sz="4600" b="1" dirty="0">
-                <a:solidFill>
-                  <a:srgbClr val="B4842E"/>
-                </a:solidFill>
-                <a:latin typeface="Cambria" pitchFamily="34" charset="0"/>
-                <a:ea typeface="Cambria" pitchFamily="34" charset="-122"/>
-                <a:cs typeface="Cambria" pitchFamily="34" charset="-120"/>
-              </a:rPr>
-              <a:t>the layer</a:t>
-            </a:r>
-            <a:endParaRPr lang="en-US" sz="4600" dirty="0"/>
-          </a:p>
-        </p:txBody>
-      </p:sp>
-      <p:sp>
-        <p:nvSpPr>
-          <p:cNvPr id="12" name="Text 10"/>
-          <p:cNvSpPr/>
-          <p:nvPr/>
-        </p:nvSpPr>
-        <p:spPr>
-          <a:xfrm>
-            <a:off x="7955280" y="3703320"/>
-            <a:ext cx="3291840" cy="1645920"/>
-          </a:xfrm>
-          <a:prstGeom prst="rect">
-            <a:avLst/>
-          </a:prstGeom>
-          <a:noFill/>
-          <a:ln/>
-        </p:spPr>
-        <p:txBody>
-          <a:bodyPr wrap="square" rtlCol="0" anchor="ctr"/>
-          <a:lstStyle/>
-          <a:p>
-            <a:pPr indent="0" marL="0">
-              <a:lnSpc>
-                <a:spcPts val="2300"/>
-              </a:lnSpc>
-              <a:buNone/>
-            </a:pPr>
-            <a:r>
-              <a:rPr lang="en-US" sz="1550" dirty="0">
-                <a:solidFill>
-                  <a:srgbClr val="4A443B"/>
-                </a:solidFill>
-                <a:latin typeface="Calibri" pitchFamily="34" charset="0"/>
-                <a:ea typeface="Calibri" pitchFamily="34" charset="-122"/>
-                <a:cs typeface="Calibri" pitchFamily="34" charset="-120"/>
-              </a:rPr>
-              <a:t>that guarantees delivery of the welfare state — a position only SBI can hold.</a:t>
-            </a:r>
-            <a:endParaRPr lang="en-US" sz="1550" dirty="0"/>
-          </a:p>
-        </p:txBody>
-      </p:sp>
-      <p:sp>
-        <p:nvSpPr>
-          <p:cNvPr id="13" name="Text 11"/>
-          <p:cNvSpPr/>
-          <p:nvPr/>
-        </p:nvSpPr>
-        <p:spPr>
-          <a:xfrm>
-            <a:off x="640080" y="5943600"/>
-            <a:ext cx="10881360" cy="457200"/>
-          </a:xfrm>
-          <a:prstGeom prst="rect">
-            <a:avLst/>
-          </a:prstGeom>
-          <a:noFill/>
-          <a:ln/>
-        </p:spPr>
-        <p:txBody>
-          <a:bodyPr wrap="square" rtlCol="0" anchor="ctr"/>
-          <a:lstStyle/>
-          <a:p>
-            <a:pPr indent="0" marL="0">
-              <a:buNone/>
-            </a:pPr>
-            <a:r>
-              <a:rPr lang="en-US" sz="1400" i="1" dirty="0">
-                <a:solidFill>
-                  <a:srgbClr val="837C6E"/>
-                </a:solidFill>
-                <a:latin typeface="Calibri" pitchFamily="34" charset="0"/>
-                <a:ea typeface="Calibri" pitchFamily="34" charset="-122"/>
-                <a:cs typeface="Calibri" pitchFamily="34" charset="-120"/>
-              </a:rPr>
-              <a:t>Numbers are computed by the same code that runs the demo — conservative, and re-derivable, not slideware.</a:t>
-            </a:r>
-            <a:endParaRPr lang="en-US" sz="1400" dirty="0"/>
+              <a:t>A calibration curve and Brier score back it — reported alongside the flattering numbers, not instead of them.</a:t>
+            </a:r>
+            <a:endParaRPr lang="en-US" sz="1150" dirty="0"/>
           </a:p>
         </p:txBody>
       </p:sp>

--- a/docs/Nischay_SBI_Hackathon.pptx
+++ b/docs/Nischay_SBI_Hackathon.pptx
@@ -3530,24 +3530,24 @@
         </p:nvSpPr>
         <p:spPr>
           <a:xfrm>
-            <a:off x="640080" y="1737360"/>
-            <a:ext cx="10972800" cy="2194560"/>
-          </a:xfrm>
-          <a:prstGeom prst="rect">
-            <a:avLst/>
-          </a:prstGeom>
-          <a:noFill/>
-          <a:ln/>
-        </p:spPr>
-        <p:txBody>
-          <a:bodyPr wrap="square" rtlCol="0" anchor="ctr"/>
-          <a:lstStyle/>
-          <a:p>
-            <a:pPr indent="0" marL="0">
-              <a:buNone/>
-            </a:pPr>
-            <a:r>
-              <a:rPr lang="en-US" sz="16500" b="1" dirty="0">
+            <a:off x="640080" y="1600200"/>
+            <a:ext cx="10972800" cy="2468880"/>
+          </a:xfrm>
+          <a:prstGeom prst="rect">
+            <a:avLst/>
+          </a:prstGeom>
+          <a:noFill/>
+          <a:ln/>
+        </p:spPr>
+        <p:txBody>
+          <a:bodyPr wrap="square" rtlCol="0" anchor="ctr"/>
+          <a:lstStyle/>
+          <a:p>
+            <a:pPr indent="0" marL="0">
+              <a:buNone/>
+            </a:pPr>
+            <a:r>
+              <a:rPr lang="en-US" sz="15000" b="1" dirty="0">
                 <a:solidFill>
                   <a:srgbClr val="C4694A"/>
                 </a:solidFill>
@@ -3557,7 +3557,7 @@
               </a:rPr>
               <a:t>72.85%</a:t>
             </a:r>
-            <a:endParaRPr lang="en-US" sz="16500" dirty="0"/>
+            <a:endParaRPr lang="en-US" sz="15000" dirty="0"/>
           </a:p>
         </p:txBody>
       </p:sp>
